--- a/reports/NPS_Storytelling_Apresentação.pptx
+++ b/reports/NPS_Storytelling_Apresentação.pptx
@@ -5035,7 +5035,7 @@
               <a:buNone/>
             </a:pPr>
             <a:r>
-              <a:rPr b="1" i="0" lang="en-US" sz="2600" u="none" cap="none" strike="noStrike">
+              <a:rPr b="1" lang="en-US" sz="2600">
                 <a:solidFill>
                   <a:srgbClr val="FFFFFF"/>
                 </a:solidFill>
@@ -5044,35 +5044,10 @@
                 <a:cs typeface="Calibri"/>
                 <a:sym typeface="Calibri"/>
               </a:rPr>
-              <a:t>Não é sobre tecnologia.</a:t>
-            </a:r>
-            <a:endParaRPr b="0" i="0" sz="2600" u="none" cap="none" strike="noStrike">
-              <a:solidFill>
-                <a:schemeClr val="dk1"/>
-              </a:solidFill>
-              <a:latin typeface="Calibri"/>
-              <a:ea typeface="Calibri"/>
-              <a:cs typeface="Calibri"/>
-              <a:sym typeface="Calibri"/>
-            </a:endParaRPr>
-          </a:p>
-          <a:p>
-            <a:pPr indent="0" lvl="0" marL="0" marR="0" rtl="0" algn="l">
-              <a:spcBef>
-                <a:spcPts val="0"/>
-              </a:spcBef>
-              <a:spcAft>
-                <a:spcPts val="0"/>
-              </a:spcAft>
-              <a:buClr>
-                <a:srgbClr val="FFFFFF"/>
-              </a:buClr>
-              <a:buSzPts val="2600"/>
-              <a:buFont typeface="Calibri"/>
-              <a:buNone/>
-            </a:pPr>
-            <a:r>
-              <a:rPr b="1" i="0" lang="en-US" sz="2600" u="none" cap="none" strike="noStrike">
+              <a:t>O atraso </a:t>
+            </a:r>
+            <a:r>
+              <a:rPr b="1" lang="en-US" sz="2600">
                 <a:solidFill>
                   <a:srgbClr val="FFFFFF"/>
                 </a:solidFill>
@@ -5081,7 +5056,43 @@
                 <a:cs typeface="Calibri"/>
                 <a:sym typeface="Calibri"/>
               </a:rPr>
-              <a:t>É sobre entregar o que foi prometido.</a:t>
+              <a:t>Logístico</a:t>
+            </a:r>
+            <a:r>
+              <a:rPr b="1" lang="en-US" sz="2600">
+                <a:solidFill>
+                  <a:srgbClr val="FFFFFF"/>
+                </a:solidFill>
+                <a:latin typeface="Calibri"/>
+                <a:ea typeface="Calibri"/>
+                <a:cs typeface="Calibri"/>
+                <a:sym typeface="Calibri"/>
+              </a:rPr>
+              <a:t> é o principal gatilho da </a:t>
+            </a:r>
+            <a:r>
+              <a:rPr b="1" lang="en-US" sz="2600">
+                <a:solidFill>
+                  <a:srgbClr val="FFFFFF"/>
+                </a:solidFill>
+                <a:latin typeface="Calibri"/>
+                <a:ea typeface="Calibri"/>
+                <a:cs typeface="Calibri"/>
+                <a:sym typeface="Calibri"/>
+              </a:rPr>
+              <a:t>insatisfação</a:t>
+            </a:r>
+            <a:r>
+              <a:rPr b="1" lang="en-US" sz="2600">
+                <a:solidFill>
+                  <a:srgbClr val="FFFFFF"/>
+                </a:solidFill>
+                <a:latin typeface="Calibri"/>
+                <a:ea typeface="Calibri"/>
+                <a:cs typeface="Calibri"/>
+                <a:sym typeface="Calibri"/>
+              </a:rPr>
+              <a:t> dos clientes! </a:t>
             </a:r>
             <a:endParaRPr b="0" i="0" sz="2600" u="none" cap="none" strike="noStrike">
               <a:solidFill>

--- a/reports/NPS_Storytelling_Apresentação.pptx
+++ b/reports/NPS_Storytelling_Apresentação.pptx
@@ -309,13 +309,20 @@
           </a:bodyPr>
           <a:lstStyle>
             <a:lvl1pPr lvl="0" marR="0" rtl="0" algn="l">
-              <a:spcBef>
-                <a:spcPts val="0"/>
-              </a:spcBef>
-              <a:spcAft>
-                <a:spcPts val="0"/>
-              </a:spcAft>
+              <a:lnSpc>
+                <a:spcPct val="100000"/>
+              </a:lnSpc>
+              <a:spcBef>
+                <a:spcPts val="0"/>
+              </a:spcBef>
+              <a:spcAft>
+                <a:spcPts val="0"/>
+              </a:spcAft>
+              <a:buClr>
+                <a:srgbClr val="000000"/>
+              </a:buClr>
               <a:buSzPts val="1400"/>
+              <a:buFont typeface="Arial"/>
               <a:buNone/>
               <a:defRPr b="0" i="0" sz="1200" u="none" cap="none" strike="noStrike">
                 <a:solidFill>
@@ -328,13 +335,20 @@
               </a:defRPr>
             </a:lvl1pPr>
             <a:lvl2pPr lvl="1" marR="0" rtl="0" algn="l">
-              <a:spcBef>
-                <a:spcPts val="0"/>
-              </a:spcBef>
-              <a:spcAft>
-                <a:spcPts val="0"/>
-              </a:spcAft>
+              <a:lnSpc>
+                <a:spcPct val="100000"/>
+              </a:lnSpc>
+              <a:spcBef>
+                <a:spcPts val="0"/>
+              </a:spcBef>
+              <a:spcAft>
+                <a:spcPts val="0"/>
+              </a:spcAft>
+              <a:buClr>
+                <a:srgbClr val="000000"/>
+              </a:buClr>
               <a:buSzPts val="1400"/>
+              <a:buFont typeface="Arial"/>
               <a:buNone/>
               <a:defRPr b="0" i="0" sz="1800" u="none" cap="none" strike="noStrike">
                 <a:solidFill>
@@ -347,13 +361,20 @@
               </a:defRPr>
             </a:lvl2pPr>
             <a:lvl3pPr lvl="2" marR="0" rtl="0" algn="l">
-              <a:spcBef>
-                <a:spcPts val="0"/>
-              </a:spcBef>
-              <a:spcAft>
-                <a:spcPts val="0"/>
-              </a:spcAft>
+              <a:lnSpc>
+                <a:spcPct val="100000"/>
+              </a:lnSpc>
+              <a:spcBef>
+                <a:spcPts val="0"/>
+              </a:spcBef>
+              <a:spcAft>
+                <a:spcPts val="0"/>
+              </a:spcAft>
+              <a:buClr>
+                <a:srgbClr val="000000"/>
+              </a:buClr>
               <a:buSzPts val="1400"/>
+              <a:buFont typeface="Arial"/>
               <a:buNone/>
               <a:defRPr b="0" i="0" sz="1800" u="none" cap="none" strike="noStrike">
                 <a:solidFill>
@@ -366,13 +387,20 @@
               </a:defRPr>
             </a:lvl3pPr>
             <a:lvl4pPr lvl="3" marR="0" rtl="0" algn="l">
-              <a:spcBef>
-                <a:spcPts val="0"/>
-              </a:spcBef>
-              <a:spcAft>
-                <a:spcPts val="0"/>
-              </a:spcAft>
+              <a:lnSpc>
+                <a:spcPct val="100000"/>
+              </a:lnSpc>
+              <a:spcBef>
+                <a:spcPts val="0"/>
+              </a:spcBef>
+              <a:spcAft>
+                <a:spcPts val="0"/>
+              </a:spcAft>
+              <a:buClr>
+                <a:srgbClr val="000000"/>
+              </a:buClr>
               <a:buSzPts val="1400"/>
+              <a:buFont typeface="Arial"/>
               <a:buNone/>
               <a:defRPr b="0" i="0" sz="1800" u="none" cap="none" strike="noStrike">
                 <a:solidFill>
@@ -385,13 +413,20 @@
               </a:defRPr>
             </a:lvl4pPr>
             <a:lvl5pPr lvl="4" marR="0" rtl="0" algn="l">
-              <a:spcBef>
-                <a:spcPts val="0"/>
-              </a:spcBef>
-              <a:spcAft>
-                <a:spcPts val="0"/>
-              </a:spcAft>
+              <a:lnSpc>
+                <a:spcPct val="100000"/>
+              </a:lnSpc>
+              <a:spcBef>
+                <a:spcPts val="0"/>
+              </a:spcBef>
+              <a:spcAft>
+                <a:spcPts val="0"/>
+              </a:spcAft>
+              <a:buClr>
+                <a:srgbClr val="000000"/>
+              </a:buClr>
               <a:buSzPts val="1400"/>
+              <a:buFont typeface="Arial"/>
               <a:buNone/>
               <a:defRPr b="0" i="0" sz="1800" u="none" cap="none" strike="noStrike">
                 <a:solidFill>
@@ -404,13 +439,20 @@
               </a:defRPr>
             </a:lvl5pPr>
             <a:lvl6pPr lvl="5" marR="0" rtl="0" algn="l">
-              <a:spcBef>
-                <a:spcPts val="0"/>
-              </a:spcBef>
-              <a:spcAft>
-                <a:spcPts val="0"/>
-              </a:spcAft>
+              <a:lnSpc>
+                <a:spcPct val="100000"/>
+              </a:lnSpc>
+              <a:spcBef>
+                <a:spcPts val="0"/>
+              </a:spcBef>
+              <a:spcAft>
+                <a:spcPts val="0"/>
+              </a:spcAft>
+              <a:buClr>
+                <a:srgbClr val="000000"/>
+              </a:buClr>
               <a:buSzPts val="1400"/>
+              <a:buFont typeface="Arial"/>
               <a:buNone/>
               <a:defRPr b="0" i="0" sz="1800" u="none" cap="none" strike="noStrike">
                 <a:solidFill>
@@ -423,13 +465,20 @@
               </a:defRPr>
             </a:lvl6pPr>
             <a:lvl7pPr lvl="6" marR="0" rtl="0" algn="l">
-              <a:spcBef>
-                <a:spcPts val="0"/>
-              </a:spcBef>
-              <a:spcAft>
-                <a:spcPts val="0"/>
-              </a:spcAft>
+              <a:lnSpc>
+                <a:spcPct val="100000"/>
+              </a:lnSpc>
+              <a:spcBef>
+                <a:spcPts val="0"/>
+              </a:spcBef>
+              <a:spcAft>
+                <a:spcPts val="0"/>
+              </a:spcAft>
+              <a:buClr>
+                <a:srgbClr val="000000"/>
+              </a:buClr>
               <a:buSzPts val="1400"/>
+              <a:buFont typeface="Arial"/>
               <a:buNone/>
               <a:defRPr b="0" i="0" sz="1800" u="none" cap="none" strike="noStrike">
                 <a:solidFill>
@@ -442,13 +491,20 @@
               </a:defRPr>
             </a:lvl7pPr>
             <a:lvl8pPr lvl="7" marR="0" rtl="0" algn="l">
-              <a:spcBef>
-                <a:spcPts val="0"/>
-              </a:spcBef>
-              <a:spcAft>
-                <a:spcPts val="0"/>
-              </a:spcAft>
+              <a:lnSpc>
+                <a:spcPct val="100000"/>
+              </a:lnSpc>
+              <a:spcBef>
+                <a:spcPts val="0"/>
+              </a:spcBef>
+              <a:spcAft>
+                <a:spcPts val="0"/>
+              </a:spcAft>
+              <a:buClr>
+                <a:srgbClr val="000000"/>
+              </a:buClr>
               <a:buSzPts val="1400"/>
+              <a:buFont typeface="Arial"/>
               <a:buNone/>
               <a:defRPr b="0" i="0" sz="1800" u="none" cap="none" strike="noStrike">
                 <a:solidFill>
@@ -461,13 +517,20 @@
               </a:defRPr>
             </a:lvl8pPr>
             <a:lvl9pPr lvl="8" marR="0" rtl="0" algn="l">
-              <a:spcBef>
-                <a:spcPts val="0"/>
-              </a:spcBef>
-              <a:spcAft>
-                <a:spcPts val="0"/>
-              </a:spcAft>
+              <a:lnSpc>
+                <a:spcPct val="100000"/>
+              </a:lnSpc>
+              <a:spcBef>
+                <a:spcPts val="0"/>
+              </a:spcBef>
+              <a:spcAft>
+                <a:spcPts val="0"/>
+              </a:spcAft>
+              <a:buClr>
+                <a:srgbClr val="000000"/>
+              </a:buClr>
               <a:buSzPts val="1400"/>
+              <a:buFont typeface="Arial"/>
               <a:buNone/>
               <a:defRPr b="0" i="0" sz="1800" u="none" cap="none" strike="noStrike">
                 <a:solidFill>
@@ -510,13 +573,20 @@
           </a:bodyPr>
           <a:lstStyle>
             <a:lvl1pPr lvl="0" marR="0" rtl="0" algn="r">
-              <a:spcBef>
-                <a:spcPts val="0"/>
-              </a:spcBef>
-              <a:spcAft>
-                <a:spcPts val="0"/>
-              </a:spcAft>
+              <a:lnSpc>
+                <a:spcPct val="100000"/>
+              </a:lnSpc>
+              <a:spcBef>
+                <a:spcPts val="0"/>
+              </a:spcBef>
+              <a:spcAft>
+                <a:spcPts val="0"/>
+              </a:spcAft>
+              <a:buClr>
+                <a:srgbClr val="000000"/>
+              </a:buClr>
               <a:buSzPts val="1400"/>
+              <a:buFont typeface="Arial"/>
               <a:buNone/>
               <a:defRPr b="0" i="0" sz="1200" u="none" cap="none" strike="noStrike">
                 <a:solidFill>
@@ -529,13 +599,20 @@
               </a:defRPr>
             </a:lvl1pPr>
             <a:lvl2pPr lvl="1" marR="0" rtl="0" algn="l">
-              <a:spcBef>
-                <a:spcPts val="0"/>
-              </a:spcBef>
-              <a:spcAft>
-                <a:spcPts val="0"/>
-              </a:spcAft>
+              <a:lnSpc>
+                <a:spcPct val="100000"/>
+              </a:lnSpc>
+              <a:spcBef>
+                <a:spcPts val="0"/>
+              </a:spcBef>
+              <a:spcAft>
+                <a:spcPts val="0"/>
+              </a:spcAft>
+              <a:buClr>
+                <a:srgbClr val="000000"/>
+              </a:buClr>
               <a:buSzPts val="1400"/>
+              <a:buFont typeface="Arial"/>
               <a:buNone/>
               <a:defRPr b="0" i="0" sz="1800" u="none" cap="none" strike="noStrike">
                 <a:solidFill>
@@ -548,13 +625,20 @@
               </a:defRPr>
             </a:lvl2pPr>
             <a:lvl3pPr lvl="2" marR="0" rtl="0" algn="l">
-              <a:spcBef>
-                <a:spcPts val="0"/>
-              </a:spcBef>
-              <a:spcAft>
-                <a:spcPts val="0"/>
-              </a:spcAft>
+              <a:lnSpc>
+                <a:spcPct val="100000"/>
+              </a:lnSpc>
+              <a:spcBef>
+                <a:spcPts val="0"/>
+              </a:spcBef>
+              <a:spcAft>
+                <a:spcPts val="0"/>
+              </a:spcAft>
+              <a:buClr>
+                <a:srgbClr val="000000"/>
+              </a:buClr>
               <a:buSzPts val="1400"/>
+              <a:buFont typeface="Arial"/>
               <a:buNone/>
               <a:defRPr b="0" i="0" sz="1800" u="none" cap="none" strike="noStrike">
                 <a:solidFill>
@@ -567,13 +651,20 @@
               </a:defRPr>
             </a:lvl3pPr>
             <a:lvl4pPr lvl="3" marR="0" rtl="0" algn="l">
-              <a:spcBef>
-                <a:spcPts val="0"/>
-              </a:spcBef>
-              <a:spcAft>
-                <a:spcPts val="0"/>
-              </a:spcAft>
+              <a:lnSpc>
+                <a:spcPct val="100000"/>
+              </a:lnSpc>
+              <a:spcBef>
+                <a:spcPts val="0"/>
+              </a:spcBef>
+              <a:spcAft>
+                <a:spcPts val="0"/>
+              </a:spcAft>
+              <a:buClr>
+                <a:srgbClr val="000000"/>
+              </a:buClr>
               <a:buSzPts val="1400"/>
+              <a:buFont typeface="Arial"/>
               <a:buNone/>
               <a:defRPr b="0" i="0" sz="1800" u="none" cap="none" strike="noStrike">
                 <a:solidFill>
@@ -586,13 +677,20 @@
               </a:defRPr>
             </a:lvl4pPr>
             <a:lvl5pPr lvl="4" marR="0" rtl="0" algn="l">
-              <a:spcBef>
-                <a:spcPts val="0"/>
-              </a:spcBef>
-              <a:spcAft>
-                <a:spcPts val="0"/>
-              </a:spcAft>
+              <a:lnSpc>
+                <a:spcPct val="100000"/>
+              </a:lnSpc>
+              <a:spcBef>
+                <a:spcPts val="0"/>
+              </a:spcBef>
+              <a:spcAft>
+                <a:spcPts val="0"/>
+              </a:spcAft>
+              <a:buClr>
+                <a:srgbClr val="000000"/>
+              </a:buClr>
               <a:buSzPts val="1400"/>
+              <a:buFont typeface="Arial"/>
               <a:buNone/>
               <a:defRPr b="0" i="0" sz="1800" u="none" cap="none" strike="noStrike">
                 <a:solidFill>
@@ -605,13 +703,20 @@
               </a:defRPr>
             </a:lvl5pPr>
             <a:lvl6pPr lvl="5" marR="0" rtl="0" algn="l">
-              <a:spcBef>
-                <a:spcPts val="0"/>
-              </a:spcBef>
-              <a:spcAft>
-                <a:spcPts val="0"/>
-              </a:spcAft>
+              <a:lnSpc>
+                <a:spcPct val="100000"/>
+              </a:lnSpc>
+              <a:spcBef>
+                <a:spcPts val="0"/>
+              </a:spcBef>
+              <a:spcAft>
+                <a:spcPts val="0"/>
+              </a:spcAft>
+              <a:buClr>
+                <a:srgbClr val="000000"/>
+              </a:buClr>
               <a:buSzPts val="1400"/>
+              <a:buFont typeface="Arial"/>
               <a:buNone/>
               <a:defRPr b="0" i="0" sz="1800" u="none" cap="none" strike="noStrike">
                 <a:solidFill>
@@ -624,13 +729,20 @@
               </a:defRPr>
             </a:lvl6pPr>
             <a:lvl7pPr lvl="6" marR="0" rtl="0" algn="l">
-              <a:spcBef>
-                <a:spcPts val="0"/>
-              </a:spcBef>
-              <a:spcAft>
-                <a:spcPts val="0"/>
-              </a:spcAft>
+              <a:lnSpc>
+                <a:spcPct val="100000"/>
+              </a:lnSpc>
+              <a:spcBef>
+                <a:spcPts val="0"/>
+              </a:spcBef>
+              <a:spcAft>
+                <a:spcPts val="0"/>
+              </a:spcAft>
+              <a:buClr>
+                <a:srgbClr val="000000"/>
+              </a:buClr>
               <a:buSzPts val="1400"/>
+              <a:buFont typeface="Arial"/>
               <a:buNone/>
               <a:defRPr b="0" i="0" sz="1800" u="none" cap="none" strike="noStrike">
                 <a:solidFill>
@@ -643,13 +755,20 @@
               </a:defRPr>
             </a:lvl7pPr>
             <a:lvl8pPr lvl="7" marR="0" rtl="0" algn="l">
-              <a:spcBef>
-                <a:spcPts val="0"/>
-              </a:spcBef>
-              <a:spcAft>
-                <a:spcPts val="0"/>
-              </a:spcAft>
+              <a:lnSpc>
+                <a:spcPct val="100000"/>
+              </a:lnSpc>
+              <a:spcBef>
+                <a:spcPts val="0"/>
+              </a:spcBef>
+              <a:spcAft>
+                <a:spcPts val="0"/>
+              </a:spcAft>
+              <a:buClr>
+                <a:srgbClr val="000000"/>
+              </a:buClr>
               <a:buSzPts val="1400"/>
+              <a:buFont typeface="Arial"/>
               <a:buNone/>
               <a:defRPr b="0" i="0" sz="1800" u="none" cap="none" strike="noStrike">
                 <a:solidFill>
@@ -662,13 +781,20 @@
               </a:defRPr>
             </a:lvl8pPr>
             <a:lvl9pPr lvl="8" marR="0" rtl="0" algn="l">
-              <a:spcBef>
-                <a:spcPts val="0"/>
-              </a:spcBef>
-              <a:spcAft>
-                <a:spcPts val="0"/>
-              </a:spcAft>
+              <a:lnSpc>
+                <a:spcPct val="100000"/>
+              </a:lnSpc>
+              <a:spcBef>
+                <a:spcPts val="0"/>
+              </a:spcBef>
+              <a:spcAft>
+                <a:spcPts val="0"/>
+              </a:spcAft>
+              <a:buClr>
+                <a:srgbClr val="000000"/>
+              </a:buClr>
               <a:buSzPts val="1400"/>
+              <a:buFont typeface="Arial"/>
               <a:buNone/>
               <a:defRPr b="0" i="0" sz="1800" u="none" cap="none" strike="noStrike">
                 <a:solidFill>
@@ -756,13 +882,20 @@
           </a:bodyPr>
           <a:lstStyle>
             <a:lvl1pPr indent="-228600" lvl="0" marL="457200" marR="0" rtl="0" algn="l">
-              <a:spcBef>
-                <a:spcPts val="0"/>
-              </a:spcBef>
-              <a:spcAft>
-                <a:spcPts val="0"/>
-              </a:spcAft>
+              <a:lnSpc>
+                <a:spcPct val="100000"/>
+              </a:lnSpc>
+              <a:spcBef>
+                <a:spcPts val="0"/>
+              </a:spcBef>
+              <a:spcAft>
+                <a:spcPts val="0"/>
+              </a:spcAft>
+              <a:buClr>
+                <a:srgbClr val="000000"/>
+              </a:buClr>
               <a:buSzPts val="1400"/>
+              <a:buFont typeface="Arial"/>
               <a:buNone/>
               <a:defRPr b="0" i="0" sz="1200" u="none" cap="none" strike="noStrike">
                 <a:solidFill>
@@ -775,13 +908,20 @@
               </a:defRPr>
             </a:lvl1pPr>
             <a:lvl2pPr indent="-228600" lvl="1" marL="914400" marR="0" rtl="0" algn="l">
-              <a:spcBef>
-                <a:spcPts val="0"/>
-              </a:spcBef>
-              <a:spcAft>
-                <a:spcPts val="0"/>
-              </a:spcAft>
+              <a:lnSpc>
+                <a:spcPct val="100000"/>
+              </a:lnSpc>
+              <a:spcBef>
+                <a:spcPts val="0"/>
+              </a:spcBef>
+              <a:spcAft>
+                <a:spcPts val="0"/>
+              </a:spcAft>
+              <a:buClr>
+                <a:srgbClr val="000000"/>
+              </a:buClr>
               <a:buSzPts val="1400"/>
+              <a:buFont typeface="Arial"/>
               <a:buNone/>
               <a:defRPr b="0" i="0" sz="1200" u="none" cap="none" strike="noStrike">
                 <a:solidFill>
@@ -794,13 +934,20 @@
               </a:defRPr>
             </a:lvl2pPr>
             <a:lvl3pPr indent="-228600" lvl="2" marL="1371600" marR="0" rtl="0" algn="l">
-              <a:spcBef>
-                <a:spcPts val="0"/>
-              </a:spcBef>
-              <a:spcAft>
-                <a:spcPts val="0"/>
-              </a:spcAft>
+              <a:lnSpc>
+                <a:spcPct val="100000"/>
+              </a:lnSpc>
+              <a:spcBef>
+                <a:spcPts val="0"/>
+              </a:spcBef>
+              <a:spcAft>
+                <a:spcPts val="0"/>
+              </a:spcAft>
+              <a:buClr>
+                <a:srgbClr val="000000"/>
+              </a:buClr>
               <a:buSzPts val="1400"/>
+              <a:buFont typeface="Arial"/>
               <a:buNone/>
               <a:defRPr b="0" i="0" sz="1200" u="none" cap="none" strike="noStrike">
                 <a:solidFill>
@@ -813,13 +960,20 @@
               </a:defRPr>
             </a:lvl3pPr>
             <a:lvl4pPr indent="-228600" lvl="3" marL="1828800" marR="0" rtl="0" algn="l">
-              <a:spcBef>
-                <a:spcPts val="0"/>
-              </a:spcBef>
-              <a:spcAft>
-                <a:spcPts val="0"/>
-              </a:spcAft>
+              <a:lnSpc>
+                <a:spcPct val="100000"/>
+              </a:lnSpc>
+              <a:spcBef>
+                <a:spcPts val="0"/>
+              </a:spcBef>
+              <a:spcAft>
+                <a:spcPts val="0"/>
+              </a:spcAft>
+              <a:buClr>
+                <a:srgbClr val="000000"/>
+              </a:buClr>
               <a:buSzPts val="1400"/>
+              <a:buFont typeface="Arial"/>
               <a:buNone/>
               <a:defRPr b="0" i="0" sz="1200" u="none" cap="none" strike="noStrike">
                 <a:solidFill>
@@ -832,13 +986,20 @@
               </a:defRPr>
             </a:lvl4pPr>
             <a:lvl5pPr indent="-228600" lvl="4" marL="2286000" marR="0" rtl="0" algn="l">
-              <a:spcBef>
-                <a:spcPts val="0"/>
-              </a:spcBef>
-              <a:spcAft>
-                <a:spcPts val="0"/>
-              </a:spcAft>
+              <a:lnSpc>
+                <a:spcPct val="100000"/>
+              </a:lnSpc>
+              <a:spcBef>
+                <a:spcPts val="0"/>
+              </a:spcBef>
+              <a:spcAft>
+                <a:spcPts val="0"/>
+              </a:spcAft>
+              <a:buClr>
+                <a:srgbClr val="000000"/>
+              </a:buClr>
               <a:buSzPts val="1400"/>
+              <a:buFont typeface="Arial"/>
               <a:buNone/>
               <a:defRPr b="0" i="0" sz="1200" u="none" cap="none" strike="noStrike">
                 <a:solidFill>
@@ -851,13 +1012,20 @@
               </a:defRPr>
             </a:lvl5pPr>
             <a:lvl6pPr indent="-228600" lvl="5" marL="2743200" marR="0" rtl="0" algn="l">
-              <a:spcBef>
-                <a:spcPts val="0"/>
-              </a:spcBef>
-              <a:spcAft>
-                <a:spcPts val="0"/>
-              </a:spcAft>
+              <a:lnSpc>
+                <a:spcPct val="100000"/>
+              </a:lnSpc>
+              <a:spcBef>
+                <a:spcPts val="0"/>
+              </a:spcBef>
+              <a:spcAft>
+                <a:spcPts val="0"/>
+              </a:spcAft>
+              <a:buClr>
+                <a:srgbClr val="000000"/>
+              </a:buClr>
               <a:buSzPts val="1400"/>
+              <a:buFont typeface="Arial"/>
               <a:buNone/>
               <a:defRPr b="0" i="0" sz="1200" u="none" cap="none" strike="noStrike">
                 <a:solidFill>
@@ -870,13 +1038,20 @@
               </a:defRPr>
             </a:lvl6pPr>
             <a:lvl7pPr indent="-228600" lvl="6" marL="3200400" marR="0" rtl="0" algn="l">
-              <a:spcBef>
-                <a:spcPts val="0"/>
-              </a:spcBef>
-              <a:spcAft>
-                <a:spcPts val="0"/>
-              </a:spcAft>
+              <a:lnSpc>
+                <a:spcPct val="100000"/>
+              </a:lnSpc>
+              <a:spcBef>
+                <a:spcPts val="0"/>
+              </a:spcBef>
+              <a:spcAft>
+                <a:spcPts val="0"/>
+              </a:spcAft>
+              <a:buClr>
+                <a:srgbClr val="000000"/>
+              </a:buClr>
               <a:buSzPts val="1400"/>
+              <a:buFont typeface="Arial"/>
               <a:buNone/>
               <a:defRPr b="0" i="0" sz="1200" u="none" cap="none" strike="noStrike">
                 <a:solidFill>
@@ -889,13 +1064,20 @@
               </a:defRPr>
             </a:lvl7pPr>
             <a:lvl8pPr indent="-228600" lvl="7" marL="3657600" marR="0" rtl="0" algn="l">
-              <a:spcBef>
-                <a:spcPts val="0"/>
-              </a:spcBef>
-              <a:spcAft>
-                <a:spcPts val="0"/>
-              </a:spcAft>
+              <a:lnSpc>
+                <a:spcPct val="100000"/>
+              </a:lnSpc>
+              <a:spcBef>
+                <a:spcPts val="0"/>
+              </a:spcBef>
+              <a:spcAft>
+                <a:spcPts val="0"/>
+              </a:spcAft>
+              <a:buClr>
+                <a:srgbClr val="000000"/>
+              </a:buClr>
               <a:buSzPts val="1400"/>
+              <a:buFont typeface="Arial"/>
               <a:buNone/>
               <a:defRPr b="0" i="0" sz="1200" u="none" cap="none" strike="noStrike">
                 <a:solidFill>
@@ -908,13 +1090,20 @@
               </a:defRPr>
             </a:lvl8pPr>
             <a:lvl9pPr indent="-228600" lvl="8" marL="4114800" marR="0" rtl="0" algn="l">
-              <a:spcBef>
-                <a:spcPts val="0"/>
-              </a:spcBef>
-              <a:spcAft>
-                <a:spcPts val="0"/>
-              </a:spcAft>
+              <a:lnSpc>
+                <a:spcPct val="100000"/>
+              </a:lnSpc>
+              <a:spcBef>
+                <a:spcPts val="0"/>
+              </a:spcBef>
+              <a:spcAft>
+                <a:spcPts val="0"/>
+              </a:spcAft>
+              <a:buClr>
+                <a:srgbClr val="000000"/>
+              </a:buClr>
               <a:buSzPts val="1400"/>
+              <a:buFont typeface="Arial"/>
               <a:buNone/>
               <a:defRPr b="0" i="0" sz="1200" u="none" cap="none" strike="noStrike">
                 <a:solidFill>
@@ -957,13 +1146,20 @@
           </a:bodyPr>
           <a:lstStyle>
             <a:lvl1pPr lvl="0" marR="0" rtl="0" algn="l">
-              <a:spcBef>
-                <a:spcPts val="0"/>
-              </a:spcBef>
-              <a:spcAft>
-                <a:spcPts val="0"/>
-              </a:spcAft>
+              <a:lnSpc>
+                <a:spcPct val="100000"/>
+              </a:lnSpc>
+              <a:spcBef>
+                <a:spcPts val="0"/>
+              </a:spcBef>
+              <a:spcAft>
+                <a:spcPts val="0"/>
+              </a:spcAft>
+              <a:buClr>
+                <a:srgbClr val="000000"/>
+              </a:buClr>
               <a:buSzPts val="1400"/>
+              <a:buFont typeface="Arial"/>
               <a:buNone/>
               <a:defRPr b="0" i="0" sz="1200" u="none" cap="none" strike="noStrike">
                 <a:solidFill>
@@ -976,13 +1172,20 @@
               </a:defRPr>
             </a:lvl1pPr>
             <a:lvl2pPr lvl="1" marR="0" rtl="0" algn="l">
-              <a:spcBef>
-                <a:spcPts val="0"/>
-              </a:spcBef>
-              <a:spcAft>
-                <a:spcPts val="0"/>
-              </a:spcAft>
+              <a:lnSpc>
+                <a:spcPct val="100000"/>
+              </a:lnSpc>
+              <a:spcBef>
+                <a:spcPts val="0"/>
+              </a:spcBef>
+              <a:spcAft>
+                <a:spcPts val="0"/>
+              </a:spcAft>
+              <a:buClr>
+                <a:srgbClr val="000000"/>
+              </a:buClr>
               <a:buSzPts val="1400"/>
+              <a:buFont typeface="Arial"/>
               <a:buNone/>
               <a:defRPr b="0" i="0" sz="1800" u="none" cap="none" strike="noStrike">
                 <a:solidFill>
@@ -995,13 +1198,20 @@
               </a:defRPr>
             </a:lvl2pPr>
             <a:lvl3pPr lvl="2" marR="0" rtl="0" algn="l">
-              <a:spcBef>
-                <a:spcPts val="0"/>
-              </a:spcBef>
-              <a:spcAft>
-                <a:spcPts val="0"/>
-              </a:spcAft>
+              <a:lnSpc>
+                <a:spcPct val="100000"/>
+              </a:lnSpc>
+              <a:spcBef>
+                <a:spcPts val="0"/>
+              </a:spcBef>
+              <a:spcAft>
+                <a:spcPts val="0"/>
+              </a:spcAft>
+              <a:buClr>
+                <a:srgbClr val="000000"/>
+              </a:buClr>
               <a:buSzPts val="1400"/>
+              <a:buFont typeface="Arial"/>
               <a:buNone/>
               <a:defRPr b="0" i="0" sz="1800" u="none" cap="none" strike="noStrike">
                 <a:solidFill>
@@ -1014,13 +1224,20 @@
               </a:defRPr>
             </a:lvl3pPr>
             <a:lvl4pPr lvl="3" marR="0" rtl="0" algn="l">
-              <a:spcBef>
-                <a:spcPts val="0"/>
-              </a:spcBef>
-              <a:spcAft>
-                <a:spcPts val="0"/>
-              </a:spcAft>
+              <a:lnSpc>
+                <a:spcPct val="100000"/>
+              </a:lnSpc>
+              <a:spcBef>
+                <a:spcPts val="0"/>
+              </a:spcBef>
+              <a:spcAft>
+                <a:spcPts val="0"/>
+              </a:spcAft>
+              <a:buClr>
+                <a:srgbClr val="000000"/>
+              </a:buClr>
               <a:buSzPts val="1400"/>
+              <a:buFont typeface="Arial"/>
               <a:buNone/>
               <a:defRPr b="0" i="0" sz="1800" u="none" cap="none" strike="noStrike">
                 <a:solidFill>
@@ -1033,13 +1250,20 @@
               </a:defRPr>
             </a:lvl4pPr>
             <a:lvl5pPr lvl="4" marR="0" rtl="0" algn="l">
-              <a:spcBef>
-                <a:spcPts val="0"/>
-              </a:spcBef>
-              <a:spcAft>
-                <a:spcPts val="0"/>
-              </a:spcAft>
+              <a:lnSpc>
+                <a:spcPct val="100000"/>
+              </a:lnSpc>
+              <a:spcBef>
+                <a:spcPts val="0"/>
+              </a:spcBef>
+              <a:spcAft>
+                <a:spcPts val="0"/>
+              </a:spcAft>
+              <a:buClr>
+                <a:srgbClr val="000000"/>
+              </a:buClr>
               <a:buSzPts val="1400"/>
+              <a:buFont typeface="Arial"/>
               <a:buNone/>
               <a:defRPr b="0" i="0" sz="1800" u="none" cap="none" strike="noStrike">
                 <a:solidFill>
@@ -1052,13 +1276,20 @@
               </a:defRPr>
             </a:lvl5pPr>
             <a:lvl6pPr lvl="5" marR="0" rtl="0" algn="l">
-              <a:spcBef>
-                <a:spcPts val="0"/>
-              </a:spcBef>
-              <a:spcAft>
-                <a:spcPts val="0"/>
-              </a:spcAft>
+              <a:lnSpc>
+                <a:spcPct val="100000"/>
+              </a:lnSpc>
+              <a:spcBef>
+                <a:spcPts val="0"/>
+              </a:spcBef>
+              <a:spcAft>
+                <a:spcPts val="0"/>
+              </a:spcAft>
+              <a:buClr>
+                <a:srgbClr val="000000"/>
+              </a:buClr>
               <a:buSzPts val="1400"/>
+              <a:buFont typeface="Arial"/>
               <a:buNone/>
               <a:defRPr b="0" i="0" sz="1800" u="none" cap="none" strike="noStrike">
                 <a:solidFill>
@@ -1071,13 +1302,20 @@
               </a:defRPr>
             </a:lvl6pPr>
             <a:lvl7pPr lvl="6" marR="0" rtl="0" algn="l">
-              <a:spcBef>
-                <a:spcPts val="0"/>
-              </a:spcBef>
-              <a:spcAft>
-                <a:spcPts val="0"/>
-              </a:spcAft>
+              <a:lnSpc>
+                <a:spcPct val="100000"/>
+              </a:lnSpc>
+              <a:spcBef>
+                <a:spcPts val="0"/>
+              </a:spcBef>
+              <a:spcAft>
+                <a:spcPts val="0"/>
+              </a:spcAft>
+              <a:buClr>
+                <a:srgbClr val="000000"/>
+              </a:buClr>
               <a:buSzPts val="1400"/>
+              <a:buFont typeface="Arial"/>
               <a:buNone/>
               <a:defRPr b="0" i="0" sz="1800" u="none" cap="none" strike="noStrike">
                 <a:solidFill>
@@ -1090,13 +1328,20 @@
               </a:defRPr>
             </a:lvl7pPr>
             <a:lvl8pPr lvl="7" marR="0" rtl="0" algn="l">
-              <a:spcBef>
-                <a:spcPts val="0"/>
-              </a:spcBef>
-              <a:spcAft>
-                <a:spcPts val="0"/>
-              </a:spcAft>
+              <a:lnSpc>
+                <a:spcPct val="100000"/>
+              </a:lnSpc>
+              <a:spcBef>
+                <a:spcPts val="0"/>
+              </a:spcBef>
+              <a:spcAft>
+                <a:spcPts val="0"/>
+              </a:spcAft>
+              <a:buClr>
+                <a:srgbClr val="000000"/>
+              </a:buClr>
               <a:buSzPts val="1400"/>
+              <a:buFont typeface="Arial"/>
               <a:buNone/>
               <a:defRPr b="0" i="0" sz="1800" u="none" cap="none" strike="noStrike">
                 <a:solidFill>
@@ -1109,13 +1354,20 @@
               </a:defRPr>
             </a:lvl8pPr>
             <a:lvl9pPr lvl="8" marR="0" rtl="0" algn="l">
-              <a:spcBef>
-                <a:spcPts val="0"/>
-              </a:spcBef>
-              <a:spcAft>
-                <a:spcPts val="0"/>
-              </a:spcAft>
+              <a:lnSpc>
+                <a:spcPct val="100000"/>
+              </a:lnSpc>
+              <a:spcBef>
+                <a:spcPts val="0"/>
+              </a:spcBef>
+              <a:spcAft>
+                <a:spcPts val="0"/>
+              </a:spcAft>
+              <a:buClr>
+                <a:srgbClr val="000000"/>
+              </a:buClr>
               <a:buSzPts val="1400"/>
+              <a:buFont typeface="Arial"/>
               <a:buNone/>
               <a:defRPr b="0" i="0" sz="1800" u="none" cap="none" strike="noStrike">
                 <a:solidFill>
@@ -1159,12 +1411,20 @@
           <a:lstStyle/>
           <a:p>
             <a:pPr indent="0" lvl="0" marL="0" marR="0" rtl="0" algn="r">
-              <a:spcBef>
-                <a:spcPts val="0"/>
-              </a:spcBef>
-              <a:spcAft>
-                <a:spcPts val="0"/>
-              </a:spcAft>
+              <a:lnSpc>
+                <a:spcPct val="100000"/>
+              </a:lnSpc>
+              <a:spcBef>
+                <a:spcPts val="0"/>
+              </a:spcBef>
+              <a:spcAft>
+                <a:spcPts val="0"/>
+              </a:spcAft>
+              <a:buClr>
+                <a:srgbClr val="000000"/>
+              </a:buClr>
+              <a:buSzPts val="1200"/>
+              <a:buFont typeface="Arial"/>
               <a:buNone/>
             </a:pPr>
             <a:fld id="{00000000-1234-1234-1234-123412341234}" type="slidenum">
@@ -1516,12 +1776,16 @@
           <a:lstStyle/>
           <a:p>
             <a:pPr indent="0" lvl="0" marL="0" rtl="0" algn="l">
-              <a:spcBef>
-                <a:spcPts val="0"/>
-              </a:spcBef>
-              <a:spcAft>
-                <a:spcPts val="0"/>
-              </a:spcAft>
+              <a:lnSpc>
+                <a:spcPct val="100000"/>
+              </a:lnSpc>
+              <a:spcBef>
+                <a:spcPts val="0"/>
+              </a:spcBef>
+              <a:spcAft>
+                <a:spcPts val="0"/>
+              </a:spcAft>
+              <a:buSzPts val="1400"/>
               <a:buNone/>
             </a:pPr>
             <a:r>
@@ -1559,12 +1823,16 @@
           <a:lstStyle/>
           <a:p>
             <a:pPr indent="0" lvl="0" marL="0" rtl="0" algn="r">
-              <a:spcBef>
-                <a:spcPts val="0"/>
-              </a:spcBef>
-              <a:spcAft>
-                <a:spcPts val="0"/>
-              </a:spcAft>
+              <a:lnSpc>
+                <a:spcPct val="100000"/>
+              </a:lnSpc>
+              <a:spcBef>
+                <a:spcPts val="0"/>
+              </a:spcBef>
+              <a:spcAft>
+                <a:spcPts val="0"/>
+              </a:spcAft>
+              <a:buSzPts val="1400"/>
               <a:buNone/>
             </a:pPr>
             <a:fld id="{00000000-1234-1234-1234-123412341234}" type="slidenum">
@@ -1673,12 +1941,16 @@
           <a:lstStyle/>
           <a:p>
             <a:pPr indent="0" lvl="0" marL="0" rtl="0" algn="l">
-              <a:spcBef>
-                <a:spcPts val="0"/>
-              </a:spcBef>
-              <a:spcAft>
-                <a:spcPts val="0"/>
-              </a:spcAft>
+              <a:lnSpc>
+                <a:spcPct val="100000"/>
+              </a:lnSpc>
+              <a:spcBef>
+                <a:spcPts val="0"/>
+              </a:spcBef>
+              <a:spcAft>
+                <a:spcPts val="0"/>
+              </a:spcAft>
+              <a:buSzPts val="1400"/>
               <a:buNone/>
             </a:pPr>
             <a:r>
@@ -1716,12 +1988,16 @@
           <a:lstStyle/>
           <a:p>
             <a:pPr indent="0" lvl="0" marL="0" rtl="0" algn="r">
-              <a:spcBef>
-                <a:spcPts val="0"/>
-              </a:spcBef>
-              <a:spcAft>
-                <a:spcPts val="0"/>
-              </a:spcAft>
+              <a:lnSpc>
+                <a:spcPct val="100000"/>
+              </a:lnSpc>
+              <a:spcBef>
+                <a:spcPts val="0"/>
+              </a:spcBef>
+              <a:spcAft>
+                <a:spcPts val="0"/>
+              </a:spcAft>
+              <a:buSzPts val="1400"/>
               <a:buNone/>
             </a:pPr>
             <a:fld id="{00000000-1234-1234-1234-123412341234}" type="slidenum">
@@ -1830,12 +2106,16 @@
           <a:lstStyle/>
           <a:p>
             <a:pPr indent="0" lvl="0" marL="0" rtl="0" algn="l">
-              <a:spcBef>
-                <a:spcPts val="0"/>
-              </a:spcBef>
-              <a:spcAft>
-                <a:spcPts val="0"/>
-              </a:spcAft>
+              <a:lnSpc>
+                <a:spcPct val="100000"/>
+              </a:lnSpc>
+              <a:spcBef>
+                <a:spcPts val="0"/>
+              </a:spcBef>
+              <a:spcAft>
+                <a:spcPts val="0"/>
+              </a:spcAft>
+              <a:buSzPts val="1400"/>
               <a:buNone/>
             </a:pPr>
             <a:r>
@@ -1873,12 +2153,16 @@
           <a:lstStyle/>
           <a:p>
             <a:pPr indent="0" lvl="0" marL="0" rtl="0" algn="r">
-              <a:spcBef>
-                <a:spcPts val="0"/>
-              </a:spcBef>
-              <a:spcAft>
-                <a:spcPts val="0"/>
-              </a:spcAft>
+              <a:lnSpc>
+                <a:spcPct val="100000"/>
+              </a:lnSpc>
+              <a:spcBef>
+                <a:spcPts val="0"/>
+              </a:spcBef>
+              <a:spcAft>
+                <a:spcPts val="0"/>
+              </a:spcAft>
+              <a:buSzPts val="1400"/>
               <a:buNone/>
             </a:pPr>
             <a:fld id="{00000000-1234-1234-1234-123412341234}" type="slidenum">
@@ -1987,12 +2271,16 @@
           <a:lstStyle/>
           <a:p>
             <a:pPr indent="0" lvl="0" marL="0" rtl="0" algn="l">
-              <a:spcBef>
-                <a:spcPts val="0"/>
-              </a:spcBef>
-              <a:spcAft>
-                <a:spcPts val="0"/>
-              </a:spcAft>
+              <a:lnSpc>
+                <a:spcPct val="100000"/>
+              </a:lnSpc>
+              <a:spcBef>
+                <a:spcPts val="0"/>
+              </a:spcBef>
+              <a:spcAft>
+                <a:spcPts val="0"/>
+              </a:spcAft>
+              <a:buSzPts val="1400"/>
               <a:buNone/>
             </a:pPr>
             <a:r>
@@ -2030,12 +2318,16 @@
           <a:lstStyle/>
           <a:p>
             <a:pPr indent="0" lvl="0" marL="0" rtl="0" algn="r">
-              <a:spcBef>
-                <a:spcPts val="0"/>
-              </a:spcBef>
-              <a:spcAft>
-                <a:spcPts val="0"/>
-              </a:spcAft>
+              <a:lnSpc>
+                <a:spcPct val="100000"/>
+              </a:lnSpc>
+              <a:spcBef>
+                <a:spcPts val="0"/>
+              </a:spcBef>
+              <a:spcAft>
+                <a:spcPts val="0"/>
+              </a:spcAft>
+              <a:buSzPts val="1400"/>
               <a:buNone/>
             </a:pPr>
             <a:fld id="{00000000-1234-1234-1234-123412341234}" type="slidenum">
@@ -2144,12 +2436,16 @@
           <a:lstStyle/>
           <a:p>
             <a:pPr indent="0" lvl="0" marL="0" rtl="0" algn="l">
-              <a:spcBef>
-                <a:spcPts val="0"/>
-              </a:spcBef>
-              <a:spcAft>
-                <a:spcPts val="0"/>
-              </a:spcAft>
+              <a:lnSpc>
+                <a:spcPct val="100000"/>
+              </a:lnSpc>
+              <a:spcBef>
+                <a:spcPts val="0"/>
+              </a:spcBef>
+              <a:spcAft>
+                <a:spcPts val="0"/>
+              </a:spcAft>
+              <a:buSzPts val="1400"/>
               <a:buNone/>
             </a:pPr>
             <a:r>
@@ -2187,12 +2483,16 @@
           <a:lstStyle/>
           <a:p>
             <a:pPr indent="0" lvl="0" marL="0" rtl="0" algn="r">
-              <a:spcBef>
-                <a:spcPts val="0"/>
-              </a:spcBef>
-              <a:spcAft>
-                <a:spcPts val="0"/>
-              </a:spcAft>
+              <a:lnSpc>
+                <a:spcPct val="100000"/>
+              </a:lnSpc>
+              <a:spcBef>
+                <a:spcPts val="0"/>
+              </a:spcBef>
+              <a:spcAft>
+                <a:spcPts val="0"/>
+              </a:spcAft>
+              <a:buSzPts val="1400"/>
               <a:buNone/>
             </a:pPr>
             <a:fld id="{00000000-1234-1234-1234-123412341234}" type="slidenum">
@@ -2301,12 +2601,16 @@
           <a:lstStyle/>
           <a:p>
             <a:pPr indent="0" lvl="0" marL="0" rtl="0" algn="l">
-              <a:spcBef>
-                <a:spcPts val="0"/>
-              </a:spcBef>
-              <a:spcAft>
-                <a:spcPts val="0"/>
-              </a:spcAft>
+              <a:lnSpc>
+                <a:spcPct val="100000"/>
+              </a:lnSpc>
+              <a:spcBef>
+                <a:spcPts val="0"/>
+              </a:spcBef>
+              <a:spcAft>
+                <a:spcPts val="0"/>
+              </a:spcAft>
+              <a:buSzPts val="1400"/>
               <a:buNone/>
             </a:pPr>
             <a:r>
@@ -2344,12 +2648,16 @@
           <a:lstStyle/>
           <a:p>
             <a:pPr indent="0" lvl="0" marL="0" rtl="0" algn="r">
-              <a:spcBef>
-                <a:spcPts val="0"/>
-              </a:spcBef>
-              <a:spcAft>
-                <a:spcPts val="0"/>
-              </a:spcAft>
+              <a:lnSpc>
+                <a:spcPct val="100000"/>
+              </a:lnSpc>
+              <a:spcBef>
+                <a:spcPts val="0"/>
+              </a:spcBef>
+              <a:spcAft>
+                <a:spcPts val="0"/>
+              </a:spcAft>
+              <a:buSzPts val="1400"/>
               <a:buNone/>
             </a:pPr>
             <a:fld id="{00000000-1234-1234-1234-123412341234}" type="slidenum">
@@ -2458,12 +2766,16 @@
           <a:lstStyle/>
           <a:p>
             <a:pPr indent="0" lvl="0" marL="0" rtl="0" algn="l">
-              <a:spcBef>
-                <a:spcPts val="0"/>
-              </a:spcBef>
-              <a:spcAft>
-                <a:spcPts val="0"/>
-              </a:spcAft>
+              <a:lnSpc>
+                <a:spcPct val="100000"/>
+              </a:lnSpc>
+              <a:spcBef>
+                <a:spcPts val="0"/>
+              </a:spcBef>
+              <a:spcAft>
+                <a:spcPts val="0"/>
+              </a:spcAft>
+              <a:buSzPts val="1400"/>
               <a:buNone/>
             </a:pPr>
             <a:r>
@@ -2501,12 +2813,16 @@
           <a:lstStyle/>
           <a:p>
             <a:pPr indent="0" lvl="0" marL="0" rtl="0" algn="r">
-              <a:spcBef>
-                <a:spcPts val="0"/>
-              </a:spcBef>
-              <a:spcAft>
-                <a:spcPts val="0"/>
-              </a:spcAft>
+              <a:lnSpc>
+                <a:spcPct val="100000"/>
+              </a:lnSpc>
+              <a:spcBef>
+                <a:spcPts val="0"/>
+              </a:spcBef>
+              <a:spcAft>
+                <a:spcPts val="0"/>
+              </a:spcAft>
+              <a:buSzPts val="1400"/>
               <a:buNone/>
             </a:pPr>
             <a:fld id="{00000000-1234-1234-1234-123412341234}" type="slidenum">
@@ -2615,12 +2931,16 @@
           <a:lstStyle/>
           <a:p>
             <a:pPr indent="0" lvl="0" marL="0" rtl="0" algn="l">
-              <a:spcBef>
-                <a:spcPts val="0"/>
-              </a:spcBef>
-              <a:spcAft>
-                <a:spcPts val="0"/>
-              </a:spcAft>
+              <a:lnSpc>
+                <a:spcPct val="100000"/>
+              </a:lnSpc>
+              <a:spcBef>
+                <a:spcPts val="0"/>
+              </a:spcBef>
+              <a:spcAft>
+                <a:spcPts val="0"/>
+              </a:spcAft>
+              <a:buSzPts val="1400"/>
               <a:buNone/>
             </a:pPr>
             <a:r>
@@ -2658,12 +2978,16 @@
           <a:lstStyle/>
           <a:p>
             <a:pPr indent="0" lvl="0" marL="0" rtl="0" algn="r">
-              <a:spcBef>
-                <a:spcPts val="0"/>
-              </a:spcBef>
-              <a:spcAft>
-                <a:spcPts val="0"/>
-              </a:spcAft>
+              <a:lnSpc>
+                <a:spcPct val="100000"/>
+              </a:lnSpc>
+              <a:spcBef>
+                <a:spcPts val="0"/>
+              </a:spcBef>
+              <a:spcAft>
+                <a:spcPts val="0"/>
+              </a:spcAft>
+              <a:buSzPts val="1400"/>
               <a:buNone/>
             </a:pPr>
             <a:fld id="{00000000-1234-1234-1234-123412341234}" type="slidenum">
@@ -2772,12 +3096,16 @@
           <a:lstStyle/>
           <a:p>
             <a:pPr indent="0" lvl="0" marL="0" rtl="0" algn="l">
-              <a:spcBef>
-                <a:spcPts val="0"/>
-              </a:spcBef>
-              <a:spcAft>
-                <a:spcPts val="0"/>
-              </a:spcAft>
+              <a:lnSpc>
+                <a:spcPct val="100000"/>
+              </a:lnSpc>
+              <a:spcBef>
+                <a:spcPts val="0"/>
+              </a:spcBef>
+              <a:spcAft>
+                <a:spcPts val="0"/>
+              </a:spcAft>
+              <a:buSzPts val="1400"/>
               <a:buNone/>
             </a:pPr>
             <a:r>
@@ -2815,12 +3143,16 @@
           <a:lstStyle/>
           <a:p>
             <a:pPr indent="0" lvl="0" marL="0" rtl="0" algn="r">
-              <a:spcBef>
-                <a:spcPts val="0"/>
-              </a:spcBef>
-              <a:spcAft>
-                <a:spcPts val="0"/>
-              </a:spcAft>
+              <a:lnSpc>
+                <a:spcPct val="100000"/>
+              </a:lnSpc>
+              <a:spcBef>
+                <a:spcPts val="0"/>
+              </a:spcBef>
+              <a:spcAft>
+                <a:spcPts val="0"/>
+              </a:spcAft>
+              <a:buSzPts val="1400"/>
               <a:buNone/>
             </a:pPr>
             <a:fld id="{00000000-1234-1234-1234-123412341234}" type="slidenum">
@@ -2929,12 +3261,16 @@
           <a:lstStyle/>
           <a:p>
             <a:pPr indent="0" lvl="0" marL="0" rtl="0" algn="l">
-              <a:spcBef>
-                <a:spcPts val="0"/>
-              </a:spcBef>
-              <a:spcAft>
-                <a:spcPts val="0"/>
-              </a:spcAft>
+              <a:lnSpc>
+                <a:spcPct val="100000"/>
+              </a:lnSpc>
+              <a:spcBef>
+                <a:spcPts val="0"/>
+              </a:spcBef>
+              <a:spcAft>
+                <a:spcPts val="0"/>
+              </a:spcAft>
+              <a:buSzPts val="1400"/>
               <a:buNone/>
             </a:pPr>
             <a:r>
@@ -2972,12 +3308,16 @@
           <a:lstStyle/>
           <a:p>
             <a:pPr indent="0" lvl="0" marL="0" rtl="0" algn="r">
-              <a:spcBef>
-                <a:spcPts val="0"/>
-              </a:spcBef>
-              <a:spcAft>
-                <a:spcPts val="0"/>
-              </a:spcAft>
+              <a:lnSpc>
+                <a:spcPct val="100000"/>
+              </a:lnSpc>
+              <a:spcBef>
+                <a:spcPts val="0"/>
+              </a:spcBef>
+              <a:spcAft>
+                <a:spcPts val="0"/>
+              </a:spcAft>
+              <a:buSzPts val="1400"/>
               <a:buNone/>
             </a:pPr>
             <a:fld id="{00000000-1234-1234-1234-123412341234}" type="slidenum">
@@ -3801,19 +4141,35 @@
           </a:bodyPr>
           <a:lstStyle/>
           <a:p>
-            <a:pPr indent="0" lvl="0" marL="0" rtl="0" algn="l">
-              <a:spcBef>
-                <a:spcPts val="0"/>
-              </a:spcBef>
-              <a:spcAft>
-                <a:spcPts val="0"/>
-              </a:spcAft>
+            <a:pPr indent="0" lvl="0" marL="0" marR="0" rtl="0" algn="l">
+              <a:lnSpc>
+                <a:spcPct val="100000"/>
+              </a:lnSpc>
+              <a:spcBef>
+                <a:spcPts val="0"/>
+              </a:spcBef>
+              <a:spcAft>
+                <a:spcPts val="0"/>
+              </a:spcAft>
+              <a:buClr>
+                <a:srgbClr val="000000"/>
+              </a:buClr>
+              <a:buSzPts val="1400"/>
+              <a:buFont typeface="Arial"/>
               <a:buNone/>
             </a:pPr>
             <a:r>
               <a:t/>
             </a:r>
-            <a:endParaRPr/>
+            <a:endParaRPr b="0" i="0" sz="1400" u="none" cap="none" strike="noStrike">
+              <a:solidFill>
+                <a:srgbClr val="000000"/>
+              </a:solidFill>
+              <a:latin typeface="Arial"/>
+              <a:ea typeface="Arial"/>
+              <a:cs typeface="Arial"/>
+              <a:sym typeface="Arial"/>
+            </a:endParaRPr>
           </a:p>
         </p:txBody>
       </p:sp>
@@ -3843,6 +4199,9 @@
           <a:lstStyle/>
           <a:p>
             <a:pPr indent="0" lvl="0" marL="0" marR="0" rtl="0" algn="l">
+              <a:lnSpc>
+                <a:spcPct val="100000"/>
+              </a:lnSpc>
               <a:spcBef>
                 <a:spcPts val="0"/>
               </a:spcBef>
@@ -3906,6 +4265,9 @@
           <a:lstStyle/>
           <a:p>
             <a:pPr indent="0" lvl="0" marL="0" marR="0" rtl="0" algn="l">
+              <a:lnSpc>
+                <a:spcPct val="100000"/>
+              </a:lnSpc>
               <a:spcBef>
                 <a:spcPts val="0"/>
               </a:spcBef>
@@ -3969,6 +4331,9 @@
           <a:lstStyle/>
           <a:p>
             <a:pPr indent="0" lvl="0" marL="0" marR="0" rtl="0" algn="l">
+              <a:lnSpc>
+                <a:spcPct val="100000"/>
+              </a:lnSpc>
               <a:spcBef>
                 <a:spcPts val="0"/>
               </a:spcBef>
@@ -4039,19 +4404,35 @@
           </a:bodyPr>
           <a:lstStyle/>
           <a:p>
-            <a:pPr indent="0" lvl="0" marL="0" rtl="0" algn="l">
-              <a:spcBef>
-                <a:spcPts val="0"/>
-              </a:spcBef>
-              <a:spcAft>
-                <a:spcPts val="0"/>
-              </a:spcAft>
+            <a:pPr indent="0" lvl="0" marL="0" marR="0" rtl="0" algn="l">
+              <a:lnSpc>
+                <a:spcPct val="100000"/>
+              </a:lnSpc>
+              <a:spcBef>
+                <a:spcPts val="0"/>
+              </a:spcBef>
+              <a:spcAft>
+                <a:spcPts val="0"/>
+              </a:spcAft>
+              <a:buClr>
+                <a:srgbClr val="000000"/>
+              </a:buClr>
+              <a:buSzPts val="1400"/>
+              <a:buFont typeface="Arial"/>
               <a:buNone/>
             </a:pPr>
             <a:r>
               <a:t/>
             </a:r>
-            <a:endParaRPr/>
+            <a:endParaRPr b="0" i="0" sz="1400" u="none" cap="none" strike="noStrike">
+              <a:solidFill>
+                <a:srgbClr val="000000"/>
+              </a:solidFill>
+              <a:latin typeface="Arial"/>
+              <a:ea typeface="Arial"/>
+              <a:cs typeface="Arial"/>
+              <a:sym typeface="Arial"/>
+            </a:endParaRPr>
           </a:p>
         </p:txBody>
       </p:sp>
@@ -4081,6 +4462,9 @@
           <a:lstStyle/>
           <a:p>
             <a:pPr indent="0" lvl="0" marL="0" marR="0" rtl="0" algn="l">
+              <a:lnSpc>
+                <a:spcPct val="100000"/>
+              </a:lnSpc>
               <a:spcBef>
                 <a:spcPts val="0"/>
               </a:spcBef>
@@ -4127,7 +4511,7 @@
         <p:spPr>
           <a:xfrm>
             <a:off x="320050" y="3044875"/>
-            <a:ext cx="8503800" cy="502800"/>
+            <a:ext cx="8503800" cy="615900"/>
           </a:xfrm>
           <a:prstGeom prst="rect">
             <a:avLst/>
@@ -4144,6 +4528,9 @@
           <a:lstStyle/>
           <a:p>
             <a:pPr indent="0" lvl="0" marL="0" marR="0" rtl="0" algn="l">
+              <a:lnSpc>
+                <a:spcPct val="100000"/>
+              </a:lnSpc>
               <a:spcBef>
                 <a:spcPts val="0"/>
               </a:spcBef>
@@ -4201,7 +4588,7 @@
                 <a:cs typeface="Calibri"/>
                 <a:sym typeface="Calibri"/>
               </a:rPr>
-              <a:t>Cássio, Danyela, Gustavo e Wilker</a:t>
+              <a:t>Cássio(rm371155), Danyela(rm373926), Gustavo(rm371137) e Wilker (rm373500)</a:t>
             </a:r>
             <a:endParaRPr b="0" i="0" sz="1200" u="none" cap="none" strike="noStrike">
               <a:solidFill>
@@ -4248,19 +4635,35 @@
           </a:bodyPr>
           <a:lstStyle/>
           <a:p>
-            <a:pPr indent="0" lvl="0" marL="0" rtl="0" algn="l">
-              <a:spcBef>
-                <a:spcPts val="0"/>
-              </a:spcBef>
-              <a:spcAft>
-                <a:spcPts val="0"/>
-              </a:spcAft>
+            <a:pPr indent="0" lvl="0" marL="0" marR="0" rtl="0" algn="l">
+              <a:lnSpc>
+                <a:spcPct val="100000"/>
+              </a:lnSpc>
+              <a:spcBef>
+                <a:spcPts val="0"/>
+              </a:spcBef>
+              <a:spcAft>
+                <a:spcPts val="0"/>
+              </a:spcAft>
+              <a:buClr>
+                <a:srgbClr val="000000"/>
+              </a:buClr>
+              <a:buSzPts val="1400"/>
+              <a:buFont typeface="Arial"/>
               <a:buNone/>
             </a:pPr>
             <a:r>
               <a:t/>
             </a:r>
-            <a:endParaRPr/>
+            <a:endParaRPr b="0" i="0" sz="1400" u="none" cap="none" strike="noStrike">
+              <a:solidFill>
+                <a:srgbClr val="000000"/>
+              </a:solidFill>
+              <a:latin typeface="Arial"/>
+              <a:ea typeface="Arial"/>
+              <a:cs typeface="Arial"/>
+              <a:sym typeface="Arial"/>
+            </a:endParaRPr>
           </a:p>
         </p:txBody>
       </p:sp>
@@ -4290,6 +4693,9 @@
           <a:lstStyle/>
           <a:p>
             <a:pPr indent="0" lvl="0" marL="0" marR="0" rtl="0" algn="ctr">
+              <a:lnSpc>
+                <a:spcPct val="100000"/>
+              </a:lnSpc>
               <a:spcBef>
                 <a:spcPts val="0"/>
               </a:spcBef>
@@ -4353,6 +4759,9 @@
           <a:lstStyle/>
           <a:p>
             <a:pPr indent="0" lvl="0" marL="0" marR="0" rtl="0" algn="ctr">
+              <a:lnSpc>
+                <a:spcPct val="100000"/>
+              </a:lnSpc>
               <a:spcBef>
                 <a:spcPts val="0"/>
               </a:spcBef>
@@ -4390,6 +4799,9 @@
           </a:p>
           <a:p>
             <a:pPr indent="0" lvl="0" marL="0" marR="0" rtl="0" algn="ctr">
+              <a:lnSpc>
+                <a:spcPct val="100000"/>
+              </a:lnSpc>
               <a:spcBef>
                 <a:spcPts val="0"/>
               </a:spcBef>
@@ -4460,19 +4872,35 @@
           </a:bodyPr>
           <a:lstStyle/>
           <a:p>
-            <a:pPr indent="0" lvl="0" marL="0" rtl="0" algn="l">
-              <a:spcBef>
-                <a:spcPts val="0"/>
-              </a:spcBef>
-              <a:spcAft>
-                <a:spcPts val="0"/>
-              </a:spcAft>
+            <a:pPr indent="0" lvl="0" marL="0" marR="0" rtl="0" algn="l">
+              <a:lnSpc>
+                <a:spcPct val="100000"/>
+              </a:lnSpc>
+              <a:spcBef>
+                <a:spcPts val="0"/>
+              </a:spcBef>
+              <a:spcAft>
+                <a:spcPts val="0"/>
+              </a:spcAft>
+              <a:buClr>
+                <a:srgbClr val="000000"/>
+              </a:buClr>
+              <a:buSzPts val="1400"/>
+              <a:buFont typeface="Arial"/>
               <a:buNone/>
             </a:pPr>
             <a:r>
               <a:t/>
             </a:r>
-            <a:endParaRPr/>
+            <a:endParaRPr b="0" i="0" sz="1400" u="none" cap="none" strike="noStrike">
+              <a:solidFill>
+                <a:srgbClr val="000000"/>
+              </a:solidFill>
+              <a:latin typeface="Arial"/>
+              <a:ea typeface="Arial"/>
+              <a:cs typeface="Arial"/>
+              <a:sym typeface="Arial"/>
+            </a:endParaRPr>
           </a:p>
         </p:txBody>
       </p:sp>
@@ -4502,6 +4930,9 @@
           <a:lstStyle/>
           <a:p>
             <a:pPr indent="0" lvl="0" marL="0" marR="0" rtl="0" algn="ctr">
+              <a:lnSpc>
+                <a:spcPct val="100000"/>
+              </a:lnSpc>
               <a:spcBef>
                 <a:spcPts val="0"/>
               </a:spcBef>
@@ -4565,6 +4996,9 @@
           <a:lstStyle/>
           <a:p>
             <a:pPr indent="0" lvl="0" marL="0" marR="0" rtl="0" algn="ctr">
+              <a:lnSpc>
+                <a:spcPct val="100000"/>
+              </a:lnSpc>
               <a:spcBef>
                 <a:spcPts val="0"/>
               </a:spcBef>
@@ -4602,6 +5036,9 @@
           </a:p>
           <a:p>
             <a:pPr indent="0" lvl="0" marL="0" marR="0" rtl="0" algn="ctr">
+              <a:lnSpc>
+                <a:spcPct val="100000"/>
+              </a:lnSpc>
               <a:spcBef>
                 <a:spcPts val="0"/>
               </a:spcBef>
@@ -4672,19 +5109,35 @@
           </a:bodyPr>
           <a:lstStyle/>
           <a:p>
-            <a:pPr indent="0" lvl="0" marL="0" rtl="0" algn="l">
-              <a:spcBef>
-                <a:spcPts val="0"/>
-              </a:spcBef>
-              <a:spcAft>
-                <a:spcPts val="0"/>
-              </a:spcAft>
+            <a:pPr indent="0" lvl="0" marL="0" marR="0" rtl="0" algn="l">
+              <a:lnSpc>
+                <a:spcPct val="100000"/>
+              </a:lnSpc>
+              <a:spcBef>
+                <a:spcPts val="0"/>
+              </a:spcBef>
+              <a:spcAft>
+                <a:spcPts val="0"/>
+              </a:spcAft>
+              <a:buClr>
+                <a:srgbClr val="000000"/>
+              </a:buClr>
+              <a:buSzPts val="1400"/>
+              <a:buFont typeface="Arial"/>
               <a:buNone/>
             </a:pPr>
             <a:r>
               <a:t/>
             </a:r>
-            <a:endParaRPr/>
+            <a:endParaRPr b="0" i="0" sz="1400" u="none" cap="none" strike="noStrike">
+              <a:solidFill>
+                <a:srgbClr val="000000"/>
+              </a:solidFill>
+              <a:latin typeface="Arial"/>
+              <a:ea typeface="Arial"/>
+              <a:cs typeface="Arial"/>
+              <a:sym typeface="Arial"/>
+            </a:endParaRPr>
           </a:p>
         </p:txBody>
       </p:sp>
@@ -4714,6 +5167,9 @@
           <a:lstStyle/>
           <a:p>
             <a:pPr indent="0" lvl="0" marL="0" marR="0" rtl="0" algn="ctr">
+              <a:lnSpc>
+                <a:spcPct val="100000"/>
+              </a:lnSpc>
               <a:spcBef>
                 <a:spcPts val="0"/>
               </a:spcBef>
@@ -4777,6 +5233,9 @@
           <a:lstStyle/>
           <a:p>
             <a:pPr indent="0" lvl="0" marL="0" marR="0" rtl="0" algn="ctr">
+              <a:lnSpc>
+                <a:spcPct val="100000"/>
+              </a:lnSpc>
               <a:spcBef>
                 <a:spcPts val="0"/>
               </a:spcBef>
@@ -4814,6 +5273,9 @@
           </a:p>
           <a:p>
             <a:pPr indent="0" lvl="0" marL="0" marR="0" rtl="0" algn="ctr">
+              <a:lnSpc>
+                <a:spcPct val="100000"/>
+              </a:lnSpc>
               <a:spcBef>
                 <a:spcPts val="0"/>
               </a:spcBef>
@@ -4916,19 +5378,35 @@
           </a:bodyPr>
           <a:lstStyle/>
           <a:p>
-            <a:pPr indent="0" lvl="0" marL="0" rtl="0" algn="l">
-              <a:spcBef>
-                <a:spcPts val="0"/>
-              </a:spcBef>
-              <a:spcAft>
-                <a:spcPts val="0"/>
-              </a:spcAft>
+            <a:pPr indent="0" lvl="0" marL="0" marR="0" rtl="0" algn="l">
+              <a:lnSpc>
+                <a:spcPct val="100000"/>
+              </a:lnSpc>
+              <a:spcBef>
+                <a:spcPts val="0"/>
+              </a:spcBef>
+              <a:spcAft>
+                <a:spcPts val="0"/>
+              </a:spcAft>
+              <a:buClr>
+                <a:srgbClr val="000000"/>
+              </a:buClr>
+              <a:buSzPts val="1400"/>
+              <a:buFont typeface="Arial"/>
               <a:buNone/>
             </a:pPr>
             <a:r>
               <a:t/>
             </a:r>
-            <a:endParaRPr/>
+            <a:endParaRPr b="0" i="0" sz="1400" u="none" cap="none" strike="noStrike">
+              <a:solidFill>
+                <a:srgbClr val="000000"/>
+              </a:solidFill>
+              <a:latin typeface="Arial"/>
+              <a:ea typeface="Arial"/>
+              <a:cs typeface="Arial"/>
+              <a:sym typeface="Arial"/>
+            </a:endParaRPr>
           </a:p>
         </p:txBody>
       </p:sp>
@@ -4958,6 +5436,9 @@
           <a:lstStyle/>
           <a:p>
             <a:pPr indent="0" lvl="0" marL="0" marR="0" rtl="0" algn="l">
+              <a:lnSpc>
+                <a:spcPct val="100000"/>
+              </a:lnSpc>
               <a:spcBef>
                 <a:spcPts val="0"/>
               </a:spcBef>
@@ -5021,6 +5502,9 @@
           <a:lstStyle/>
           <a:p>
             <a:pPr indent="0" lvl="0" marL="0" marR="0" rtl="0" algn="l">
+              <a:lnSpc>
+                <a:spcPct val="100000"/>
+              </a:lnSpc>
               <a:spcBef>
                 <a:spcPts val="0"/>
               </a:spcBef>
@@ -5035,7 +5519,7 @@
               <a:buNone/>
             </a:pPr>
             <a:r>
-              <a:rPr b="1" lang="en-US" sz="2600">
+              <a:rPr b="1" i="0" lang="en-US" sz="2600" u="none" cap="none" strike="noStrike">
                 <a:solidFill>
                   <a:srgbClr val="FFFFFF"/>
                 </a:solidFill>
@@ -5044,55 +5528,7 @@
                 <a:cs typeface="Calibri"/>
                 <a:sym typeface="Calibri"/>
               </a:rPr>
-              <a:t>O atraso </a:t>
-            </a:r>
-            <a:r>
-              <a:rPr b="1" lang="en-US" sz="2600">
-                <a:solidFill>
-                  <a:srgbClr val="FFFFFF"/>
-                </a:solidFill>
-                <a:latin typeface="Calibri"/>
-                <a:ea typeface="Calibri"/>
-                <a:cs typeface="Calibri"/>
-                <a:sym typeface="Calibri"/>
-              </a:rPr>
-              <a:t>Logístico</a:t>
-            </a:r>
-            <a:r>
-              <a:rPr b="1" lang="en-US" sz="2600">
-                <a:solidFill>
-                  <a:srgbClr val="FFFFFF"/>
-                </a:solidFill>
-                <a:latin typeface="Calibri"/>
-                <a:ea typeface="Calibri"/>
-                <a:cs typeface="Calibri"/>
-                <a:sym typeface="Calibri"/>
-              </a:rPr>
-              <a:t> é o principal gatilho da </a:t>
-            </a:r>
-            <a:r>
-              <a:rPr b="1" lang="en-US" sz="2600">
-                <a:solidFill>
-                  <a:srgbClr val="FFFFFF"/>
-                </a:solidFill>
-                <a:latin typeface="Calibri"/>
-                <a:ea typeface="Calibri"/>
-                <a:cs typeface="Calibri"/>
-                <a:sym typeface="Calibri"/>
-              </a:rPr>
-              <a:t>insatisfação</a:t>
-            </a:r>
-            <a:r>
-              <a:rPr b="1" lang="en-US" sz="2600">
-                <a:solidFill>
-                  <a:srgbClr val="FFFFFF"/>
-                </a:solidFill>
-                <a:latin typeface="Calibri"/>
-                <a:ea typeface="Calibri"/>
-                <a:cs typeface="Calibri"/>
-                <a:sym typeface="Calibri"/>
-              </a:rPr>
-              <a:t> dos clientes! </a:t>
+              <a:t>O atraso Logístico é o principal gatilho da insatisfação dos clientes! </a:t>
             </a:r>
             <a:endParaRPr b="0" i="0" sz="2600" u="none" cap="none" strike="noStrike">
               <a:solidFill>
@@ -5139,19 +5575,35 @@
           </a:bodyPr>
           <a:lstStyle/>
           <a:p>
-            <a:pPr indent="0" lvl="0" marL="0" rtl="0" algn="l">
-              <a:spcBef>
-                <a:spcPts val="0"/>
-              </a:spcBef>
-              <a:spcAft>
-                <a:spcPts val="0"/>
-              </a:spcAft>
+            <a:pPr indent="0" lvl="0" marL="0" marR="0" rtl="0" algn="l">
+              <a:lnSpc>
+                <a:spcPct val="100000"/>
+              </a:lnSpc>
+              <a:spcBef>
+                <a:spcPts val="0"/>
+              </a:spcBef>
+              <a:spcAft>
+                <a:spcPts val="0"/>
+              </a:spcAft>
+              <a:buClr>
+                <a:srgbClr val="000000"/>
+              </a:buClr>
+              <a:buSzPts val="1400"/>
+              <a:buFont typeface="Arial"/>
               <a:buNone/>
             </a:pPr>
             <a:r>
               <a:t/>
             </a:r>
-            <a:endParaRPr/>
+            <a:endParaRPr b="0" i="0" sz="1400" u="none" cap="none" strike="noStrike">
+              <a:solidFill>
+                <a:srgbClr val="000000"/>
+              </a:solidFill>
+              <a:latin typeface="Arial"/>
+              <a:ea typeface="Arial"/>
+              <a:cs typeface="Arial"/>
+              <a:sym typeface="Arial"/>
+            </a:endParaRPr>
           </a:p>
         </p:txBody>
       </p:sp>
@@ -5188,19 +5640,35 @@
           </a:bodyPr>
           <a:lstStyle/>
           <a:p>
-            <a:pPr indent="0" lvl="0" marL="0" rtl="0" algn="l">
-              <a:spcBef>
-                <a:spcPts val="0"/>
-              </a:spcBef>
-              <a:spcAft>
-                <a:spcPts val="0"/>
-              </a:spcAft>
+            <a:pPr indent="0" lvl="0" marL="0" marR="0" rtl="0" algn="l">
+              <a:lnSpc>
+                <a:spcPct val="100000"/>
+              </a:lnSpc>
+              <a:spcBef>
+                <a:spcPts val="0"/>
+              </a:spcBef>
+              <a:spcAft>
+                <a:spcPts val="0"/>
+              </a:spcAft>
+              <a:buClr>
+                <a:srgbClr val="000000"/>
+              </a:buClr>
+              <a:buSzPts val="1400"/>
+              <a:buFont typeface="Arial"/>
               <a:buNone/>
             </a:pPr>
             <a:r>
               <a:t/>
             </a:r>
-            <a:endParaRPr/>
+            <a:endParaRPr b="0" i="0" sz="1400" u="none" cap="none" strike="noStrike">
+              <a:solidFill>
+                <a:srgbClr val="000000"/>
+              </a:solidFill>
+              <a:latin typeface="Arial"/>
+              <a:ea typeface="Arial"/>
+              <a:cs typeface="Arial"/>
+              <a:sym typeface="Arial"/>
+            </a:endParaRPr>
           </a:p>
         </p:txBody>
       </p:sp>
@@ -5230,6 +5698,9 @@
           <a:lstStyle/>
           <a:p>
             <a:pPr indent="0" lvl="0" marL="0" marR="0" rtl="0" algn="ctr">
+              <a:lnSpc>
+                <a:spcPct val="100000"/>
+              </a:lnSpc>
               <a:spcBef>
                 <a:spcPts val="0"/>
               </a:spcBef>
@@ -5293,6 +5764,9 @@
           <a:lstStyle/>
           <a:p>
             <a:pPr indent="0" lvl="0" marL="0" marR="0" rtl="0" algn="ctr">
+              <a:lnSpc>
+                <a:spcPct val="100000"/>
+              </a:lnSpc>
               <a:spcBef>
                 <a:spcPts val="0"/>
               </a:spcBef>
@@ -5356,6 +5830,9 @@
           <a:lstStyle/>
           <a:p>
             <a:pPr indent="0" lvl="0" marL="0" marR="0" rtl="0" algn="ctr">
+              <a:lnSpc>
+                <a:spcPct val="100000"/>
+              </a:lnSpc>
               <a:spcBef>
                 <a:spcPts val="0"/>
               </a:spcBef>
@@ -5426,19 +5903,35 @@
           </a:bodyPr>
           <a:lstStyle/>
           <a:p>
-            <a:pPr indent="0" lvl="0" marL="0" rtl="0" algn="l">
-              <a:spcBef>
-                <a:spcPts val="0"/>
-              </a:spcBef>
-              <a:spcAft>
-                <a:spcPts val="0"/>
-              </a:spcAft>
+            <a:pPr indent="0" lvl="0" marL="0" marR="0" rtl="0" algn="l">
+              <a:lnSpc>
+                <a:spcPct val="100000"/>
+              </a:lnSpc>
+              <a:spcBef>
+                <a:spcPts val="0"/>
+              </a:spcBef>
+              <a:spcAft>
+                <a:spcPts val="0"/>
+              </a:spcAft>
+              <a:buClr>
+                <a:srgbClr val="000000"/>
+              </a:buClr>
+              <a:buSzPts val="1400"/>
+              <a:buFont typeface="Arial"/>
               <a:buNone/>
             </a:pPr>
             <a:r>
               <a:t/>
             </a:r>
-            <a:endParaRPr/>
+            <a:endParaRPr b="0" i="0" sz="1400" u="none" cap="none" strike="noStrike">
+              <a:solidFill>
+                <a:srgbClr val="000000"/>
+              </a:solidFill>
+              <a:latin typeface="Arial"/>
+              <a:ea typeface="Arial"/>
+              <a:cs typeface="Arial"/>
+              <a:sym typeface="Arial"/>
+            </a:endParaRPr>
           </a:p>
         </p:txBody>
       </p:sp>
@@ -5468,6 +5961,9 @@
           <a:lstStyle/>
           <a:p>
             <a:pPr indent="0" lvl="0" marL="0" marR="0" rtl="0" algn="ctr">
+              <a:lnSpc>
+                <a:spcPct val="100000"/>
+              </a:lnSpc>
               <a:spcBef>
                 <a:spcPts val="0"/>
               </a:spcBef>
@@ -5531,6 +6027,9 @@
           <a:lstStyle/>
           <a:p>
             <a:pPr indent="0" lvl="0" marL="0" marR="0" rtl="0" algn="ctr">
+              <a:lnSpc>
+                <a:spcPct val="100000"/>
+              </a:lnSpc>
               <a:spcBef>
                 <a:spcPts val="0"/>
               </a:spcBef>
@@ -5594,6 +6093,9 @@
           <a:lstStyle/>
           <a:p>
             <a:pPr indent="0" lvl="0" marL="0" marR="0" rtl="0" algn="ctr">
+              <a:lnSpc>
+                <a:spcPct val="100000"/>
+              </a:lnSpc>
               <a:spcBef>
                 <a:spcPts val="0"/>
               </a:spcBef>
@@ -5664,19 +6166,35 @@
           </a:bodyPr>
           <a:lstStyle/>
           <a:p>
-            <a:pPr indent="0" lvl="0" marL="0" rtl="0" algn="l">
-              <a:spcBef>
-                <a:spcPts val="0"/>
-              </a:spcBef>
-              <a:spcAft>
-                <a:spcPts val="0"/>
-              </a:spcAft>
+            <a:pPr indent="0" lvl="0" marL="0" marR="0" rtl="0" algn="l">
+              <a:lnSpc>
+                <a:spcPct val="100000"/>
+              </a:lnSpc>
+              <a:spcBef>
+                <a:spcPts val="0"/>
+              </a:spcBef>
+              <a:spcAft>
+                <a:spcPts val="0"/>
+              </a:spcAft>
+              <a:buClr>
+                <a:srgbClr val="000000"/>
+              </a:buClr>
+              <a:buSzPts val="1400"/>
+              <a:buFont typeface="Arial"/>
               <a:buNone/>
             </a:pPr>
             <a:r>
               <a:t/>
             </a:r>
-            <a:endParaRPr/>
+            <a:endParaRPr b="0" i="0" sz="1400" u="none" cap="none" strike="noStrike">
+              <a:solidFill>
+                <a:srgbClr val="000000"/>
+              </a:solidFill>
+              <a:latin typeface="Arial"/>
+              <a:ea typeface="Arial"/>
+              <a:cs typeface="Arial"/>
+              <a:sym typeface="Arial"/>
+            </a:endParaRPr>
           </a:p>
         </p:txBody>
       </p:sp>
@@ -5706,6 +6224,9 @@
           <a:lstStyle/>
           <a:p>
             <a:pPr indent="0" lvl="0" marL="0" marR="0" rtl="0" algn="ctr">
+              <a:lnSpc>
+                <a:spcPct val="100000"/>
+              </a:lnSpc>
               <a:spcBef>
                 <a:spcPts val="0"/>
               </a:spcBef>
@@ -5769,6 +6290,9 @@
           <a:lstStyle/>
           <a:p>
             <a:pPr indent="0" lvl="0" marL="0" marR="0" rtl="0" algn="ctr">
+              <a:lnSpc>
+                <a:spcPct val="100000"/>
+              </a:lnSpc>
               <a:spcBef>
                 <a:spcPts val="0"/>
               </a:spcBef>
@@ -5832,6 +6356,9 @@
           <a:lstStyle/>
           <a:p>
             <a:pPr indent="0" lvl="0" marL="0" marR="0" rtl="0" algn="ctr">
+              <a:lnSpc>
+                <a:spcPct val="100000"/>
+              </a:lnSpc>
               <a:spcBef>
                 <a:spcPts val="0"/>
               </a:spcBef>
@@ -5895,6 +6422,9 @@
           <a:lstStyle/>
           <a:p>
             <a:pPr indent="0" lvl="0" marL="0" marR="0" rtl="0" algn="ctr">
+              <a:lnSpc>
+                <a:spcPct val="100000"/>
+              </a:lnSpc>
               <a:spcBef>
                 <a:spcPts val="0"/>
               </a:spcBef>
@@ -5909,7 +6439,7 @@
               <a:buNone/>
             </a:pPr>
             <a:r>
-              <a:rPr lang="en-US" sz="850">
+              <a:rPr b="0" i="0" lang="en-US" sz="850" u="none" cap="none" strike="noStrike">
                 <a:solidFill>
                   <a:srgbClr val="3A5468"/>
                 </a:solidFill>
@@ -5918,43 +6448,7 @@
                 <a:cs typeface="Calibri"/>
                 <a:sym typeface="Calibri"/>
               </a:rPr>
-              <a:t>Cássio, Danyela, Gustavo e Wilker</a:t>
-            </a:r>
-            <a:r>
-              <a:rPr b="0" i="0" lang="en-US" sz="850" u="none" cap="none" strike="noStrike">
-                <a:solidFill>
-                  <a:srgbClr val="3A5468"/>
-                </a:solidFill>
-                <a:latin typeface="Calibri"/>
-                <a:ea typeface="Calibri"/>
-                <a:cs typeface="Calibri"/>
-                <a:sym typeface="Calibri"/>
-              </a:rPr>
-              <a:t> |  </a:t>
-            </a:r>
-            <a:r>
-              <a:rPr lang="en-US" sz="850">
-                <a:solidFill>
-                  <a:srgbClr val="3A5468"/>
-                </a:solidFill>
-                <a:latin typeface="Calibri"/>
-                <a:ea typeface="Calibri"/>
-                <a:cs typeface="Calibri"/>
-                <a:sym typeface="Calibri"/>
-              </a:rPr>
-              <a:t>AI Scientist</a:t>
-            </a:r>
-            <a:r>
-              <a:rPr b="0" i="0" lang="en-US" sz="850" u="none" cap="none" strike="noStrike">
-                <a:solidFill>
-                  <a:srgbClr val="3A5468"/>
-                </a:solidFill>
-                <a:latin typeface="Calibri"/>
-                <a:ea typeface="Calibri"/>
-                <a:cs typeface="Calibri"/>
-                <a:sym typeface="Calibri"/>
-              </a:rPr>
-              <a:t>  |  Tech Challenge — Fase 1</a:t>
+              <a:t>Cássio, Danyela, Gustavo e Wilker |  AI Scientist  |  Tech Challenge — Fase 1</a:t>
             </a:r>
             <a:endParaRPr b="0" i="0" sz="850" u="none" cap="none" strike="noStrike">
               <a:solidFill>
@@ -6033,19 +6527,35 @@
           </a:bodyPr>
           <a:lstStyle/>
           <a:p>
-            <a:pPr indent="0" lvl="0" marL="0" rtl="0" algn="l">
-              <a:spcBef>
-                <a:spcPts val="0"/>
-              </a:spcBef>
-              <a:spcAft>
-                <a:spcPts val="0"/>
-              </a:spcAft>
+            <a:pPr indent="0" lvl="0" marL="0" marR="0" rtl="0" algn="l">
+              <a:lnSpc>
+                <a:spcPct val="100000"/>
+              </a:lnSpc>
+              <a:spcBef>
+                <a:spcPts val="0"/>
+              </a:spcBef>
+              <a:spcAft>
+                <a:spcPts val="0"/>
+              </a:spcAft>
+              <a:buClr>
+                <a:srgbClr val="000000"/>
+              </a:buClr>
+              <a:buSzPts val="1400"/>
+              <a:buFont typeface="Arial"/>
               <a:buNone/>
             </a:pPr>
             <a:r>
               <a:t/>
             </a:r>
-            <a:endParaRPr/>
+            <a:endParaRPr b="0" i="0" sz="1400" u="none" cap="none" strike="noStrike">
+              <a:solidFill>
+                <a:srgbClr val="000000"/>
+              </a:solidFill>
+              <a:latin typeface="Arial"/>
+              <a:ea typeface="Arial"/>
+              <a:cs typeface="Arial"/>
+              <a:sym typeface="Arial"/>
+            </a:endParaRPr>
           </a:p>
         </p:txBody>
       </p:sp>
@@ -6075,6 +6585,9 @@
           <a:lstStyle/>
           <a:p>
             <a:pPr indent="0" lvl="0" marL="0" marR="0" rtl="0" algn="l">
+              <a:lnSpc>
+                <a:spcPct val="100000"/>
+              </a:lnSpc>
               <a:spcBef>
                 <a:spcPts val="0"/>
               </a:spcBef>
@@ -6138,6 +6651,9 @@
           <a:lstStyle/>
           <a:p>
             <a:pPr indent="0" lvl="0" marL="0" marR="0" rtl="0" algn="r">
+              <a:lnSpc>
+                <a:spcPct val="100000"/>
+              </a:lnSpc>
               <a:spcBef>
                 <a:spcPts val="0"/>
               </a:spcBef>
@@ -6208,19 +6724,35 @@
           </a:bodyPr>
           <a:lstStyle/>
           <a:p>
-            <a:pPr indent="0" lvl="0" marL="0" rtl="0" algn="l">
-              <a:spcBef>
-                <a:spcPts val="0"/>
-              </a:spcBef>
-              <a:spcAft>
-                <a:spcPts val="0"/>
-              </a:spcAft>
+            <a:pPr indent="0" lvl="0" marL="0" marR="0" rtl="0" algn="l">
+              <a:lnSpc>
+                <a:spcPct val="100000"/>
+              </a:lnSpc>
+              <a:spcBef>
+                <a:spcPts val="0"/>
+              </a:spcBef>
+              <a:spcAft>
+                <a:spcPts val="0"/>
+              </a:spcAft>
+              <a:buClr>
+                <a:srgbClr val="000000"/>
+              </a:buClr>
+              <a:buSzPts val="1400"/>
+              <a:buFont typeface="Arial"/>
               <a:buNone/>
             </a:pPr>
             <a:r>
               <a:t/>
             </a:r>
-            <a:endParaRPr/>
+            <a:endParaRPr b="0" i="0" sz="1400" u="none" cap="none" strike="noStrike">
+              <a:solidFill>
+                <a:srgbClr val="000000"/>
+              </a:solidFill>
+              <a:latin typeface="Arial"/>
+              <a:ea typeface="Arial"/>
+              <a:cs typeface="Arial"/>
+              <a:sym typeface="Arial"/>
+            </a:endParaRPr>
           </a:p>
         </p:txBody>
       </p:sp>
@@ -6250,6 +6782,9 @@
           <a:lstStyle/>
           <a:p>
             <a:pPr indent="0" lvl="0" marL="0" marR="0" rtl="0" algn="ctr">
+              <a:lnSpc>
+                <a:spcPct val="100000"/>
+              </a:lnSpc>
               <a:spcBef>
                 <a:spcPts val="0"/>
               </a:spcBef>
@@ -6309,43 +6844,7 @@
                 <a:cs typeface="Calibri"/>
                 <a:sym typeface="Calibri"/>
               </a:rPr>
-              <a:t>Quando o </a:t>
-            </a:r>
-            <a:r>
-              <a:rPr b="1" lang="en-US">
-                <a:solidFill>
-                  <a:srgbClr val="F4A261"/>
-                </a:solidFill>
-                <a:latin typeface="Calibri"/>
-                <a:ea typeface="Calibri"/>
-                <a:cs typeface="Calibri"/>
-                <a:sym typeface="Calibri"/>
-              </a:rPr>
-              <a:t>cliente já é </a:t>
-            </a:r>
-            <a:r>
-              <a:rPr b="1" lang="en-US">
-                <a:solidFill>
-                  <a:srgbClr val="F4A261"/>
-                </a:solidFill>
-                <a:latin typeface="Calibri"/>
-                <a:ea typeface="Calibri"/>
-                <a:cs typeface="Calibri"/>
-                <a:sym typeface="Calibri"/>
-              </a:rPr>
-              <a:t>detrator</a:t>
-            </a:r>
-            <a:r>
-              <a:rPr b="1" i="0" lang="en-US" sz="1400" u="none" cap="none" strike="noStrike">
-                <a:solidFill>
-                  <a:srgbClr val="F4A261"/>
-                </a:solidFill>
-                <a:latin typeface="Calibri"/>
-                <a:ea typeface="Calibri"/>
-                <a:cs typeface="Calibri"/>
-                <a:sym typeface="Calibri"/>
-              </a:rPr>
-              <a:t>.</a:t>
+              <a:t>Quando o cliente já é detrator.</a:t>
             </a:r>
             <a:endParaRPr b="0" i="0" sz="1400" u="none" cap="none" strike="noStrike">
               <a:solidFill>
@@ -6399,19 +6898,35 @@
           </a:bodyPr>
           <a:lstStyle/>
           <a:p>
-            <a:pPr indent="0" lvl="0" marL="0" rtl="0" algn="l">
-              <a:spcBef>
-                <a:spcPts val="0"/>
-              </a:spcBef>
-              <a:spcAft>
-                <a:spcPts val="0"/>
-              </a:spcAft>
+            <a:pPr indent="0" lvl="0" marL="0" marR="0" rtl="0" algn="l">
+              <a:lnSpc>
+                <a:spcPct val="100000"/>
+              </a:lnSpc>
+              <a:spcBef>
+                <a:spcPts val="0"/>
+              </a:spcBef>
+              <a:spcAft>
+                <a:spcPts val="0"/>
+              </a:spcAft>
+              <a:buClr>
+                <a:srgbClr val="000000"/>
+              </a:buClr>
+              <a:buSzPts val="1400"/>
+              <a:buFont typeface="Arial"/>
               <a:buNone/>
             </a:pPr>
             <a:r>
               <a:t/>
             </a:r>
-            <a:endParaRPr/>
+            <a:endParaRPr b="0" i="0" sz="1400" u="none" cap="none" strike="noStrike">
+              <a:solidFill>
+                <a:srgbClr val="000000"/>
+              </a:solidFill>
+              <a:latin typeface="Arial"/>
+              <a:ea typeface="Arial"/>
+              <a:cs typeface="Arial"/>
+              <a:sym typeface="Arial"/>
+            </a:endParaRPr>
           </a:p>
         </p:txBody>
       </p:sp>
@@ -6448,19 +6963,35 @@
           </a:bodyPr>
           <a:lstStyle/>
           <a:p>
-            <a:pPr indent="0" lvl="0" marL="0" rtl="0" algn="l">
-              <a:spcBef>
-                <a:spcPts val="0"/>
-              </a:spcBef>
-              <a:spcAft>
-                <a:spcPts val="0"/>
-              </a:spcAft>
+            <a:pPr indent="0" lvl="0" marL="0" marR="0" rtl="0" algn="l">
+              <a:lnSpc>
+                <a:spcPct val="100000"/>
+              </a:lnSpc>
+              <a:spcBef>
+                <a:spcPts val="0"/>
+              </a:spcBef>
+              <a:spcAft>
+                <a:spcPts val="0"/>
+              </a:spcAft>
+              <a:buClr>
+                <a:srgbClr val="000000"/>
+              </a:buClr>
+              <a:buSzPts val="1400"/>
+              <a:buFont typeface="Arial"/>
               <a:buNone/>
             </a:pPr>
             <a:r>
               <a:t/>
             </a:r>
-            <a:endParaRPr/>
+            <a:endParaRPr b="0" i="0" sz="1400" u="none" cap="none" strike="noStrike">
+              <a:solidFill>
+                <a:srgbClr val="000000"/>
+              </a:solidFill>
+              <a:latin typeface="Arial"/>
+              <a:ea typeface="Arial"/>
+              <a:cs typeface="Arial"/>
+              <a:sym typeface="Arial"/>
+            </a:endParaRPr>
           </a:p>
         </p:txBody>
       </p:sp>
@@ -6490,6 +7021,9 @@
           <a:lstStyle/>
           <a:p>
             <a:pPr indent="0" lvl="0" marL="0" marR="0" rtl="0" algn="l">
+              <a:lnSpc>
+                <a:spcPct val="100000"/>
+              </a:lnSpc>
               <a:spcBef>
                 <a:spcPts val="0"/>
               </a:spcBef>
@@ -6553,6 +7087,9 @@
           <a:lstStyle/>
           <a:p>
             <a:pPr indent="0" lvl="0" marL="0" marR="0" rtl="0" algn="l">
+              <a:lnSpc>
+                <a:spcPct val="100000"/>
+              </a:lnSpc>
               <a:spcBef>
                 <a:spcPts val="0"/>
               </a:spcBef>
@@ -6616,6 +7153,9 @@
           <a:lstStyle/>
           <a:p>
             <a:pPr indent="0" lvl="0" marL="0" marR="0" rtl="0" algn="l">
+              <a:lnSpc>
+                <a:spcPct val="100000"/>
+              </a:lnSpc>
               <a:spcBef>
                 <a:spcPts val="0"/>
               </a:spcBef>
@@ -6693,19 +7233,35 @@
           </a:bodyPr>
           <a:lstStyle/>
           <a:p>
-            <a:pPr indent="0" lvl="0" marL="0" rtl="0" algn="l">
-              <a:spcBef>
-                <a:spcPts val="0"/>
-              </a:spcBef>
-              <a:spcAft>
-                <a:spcPts val="0"/>
-              </a:spcAft>
+            <a:pPr indent="0" lvl="0" marL="0" marR="0" rtl="0" algn="l">
+              <a:lnSpc>
+                <a:spcPct val="100000"/>
+              </a:lnSpc>
+              <a:spcBef>
+                <a:spcPts val="0"/>
+              </a:spcBef>
+              <a:spcAft>
+                <a:spcPts val="0"/>
+              </a:spcAft>
+              <a:buClr>
+                <a:srgbClr val="000000"/>
+              </a:buClr>
+              <a:buSzPts val="1400"/>
+              <a:buFont typeface="Arial"/>
               <a:buNone/>
             </a:pPr>
             <a:r>
               <a:t/>
             </a:r>
-            <a:endParaRPr/>
+            <a:endParaRPr b="0" i="0" sz="1400" u="none" cap="none" strike="noStrike">
+              <a:solidFill>
+                <a:srgbClr val="000000"/>
+              </a:solidFill>
+              <a:latin typeface="Arial"/>
+              <a:ea typeface="Arial"/>
+              <a:cs typeface="Arial"/>
+              <a:sym typeface="Arial"/>
+            </a:endParaRPr>
           </a:p>
         </p:txBody>
       </p:sp>
@@ -6742,19 +7298,35 @@
           </a:bodyPr>
           <a:lstStyle/>
           <a:p>
-            <a:pPr indent="0" lvl="0" marL="0" rtl="0" algn="l">
-              <a:spcBef>
-                <a:spcPts val="0"/>
-              </a:spcBef>
-              <a:spcAft>
-                <a:spcPts val="0"/>
-              </a:spcAft>
+            <a:pPr indent="0" lvl="0" marL="0" marR="0" rtl="0" algn="l">
+              <a:lnSpc>
+                <a:spcPct val="100000"/>
+              </a:lnSpc>
+              <a:spcBef>
+                <a:spcPts val="0"/>
+              </a:spcBef>
+              <a:spcAft>
+                <a:spcPts val="0"/>
+              </a:spcAft>
+              <a:buClr>
+                <a:srgbClr val="000000"/>
+              </a:buClr>
+              <a:buSzPts val="1400"/>
+              <a:buFont typeface="Arial"/>
               <a:buNone/>
             </a:pPr>
             <a:r>
               <a:t/>
             </a:r>
-            <a:endParaRPr/>
+            <a:endParaRPr b="0" i="0" sz="1400" u="none" cap="none" strike="noStrike">
+              <a:solidFill>
+                <a:srgbClr val="000000"/>
+              </a:solidFill>
+              <a:latin typeface="Arial"/>
+              <a:ea typeface="Arial"/>
+              <a:cs typeface="Arial"/>
+              <a:sym typeface="Arial"/>
+            </a:endParaRPr>
           </a:p>
         </p:txBody>
       </p:sp>
@@ -6784,6 +7356,9 @@
           <a:lstStyle/>
           <a:p>
             <a:pPr indent="0" lvl="0" marL="0" marR="0" rtl="0" algn="l">
+              <a:lnSpc>
+                <a:spcPct val="100000"/>
+              </a:lnSpc>
               <a:spcBef>
                 <a:spcPts val="0"/>
               </a:spcBef>
@@ -6847,6 +7422,9 @@
           <a:lstStyle/>
           <a:p>
             <a:pPr indent="0" lvl="0" marL="0" marR="0" rtl="0" algn="l">
+              <a:lnSpc>
+                <a:spcPct val="100000"/>
+              </a:lnSpc>
               <a:spcBef>
                 <a:spcPts val="0"/>
               </a:spcBef>
@@ -6910,6 +7488,9 @@
           <a:lstStyle/>
           <a:p>
             <a:pPr indent="0" lvl="0" marL="0" marR="0" rtl="0" algn="l">
+              <a:lnSpc>
+                <a:spcPct val="100000"/>
+              </a:lnSpc>
               <a:spcBef>
                 <a:spcPts val="0"/>
               </a:spcBef>
@@ -6987,19 +7568,35 @@
           </a:bodyPr>
           <a:lstStyle/>
           <a:p>
-            <a:pPr indent="0" lvl="0" marL="0" rtl="0" algn="l">
-              <a:spcBef>
-                <a:spcPts val="0"/>
-              </a:spcBef>
-              <a:spcAft>
-                <a:spcPts val="0"/>
-              </a:spcAft>
+            <a:pPr indent="0" lvl="0" marL="0" marR="0" rtl="0" algn="l">
+              <a:lnSpc>
+                <a:spcPct val="100000"/>
+              </a:lnSpc>
+              <a:spcBef>
+                <a:spcPts val="0"/>
+              </a:spcBef>
+              <a:spcAft>
+                <a:spcPts val="0"/>
+              </a:spcAft>
+              <a:buClr>
+                <a:srgbClr val="000000"/>
+              </a:buClr>
+              <a:buSzPts val="1400"/>
+              <a:buFont typeface="Arial"/>
               <a:buNone/>
             </a:pPr>
             <a:r>
               <a:t/>
             </a:r>
-            <a:endParaRPr/>
+            <a:endParaRPr b="0" i="0" sz="1400" u="none" cap="none" strike="noStrike">
+              <a:solidFill>
+                <a:srgbClr val="000000"/>
+              </a:solidFill>
+              <a:latin typeface="Arial"/>
+              <a:ea typeface="Arial"/>
+              <a:cs typeface="Arial"/>
+              <a:sym typeface="Arial"/>
+            </a:endParaRPr>
           </a:p>
         </p:txBody>
       </p:sp>
@@ -7036,19 +7633,35 @@
           </a:bodyPr>
           <a:lstStyle/>
           <a:p>
-            <a:pPr indent="0" lvl="0" marL="0" rtl="0" algn="l">
-              <a:spcBef>
-                <a:spcPts val="0"/>
-              </a:spcBef>
-              <a:spcAft>
-                <a:spcPts val="0"/>
-              </a:spcAft>
+            <a:pPr indent="0" lvl="0" marL="0" marR="0" rtl="0" algn="l">
+              <a:lnSpc>
+                <a:spcPct val="100000"/>
+              </a:lnSpc>
+              <a:spcBef>
+                <a:spcPts val="0"/>
+              </a:spcBef>
+              <a:spcAft>
+                <a:spcPts val="0"/>
+              </a:spcAft>
+              <a:buClr>
+                <a:srgbClr val="000000"/>
+              </a:buClr>
+              <a:buSzPts val="1400"/>
+              <a:buFont typeface="Arial"/>
               <a:buNone/>
             </a:pPr>
             <a:r>
               <a:t/>
             </a:r>
-            <a:endParaRPr/>
+            <a:endParaRPr b="0" i="0" sz="1400" u="none" cap="none" strike="noStrike">
+              <a:solidFill>
+                <a:srgbClr val="000000"/>
+              </a:solidFill>
+              <a:latin typeface="Arial"/>
+              <a:ea typeface="Arial"/>
+              <a:cs typeface="Arial"/>
+              <a:sym typeface="Arial"/>
+            </a:endParaRPr>
           </a:p>
         </p:txBody>
       </p:sp>
@@ -7078,6 +7691,9 @@
           <a:lstStyle/>
           <a:p>
             <a:pPr indent="0" lvl="0" marL="0" marR="0" rtl="0" algn="l">
+              <a:lnSpc>
+                <a:spcPct val="100000"/>
+              </a:lnSpc>
               <a:spcBef>
                 <a:spcPts val="0"/>
               </a:spcBef>
@@ -7141,6 +7757,9 @@
           <a:lstStyle/>
           <a:p>
             <a:pPr indent="0" lvl="0" marL="0" marR="0" rtl="0" algn="l">
+              <a:lnSpc>
+                <a:spcPct val="100000"/>
+              </a:lnSpc>
               <a:spcBef>
                 <a:spcPts val="0"/>
               </a:spcBef>
@@ -7204,6 +7823,9 @@
           <a:lstStyle/>
           <a:p>
             <a:pPr indent="0" lvl="0" marL="0" marR="0" rtl="0" algn="l">
+              <a:lnSpc>
+                <a:spcPct val="100000"/>
+              </a:lnSpc>
               <a:spcBef>
                 <a:spcPts val="0"/>
               </a:spcBef>
@@ -7306,19 +7928,35 @@
           </a:bodyPr>
           <a:lstStyle/>
           <a:p>
-            <a:pPr indent="0" lvl="0" marL="0" rtl="0" algn="l">
-              <a:spcBef>
-                <a:spcPts val="0"/>
-              </a:spcBef>
-              <a:spcAft>
-                <a:spcPts val="0"/>
-              </a:spcAft>
+            <a:pPr indent="0" lvl="0" marL="0" marR="0" rtl="0" algn="l">
+              <a:lnSpc>
+                <a:spcPct val="100000"/>
+              </a:lnSpc>
+              <a:spcBef>
+                <a:spcPts val="0"/>
+              </a:spcBef>
+              <a:spcAft>
+                <a:spcPts val="0"/>
+              </a:spcAft>
+              <a:buClr>
+                <a:srgbClr val="000000"/>
+              </a:buClr>
+              <a:buSzPts val="1400"/>
+              <a:buFont typeface="Arial"/>
               <a:buNone/>
             </a:pPr>
             <a:r>
               <a:t/>
             </a:r>
-            <a:endParaRPr/>
+            <a:endParaRPr b="0" i="0" sz="1400" u="none" cap="none" strike="noStrike">
+              <a:solidFill>
+                <a:srgbClr val="000000"/>
+              </a:solidFill>
+              <a:latin typeface="Arial"/>
+              <a:ea typeface="Arial"/>
+              <a:cs typeface="Arial"/>
+              <a:sym typeface="Arial"/>
+            </a:endParaRPr>
           </a:p>
         </p:txBody>
       </p:sp>
@@ -7348,6 +7986,9 @@
           <a:lstStyle/>
           <a:p>
             <a:pPr indent="0" lvl="0" marL="0" marR="0" rtl="0" algn="l">
+              <a:lnSpc>
+                <a:spcPct val="100000"/>
+              </a:lnSpc>
               <a:spcBef>
                 <a:spcPts val="0"/>
               </a:spcBef>
@@ -7418,19 +8059,35 @@
           </a:bodyPr>
           <a:lstStyle/>
           <a:p>
-            <a:pPr indent="0" lvl="0" marL="0" rtl="0" algn="l">
-              <a:spcBef>
-                <a:spcPts val="0"/>
-              </a:spcBef>
-              <a:spcAft>
-                <a:spcPts val="0"/>
-              </a:spcAft>
+            <a:pPr indent="0" lvl="0" marL="0" marR="0" rtl="0" algn="l">
+              <a:lnSpc>
+                <a:spcPct val="100000"/>
+              </a:lnSpc>
+              <a:spcBef>
+                <a:spcPts val="0"/>
+              </a:spcBef>
+              <a:spcAft>
+                <a:spcPts val="0"/>
+              </a:spcAft>
+              <a:buClr>
+                <a:srgbClr val="000000"/>
+              </a:buClr>
+              <a:buSzPts val="1400"/>
+              <a:buFont typeface="Arial"/>
               <a:buNone/>
             </a:pPr>
             <a:r>
               <a:t/>
             </a:r>
-            <a:endParaRPr/>
+            <a:endParaRPr b="0" i="0" sz="1400" u="none" cap="none" strike="noStrike">
+              <a:solidFill>
+                <a:srgbClr val="000000"/>
+              </a:solidFill>
+              <a:latin typeface="Arial"/>
+              <a:ea typeface="Arial"/>
+              <a:cs typeface="Arial"/>
+              <a:sym typeface="Arial"/>
+            </a:endParaRPr>
           </a:p>
         </p:txBody>
       </p:sp>
@@ -7460,6 +8117,9 @@
           <a:lstStyle/>
           <a:p>
             <a:pPr indent="0" lvl="0" marL="0" marR="0" rtl="0" algn="ctr">
+              <a:lnSpc>
+                <a:spcPct val="100000"/>
+              </a:lnSpc>
               <a:spcBef>
                 <a:spcPts val="0"/>
               </a:spcBef>
@@ -7497,6 +8157,9 @@
           </a:p>
           <a:p>
             <a:pPr indent="0" lvl="0" marL="0" marR="0" rtl="0" algn="ctr">
+              <a:lnSpc>
+                <a:spcPct val="100000"/>
+              </a:lnSpc>
               <a:spcBef>
                 <a:spcPts val="0"/>
               </a:spcBef>
@@ -7560,6 +8223,9 @@
           <a:lstStyle/>
           <a:p>
             <a:pPr indent="0" lvl="0" marL="0" marR="0" rtl="0" algn="l">
+              <a:lnSpc>
+                <a:spcPct val="100000"/>
+              </a:lnSpc>
               <a:spcBef>
                 <a:spcPts val="0"/>
               </a:spcBef>
@@ -7630,19 +8296,35 @@
           </a:bodyPr>
           <a:lstStyle/>
           <a:p>
-            <a:pPr indent="0" lvl="0" marL="0" rtl="0" algn="l">
-              <a:spcBef>
-                <a:spcPts val="0"/>
-              </a:spcBef>
-              <a:spcAft>
-                <a:spcPts val="0"/>
-              </a:spcAft>
+            <a:pPr indent="0" lvl="0" marL="0" marR="0" rtl="0" algn="l">
+              <a:lnSpc>
+                <a:spcPct val="100000"/>
+              </a:lnSpc>
+              <a:spcBef>
+                <a:spcPts val="0"/>
+              </a:spcBef>
+              <a:spcAft>
+                <a:spcPts val="0"/>
+              </a:spcAft>
+              <a:buClr>
+                <a:srgbClr val="000000"/>
+              </a:buClr>
+              <a:buSzPts val="1400"/>
+              <a:buFont typeface="Arial"/>
               <a:buNone/>
             </a:pPr>
             <a:r>
               <a:t/>
             </a:r>
-            <a:endParaRPr/>
+            <a:endParaRPr b="0" i="0" sz="1400" u="none" cap="none" strike="noStrike">
+              <a:solidFill>
+                <a:srgbClr val="000000"/>
+              </a:solidFill>
+              <a:latin typeface="Arial"/>
+              <a:ea typeface="Arial"/>
+              <a:cs typeface="Arial"/>
+              <a:sym typeface="Arial"/>
+            </a:endParaRPr>
           </a:p>
         </p:txBody>
       </p:sp>
@@ -7672,6 +8354,9 @@
           <a:lstStyle/>
           <a:p>
             <a:pPr indent="0" lvl="0" marL="0" marR="0" rtl="0" algn="ctr">
+              <a:lnSpc>
+                <a:spcPct val="100000"/>
+              </a:lnSpc>
               <a:spcBef>
                 <a:spcPts val="0"/>
               </a:spcBef>
@@ -7735,6 +8420,9 @@
           <a:lstStyle/>
           <a:p>
             <a:pPr indent="0" lvl="0" marL="0" marR="0" rtl="0" algn="l">
+              <a:lnSpc>
+                <a:spcPct val="100000"/>
+              </a:lnSpc>
               <a:spcBef>
                 <a:spcPts val="0"/>
               </a:spcBef>
@@ -7805,19 +8493,35 @@
           </a:bodyPr>
           <a:lstStyle/>
           <a:p>
-            <a:pPr indent="0" lvl="0" marL="0" rtl="0" algn="l">
-              <a:spcBef>
-                <a:spcPts val="0"/>
-              </a:spcBef>
-              <a:spcAft>
-                <a:spcPts val="0"/>
-              </a:spcAft>
+            <a:pPr indent="0" lvl="0" marL="0" marR="0" rtl="0" algn="l">
+              <a:lnSpc>
+                <a:spcPct val="100000"/>
+              </a:lnSpc>
+              <a:spcBef>
+                <a:spcPts val="0"/>
+              </a:spcBef>
+              <a:spcAft>
+                <a:spcPts val="0"/>
+              </a:spcAft>
+              <a:buClr>
+                <a:srgbClr val="000000"/>
+              </a:buClr>
+              <a:buSzPts val="1400"/>
+              <a:buFont typeface="Arial"/>
               <a:buNone/>
             </a:pPr>
             <a:r>
               <a:t/>
             </a:r>
-            <a:endParaRPr/>
+            <a:endParaRPr b="0" i="0" sz="1400" u="none" cap="none" strike="noStrike">
+              <a:solidFill>
+                <a:srgbClr val="000000"/>
+              </a:solidFill>
+              <a:latin typeface="Arial"/>
+              <a:ea typeface="Arial"/>
+              <a:cs typeface="Arial"/>
+              <a:sym typeface="Arial"/>
+            </a:endParaRPr>
           </a:p>
         </p:txBody>
       </p:sp>
@@ -7847,6 +8551,9 @@
           <a:lstStyle/>
           <a:p>
             <a:pPr indent="0" lvl="0" marL="0" marR="0" rtl="0" algn="ctr">
+              <a:lnSpc>
+                <a:spcPct val="100000"/>
+              </a:lnSpc>
               <a:spcBef>
                 <a:spcPts val="0"/>
               </a:spcBef>
@@ -7910,6 +8617,9 @@
           <a:lstStyle/>
           <a:p>
             <a:pPr indent="0" lvl="0" marL="0" marR="0" rtl="0" algn="l">
+              <a:lnSpc>
+                <a:spcPct val="100000"/>
+              </a:lnSpc>
               <a:spcBef>
                 <a:spcPts val="0"/>
               </a:spcBef>
@@ -7980,19 +8690,35 @@
           </a:bodyPr>
           <a:lstStyle/>
           <a:p>
-            <a:pPr indent="0" lvl="0" marL="0" rtl="0" algn="l">
-              <a:spcBef>
-                <a:spcPts val="0"/>
-              </a:spcBef>
-              <a:spcAft>
-                <a:spcPts val="0"/>
-              </a:spcAft>
+            <a:pPr indent="0" lvl="0" marL="0" marR="0" rtl="0" algn="l">
+              <a:lnSpc>
+                <a:spcPct val="100000"/>
+              </a:lnSpc>
+              <a:spcBef>
+                <a:spcPts val="0"/>
+              </a:spcBef>
+              <a:spcAft>
+                <a:spcPts val="0"/>
+              </a:spcAft>
+              <a:buClr>
+                <a:srgbClr val="000000"/>
+              </a:buClr>
+              <a:buSzPts val="1400"/>
+              <a:buFont typeface="Arial"/>
               <a:buNone/>
             </a:pPr>
             <a:r>
               <a:t/>
             </a:r>
-            <a:endParaRPr/>
+            <a:endParaRPr b="0" i="0" sz="1400" u="none" cap="none" strike="noStrike">
+              <a:solidFill>
+                <a:srgbClr val="000000"/>
+              </a:solidFill>
+              <a:latin typeface="Arial"/>
+              <a:ea typeface="Arial"/>
+              <a:cs typeface="Arial"/>
+              <a:sym typeface="Arial"/>
+            </a:endParaRPr>
           </a:p>
         </p:txBody>
       </p:sp>
@@ -8022,6 +8748,9 @@
           <a:lstStyle/>
           <a:p>
             <a:pPr indent="0" lvl="0" marL="0" marR="0" rtl="0" algn="ctr">
+              <a:lnSpc>
+                <a:spcPct val="100000"/>
+              </a:lnSpc>
               <a:spcBef>
                 <a:spcPts val="0"/>
               </a:spcBef>
@@ -8085,6 +8814,9 @@
           <a:lstStyle/>
           <a:p>
             <a:pPr indent="0" lvl="0" marL="0" marR="0" rtl="0" algn="l">
+              <a:lnSpc>
+                <a:spcPct val="100000"/>
+              </a:lnSpc>
               <a:spcBef>
                 <a:spcPts val="0"/>
               </a:spcBef>
@@ -8187,19 +8919,35 @@
           </a:bodyPr>
           <a:lstStyle/>
           <a:p>
-            <a:pPr indent="0" lvl="0" marL="0" rtl="0" algn="l">
-              <a:spcBef>
-                <a:spcPts val="0"/>
-              </a:spcBef>
-              <a:spcAft>
-                <a:spcPts val="0"/>
-              </a:spcAft>
+            <a:pPr indent="0" lvl="0" marL="0" marR="0" rtl="0" algn="l">
+              <a:lnSpc>
+                <a:spcPct val="100000"/>
+              </a:lnSpc>
+              <a:spcBef>
+                <a:spcPts val="0"/>
+              </a:spcBef>
+              <a:spcAft>
+                <a:spcPts val="0"/>
+              </a:spcAft>
+              <a:buClr>
+                <a:srgbClr val="000000"/>
+              </a:buClr>
+              <a:buSzPts val="1400"/>
+              <a:buFont typeface="Arial"/>
               <a:buNone/>
             </a:pPr>
             <a:r>
               <a:t/>
             </a:r>
-            <a:endParaRPr/>
+            <a:endParaRPr b="0" i="0" sz="1400" u="none" cap="none" strike="noStrike">
+              <a:solidFill>
+                <a:srgbClr val="000000"/>
+              </a:solidFill>
+              <a:latin typeface="Arial"/>
+              <a:ea typeface="Arial"/>
+              <a:cs typeface="Arial"/>
+              <a:sym typeface="Arial"/>
+            </a:endParaRPr>
           </a:p>
         </p:txBody>
       </p:sp>
@@ -8229,6 +8977,9 @@
           <a:lstStyle/>
           <a:p>
             <a:pPr indent="0" lvl="0" marL="0" marR="0" rtl="0" algn="l">
+              <a:lnSpc>
+                <a:spcPct val="100000"/>
+              </a:lnSpc>
               <a:spcBef>
                 <a:spcPts val="0"/>
               </a:spcBef>
@@ -8292,6 +9043,9 @@
           <a:lstStyle/>
           <a:p>
             <a:pPr indent="0" lvl="0" marL="0" marR="0" rtl="0" algn="r">
+              <a:lnSpc>
+                <a:spcPct val="100000"/>
+              </a:lnSpc>
               <a:spcBef>
                 <a:spcPts val="0"/>
               </a:spcBef>
@@ -8306,7 +9060,7 @@
               <a:buNone/>
             </a:pPr>
             <a:r>
-              <a:rPr lang="en-US" sz="1200">
+              <a:rPr b="0" i="0" lang="en-US" sz="1200" u="none" cap="none" strike="noStrike">
                 <a:solidFill>
                   <a:srgbClr val="00A896"/>
                 </a:solidFill>
@@ -8362,19 +9116,35 @@
           </a:bodyPr>
           <a:lstStyle/>
           <a:p>
-            <a:pPr indent="0" lvl="0" marL="0" rtl="0" algn="l">
-              <a:spcBef>
-                <a:spcPts val="0"/>
-              </a:spcBef>
-              <a:spcAft>
-                <a:spcPts val="0"/>
-              </a:spcAft>
+            <a:pPr indent="0" lvl="0" marL="0" marR="0" rtl="0" algn="l">
+              <a:lnSpc>
+                <a:spcPct val="100000"/>
+              </a:lnSpc>
+              <a:spcBef>
+                <a:spcPts val="0"/>
+              </a:spcBef>
+              <a:spcAft>
+                <a:spcPts val="0"/>
+              </a:spcAft>
+              <a:buClr>
+                <a:srgbClr val="000000"/>
+              </a:buClr>
+              <a:buSzPts val="1400"/>
+              <a:buFont typeface="Arial"/>
               <a:buNone/>
             </a:pPr>
             <a:r>
               <a:t/>
             </a:r>
-            <a:endParaRPr/>
+            <a:endParaRPr b="0" i="0" sz="1400" u="none" cap="none" strike="noStrike">
+              <a:solidFill>
+                <a:srgbClr val="000000"/>
+              </a:solidFill>
+              <a:latin typeface="Arial"/>
+              <a:ea typeface="Arial"/>
+              <a:cs typeface="Arial"/>
+              <a:sym typeface="Arial"/>
+            </a:endParaRPr>
           </a:p>
         </p:txBody>
       </p:sp>
@@ -8404,6 +9174,9 @@
           <a:lstStyle/>
           <a:p>
             <a:pPr indent="0" lvl="0" marL="0" marR="0" rtl="0" algn="ctr">
+              <a:lnSpc>
+                <a:spcPct val="100000"/>
+              </a:lnSpc>
               <a:spcBef>
                 <a:spcPts val="0"/>
               </a:spcBef>
@@ -8467,6 +9240,9 @@
           <a:lstStyle/>
           <a:p>
             <a:pPr indent="0" lvl="0" marL="0" marR="0" rtl="0" algn="ctr">
+              <a:lnSpc>
+                <a:spcPct val="100000"/>
+              </a:lnSpc>
               <a:spcBef>
                 <a:spcPts val="0"/>
               </a:spcBef>
@@ -8504,6 +9280,9 @@
           </a:p>
           <a:p>
             <a:pPr indent="0" lvl="0" marL="0" marR="0" rtl="0" algn="ctr">
+              <a:lnSpc>
+                <a:spcPct val="100000"/>
+              </a:lnSpc>
               <a:spcBef>
                 <a:spcPts val="0"/>
               </a:spcBef>
@@ -8567,6 +9346,9 @@
           <a:lstStyle/>
           <a:p>
             <a:pPr indent="0" lvl="0" marL="0" marR="0" rtl="0" algn="ctr">
+              <a:lnSpc>
+                <a:spcPct val="100000"/>
+              </a:lnSpc>
               <a:spcBef>
                 <a:spcPts val="0"/>
               </a:spcBef>
@@ -8630,6 +9412,9 @@
           <a:lstStyle/>
           <a:p>
             <a:pPr indent="0" lvl="0" marL="0" marR="0" rtl="0" algn="ctr">
+              <a:lnSpc>
+                <a:spcPct val="100000"/>
+              </a:lnSpc>
               <a:spcBef>
                 <a:spcPts val="0"/>
               </a:spcBef>
@@ -8667,6 +9452,9 @@
           </a:p>
           <a:p>
             <a:pPr indent="0" lvl="0" marL="0" marR="0" rtl="0" algn="ctr">
+              <a:lnSpc>
+                <a:spcPct val="100000"/>
+              </a:lnSpc>
               <a:spcBef>
                 <a:spcPts val="0"/>
               </a:spcBef>
@@ -8730,6 +9518,9 @@
           <a:lstStyle/>
           <a:p>
             <a:pPr indent="0" lvl="0" marL="0" marR="0" rtl="0" algn="ctr">
+              <a:lnSpc>
+                <a:spcPct val="100000"/>
+              </a:lnSpc>
               <a:spcBef>
                 <a:spcPts val="0"/>
               </a:spcBef>
@@ -8767,6 +9558,9 @@
           </a:p>
           <a:p>
             <a:pPr indent="0" lvl="0" marL="0" marR="0" rtl="0" algn="ctr">
+              <a:lnSpc>
+                <a:spcPct val="100000"/>
+              </a:lnSpc>
               <a:spcBef>
                 <a:spcPts val="0"/>
               </a:spcBef>
@@ -8844,19 +9638,35 @@
           </a:bodyPr>
           <a:lstStyle/>
           <a:p>
-            <a:pPr indent="0" lvl="0" marL="0" rtl="0" algn="l">
-              <a:spcBef>
-                <a:spcPts val="0"/>
-              </a:spcBef>
-              <a:spcAft>
-                <a:spcPts val="0"/>
-              </a:spcAft>
+            <a:pPr indent="0" lvl="0" marL="0" marR="0" rtl="0" algn="l">
+              <a:lnSpc>
+                <a:spcPct val="100000"/>
+              </a:lnSpc>
+              <a:spcBef>
+                <a:spcPts val="0"/>
+              </a:spcBef>
+              <a:spcAft>
+                <a:spcPts val="0"/>
+              </a:spcAft>
+              <a:buClr>
+                <a:srgbClr val="000000"/>
+              </a:buClr>
+              <a:buSzPts val="1400"/>
+              <a:buFont typeface="Arial"/>
               <a:buNone/>
             </a:pPr>
             <a:r>
               <a:t/>
             </a:r>
-            <a:endParaRPr/>
+            <a:endParaRPr b="0" i="0" sz="1400" u="none" cap="none" strike="noStrike">
+              <a:solidFill>
+                <a:srgbClr val="000000"/>
+              </a:solidFill>
+              <a:latin typeface="Arial"/>
+              <a:ea typeface="Arial"/>
+              <a:cs typeface="Arial"/>
+              <a:sym typeface="Arial"/>
+            </a:endParaRPr>
           </a:p>
         </p:txBody>
       </p:sp>
@@ -8893,19 +9703,35 @@
           </a:bodyPr>
           <a:lstStyle/>
           <a:p>
-            <a:pPr indent="0" lvl="0" marL="0" rtl="0" algn="l">
-              <a:spcBef>
-                <a:spcPts val="0"/>
-              </a:spcBef>
-              <a:spcAft>
-                <a:spcPts val="0"/>
-              </a:spcAft>
+            <a:pPr indent="0" lvl="0" marL="0" marR="0" rtl="0" algn="l">
+              <a:lnSpc>
+                <a:spcPct val="100000"/>
+              </a:lnSpc>
+              <a:spcBef>
+                <a:spcPts val="0"/>
+              </a:spcBef>
+              <a:spcAft>
+                <a:spcPts val="0"/>
+              </a:spcAft>
+              <a:buClr>
+                <a:srgbClr val="000000"/>
+              </a:buClr>
+              <a:buSzPts val="1400"/>
+              <a:buFont typeface="Arial"/>
               <a:buNone/>
             </a:pPr>
             <a:r>
               <a:t/>
             </a:r>
-            <a:endParaRPr/>
+            <a:endParaRPr b="0" i="0" sz="1400" u="none" cap="none" strike="noStrike">
+              <a:solidFill>
+                <a:srgbClr val="000000"/>
+              </a:solidFill>
+              <a:latin typeface="Arial"/>
+              <a:ea typeface="Arial"/>
+              <a:cs typeface="Arial"/>
+              <a:sym typeface="Arial"/>
+            </a:endParaRPr>
           </a:p>
         </p:txBody>
       </p:sp>
@@ -8935,6 +9761,9 @@
           <a:lstStyle/>
           <a:p>
             <a:pPr indent="0" lvl="0" marL="0" marR="0" rtl="0" algn="ctr">
+              <a:lnSpc>
+                <a:spcPct val="100000"/>
+              </a:lnSpc>
               <a:spcBef>
                 <a:spcPts val="0"/>
               </a:spcBef>
@@ -8998,6 +9827,9 @@
           <a:lstStyle/>
           <a:p>
             <a:pPr indent="0" lvl="0" marL="0" marR="0" rtl="0" algn="l">
+              <a:lnSpc>
+                <a:spcPct val="100000"/>
+              </a:lnSpc>
               <a:spcBef>
                 <a:spcPts val="0"/>
               </a:spcBef>
@@ -9061,6 +9893,9 @@
           <a:lstStyle/>
           <a:p>
             <a:pPr indent="0" lvl="0" marL="0" marR="0" rtl="0" algn="l">
+              <a:lnSpc>
+                <a:spcPct val="100000"/>
+              </a:lnSpc>
               <a:spcBef>
                 <a:spcPts val="0"/>
               </a:spcBef>
@@ -9138,19 +9973,35 @@
           </a:bodyPr>
           <a:lstStyle/>
           <a:p>
-            <a:pPr indent="0" lvl="0" marL="0" rtl="0" algn="l">
-              <a:spcBef>
-                <a:spcPts val="0"/>
-              </a:spcBef>
-              <a:spcAft>
-                <a:spcPts val="0"/>
-              </a:spcAft>
+            <a:pPr indent="0" lvl="0" marL="0" marR="0" rtl="0" algn="l">
+              <a:lnSpc>
+                <a:spcPct val="100000"/>
+              </a:lnSpc>
+              <a:spcBef>
+                <a:spcPts val="0"/>
+              </a:spcBef>
+              <a:spcAft>
+                <a:spcPts val="0"/>
+              </a:spcAft>
+              <a:buClr>
+                <a:srgbClr val="000000"/>
+              </a:buClr>
+              <a:buSzPts val="1400"/>
+              <a:buFont typeface="Arial"/>
               <a:buNone/>
             </a:pPr>
             <a:r>
               <a:t/>
             </a:r>
-            <a:endParaRPr/>
+            <a:endParaRPr b="0" i="0" sz="1400" u="none" cap="none" strike="noStrike">
+              <a:solidFill>
+                <a:srgbClr val="000000"/>
+              </a:solidFill>
+              <a:latin typeface="Arial"/>
+              <a:ea typeface="Arial"/>
+              <a:cs typeface="Arial"/>
+              <a:sym typeface="Arial"/>
+            </a:endParaRPr>
           </a:p>
         </p:txBody>
       </p:sp>
@@ -9187,19 +10038,35 @@
           </a:bodyPr>
           <a:lstStyle/>
           <a:p>
-            <a:pPr indent="0" lvl="0" marL="0" rtl="0" algn="l">
-              <a:spcBef>
-                <a:spcPts val="0"/>
-              </a:spcBef>
-              <a:spcAft>
-                <a:spcPts val="0"/>
-              </a:spcAft>
+            <a:pPr indent="0" lvl="0" marL="0" marR="0" rtl="0" algn="l">
+              <a:lnSpc>
+                <a:spcPct val="100000"/>
+              </a:lnSpc>
+              <a:spcBef>
+                <a:spcPts val="0"/>
+              </a:spcBef>
+              <a:spcAft>
+                <a:spcPts val="0"/>
+              </a:spcAft>
+              <a:buClr>
+                <a:srgbClr val="000000"/>
+              </a:buClr>
+              <a:buSzPts val="1400"/>
+              <a:buFont typeface="Arial"/>
               <a:buNone/>
             </a:pPr>
             <a:r>
               <a:t/>
             </a:r>
-            <a:endParaRPr/>
+            <a:endParaRPr b="0" i="0" sz="1400" u="none" cap="none" strike="noStrike">
+              <a:solidFill>
+                <a:srgbClr val="000000"/>
+              </a:solidFill>
+              <a:latin typeface="Arial"/>
+              <a:ea typeface="Arial"/>
+              <a:cs typeface="Arial"/>
+              <a:sym typeface="Arial"/>
+            </a:endParaRPr>
           </a:p>
         </p:txBody>
       </p:sp>
@@ -9229,6 +10096,9 @@
           <a:lstStyle/>
           <a:p>
             <a:pPr indent="0" lvl="0" marL="0" marR="0" rtl="0" algn="ctr">
+              <a:lnSpc>
+                <a:spcPct val="100000"/>
+              </a:lnSpc>
               <a:spcBef>
                 <a:spcPts val="0"/>
               </a:spcBef>
@@ -9292,6 +10162,9 @@
           <a:lstStyle/>
           <a:p>
             <a:pPr indent="0" lvl="0" marL="0" marR="0" rtl="0" algn="l">
+              <a:lnSpc>
+                <a:spcPct val="100000"/>
+              </a:lnSpc>
               <a:spcBef>
                 <a:spcPts val="0"/>
               </a:spcBef>
@@ -9355,6 +10228,9 @@
           <a:lstStyle/>
           <a:p>
             <a:pPr indent="0" lvl="0" marL="0" marR="0" rtl="0" algn="l">
+              <a:lnSpc>
+                <a:spcPct val="100000"/>
+              </a:lnSpc>
               <a:spcBef>
                 <a:spcPts val="0"/>
               </a:spcBef>
@@ -9432,19 +10308,35 @@
           </a:bodyPr>
           <a:lstStyle/>
           <a:p>
-            <a:pPr indent="0" lvl="0" marL="0" rtl="0" algn="l">
-              <a:spcBef>
-                <a:spcPts val="0"/>
-              </a:spcBef>
-              <a:spcAft>
-                <a:spcPts val="0"/>
-              </a:spcAft>
+            <a:pPr indent="0" lvl="0" marL="0" marR="0" rtl="0" algn="l">
+              <a:lnSpc>
+                <a:spcPct val="100000"/>
+              </a:lnSpc>
+              <a:spcBef>
+                <a:spcPts val="0"/>
+              </a:spcBef>
+              <a:spcAft>
+                <a:spcPts val="0"/>
+              </a:spcAft>
+              <a:buClr>
+                <a:srgbClr val="000000"/>
+              </a:buClr>
+              <a:buSzPts val="1400"/>
+              <a:buFont typeface="Arial"/>
               <a:buNone/>
             </a:pPr>
             <a:r>
               <a:t/>
             </a:r>
-            <a:endParaRPr/>
+            <a:endParaRPr b="0" i="0" sz="1400" u="none" cap="none" strike="noStrike">
+              <a:solidFill>
+                <a:srgbClr val="000000"/>
+              </a:solidFill>
+              <a:latin typeface="Arial"/>
+              <a:ea typeface="Arial"/>
+              <a:cs typeface="Arial"/>
+              <a:sym typeface="Arial"/>
+            </a:endParaRPr>
           </a:p>
         </p:txBody>
       </p:sp>
@@ -9481,19 +10373,35 @@
           </a:bodyPr>
           <a:lstStyle/>
           <a:p>
-            <a:pPr indent="0" lvl="0" marL="0" rtl="0" algn="l">
-              <a:spcBef>
-                <a:spcPts val="0"/>
-              </a:spcBef>
-              <a:spcAft>
-                <a:spcPts val="0"/>
-              </a:spcAft>
+            <a:pPr indent="0" lvl="0" marL="0" marR="0" rtl="0" algn="l">
+              <a:lnSpc>
+                <a:spcPct val="100000"/>
+              </a:lnSpc>
+              <a:spcBef>
+                <a:spcPts val="0"/>
+              </a:spcBef>
+              <a:spcAft>
+                <a:spcPts val="0"/>
+              </a:spcAft>
+              <a:buClr>
+                <a:srgbClr val="000000"/>
+              </a:buClr>
+              <a:buSzPts val="1400"/>
+              <a:buFont typeface="Arial"/>
               <a:buNone/>
             </a:pPr>
             <a:r>
               <a:t/>
             </a:r>
-            <a:endParaRPr/>
+            <a:endParaRPr b="0" i="0" sz="1400" u="none" cap="none" strike="noStrike">
+              <a:solidFill>
+                <a:srgbClr val="000000"/>
+              </a:solidFill>
+              <a:latin typeface="Arial"/>
+              <a:ea typeface="Arial"/>
+              <a:cs typeface="Arial"/>
+              <a:sym typeface="Arial"/>
+            </a:endParaRPr>
           </a:p>
         </p:txBody>
       </p:sp>
@@ -9523,6 +10431,9 @@
           <a:lstStyle/>
           <a:p>
             <a:pPr indent="0" lvl="0" marL="0" marR="0" rtl="0" algn="ctr">
+              <a:lnSpc>
+                <a:spcPct val="100000"/>
+              </a:lnSpc>
               <a:spcBef>
                 <a:spcPts val="0"/>
               </a:spcBef>
@@ -9586,6 +10497,9 @@
           <a:lstStyle/>
           <a:p>
             <a:pPr indent="0" lvl="0" marL="0" marR="0" rtl="0" algn="l">
+              <a:lnSpc>
+                <a:spcPct val="100000"/>
+              </a:lnSpc>
               <a:spcBef>
                 <a:spcPts val="0"/>
               </a:spcBef>
@@ -9649,6 +10563,9 @@
           <a:lstStyle/>
           <a:p>
             <a:pPr indent="0" lvl="0" marL="0" marR="0" rtl="0" algn="l">
+              <a:lnSpc>
+                <a:spcPct val="100000"/>
+              </a:lnSpc>
               <a:spcBef>
                 <a:spcPts val="0"/>
               </a:spcBef>
@@ -9726,19 +10643,35 @@
           </a:bodyPr>
           <a:lstStyle/>
           <a:p>
-            <a:pPr indent="0" lvl="0" marL="0" rtl="0" algn="l">
-              <a:spcBef>
-                <a:spcPts val="0"/>
-              </a:spcBef>
-              <a:spcAft>
-                <a:spcPts val="0"/>
-              </a:spcAft>
+            <a:pPr indent="0" lvl="0" marL="0" marR="0" rtl="0" algn="l">
+              <a:lnSpc>
+                <a:spcPct val="100000"/>
+              </a:lnSpc>
+              <a:spcBef>
+                <a:spcPts val="0"/>
+              </a:spcBef>
+              <a:spcAft>
+                <a:spcPts val="0"/>
+              </a:spcAft>
+              <a:buClr>
+                <a:srgbClr val="000000"/>
+              </a:buClr>
+              <a:buSzPts val="1400"/>
+              <a:buFont typeface="Arial"/>
               <a:buNone/>
             </a:pPr>
             <a:r>
               <a:t/>
             </a:r>
-            <a:endParaRPr/>
+            <a:endParaRPr b="0" i="0" sz="1400" u="none" cap="none" strike="noStrike">
+              <a:solidFill>
+                <a:srgbClr val="000000"/>
+              </a:solidFill>
+              <a:latin typeface="Arial"/>
+              <a:ea typeface="Arial"/>
+              <a:cs typeface="Arial"/>
+              <a:sym typeface="Arial"/>
+            </a:endParaRPr>
           </a:p>
         </p:txBody>
       </p:sp>
@@ -9775,19 +10708,35 @@
           </a:bodyPr>
           <a:lstStyle/>
           <a:p>
-            <a:pPr indent="0" lvl="0" marL="0" rtl="0" algn="l">
-              <a:spcBef>
-                <a:spcPts val="0"/>
-              </a:spcBef>
-              <a:spcAft>
-                <a:spcPts val="0"/>
-              </a:spcAft>
+            <a:pPr indent="0" lvl="0" marL="0" marR="0" rtl="0" algn="l">
+              <a:lnSpc>
+                <a:spcPct val="100000"/>
+              </a:lnSpc>
+              <a:spcBef>
+                <a:spcPts val="0"/>
+              </a:spcBef>
+              <a:spcAft>
+                <a:spcPts val="0"/>
+              </a:spcAft>
+              <a:buClr>
+                <a:srgbClr val="000000"/>
+              </a:buClr>
+              <a:buSzPts val="1400"/>
+              <a:buFont typeface="Arial"/>
               <a:buNone/>
             </a:pPr>
             <a:r>
               <a:t/>
             </a:r>
-            <a:endParaRPr/>
+            <a:endParaRPr b="0" i="0" sz="1400" u="none" cap="none" strike="noStrike">
+              <a:solidFill>
+                <a:srgbClr val="000000"/>
+              </a:solidFill>
+              <a:latin typeface="Arial"/>
+              <a:ea typeface="Arial"/>
+              <a:cs typeface="Arial"/>
+              <a:sym typeface="Arial"/>
+            </a:endParaRPr>
           </a:p>
         </p:txBody>
       </p:sp>
@@ -9817,6 +10766,9 @@
           <a:lstStyle/>
           <a:p>
             <a:pPr indent="0" lvl="0" marL="0" marR="0" rtl="0" algn="ctr">
+              <a:lnSpc>
+                <a:spcPct val="100000"/>
+              </a:lnSpc>
               <a:spcBef>
                 <a:spcPts val="0"/>
               </a:spcBef>
@@ -9880,6 +10832,9 @@
           <a:lstStyle/>
           <a:p>
             <a:pPr indent="0" lvl="0" marL="0" marR="0" rtl="0" algn="l">
+              <a:lnSpc>
+                <a:spcPct val="100000"/>
+              </a:lnSpc>
               <a:spcBef>
                 <a:spcPts val="0"/>
               </a:spcBef>
@@ -9943,6 +10898,9 @@
           <a:lstStyle/>
           <a:p>
             <a:pPr indent="0" lvl="0" marL="0" marR="0" rtl="0" algn="l">
+              <a:lnSpc>
+                <a:spcPct val="100000"/>
+              </a:lnSpc>
               <a:spcBef>
                 <a:spcPts val="0"/>
               </a:spcBef>
@@ -10045,19 +11003,35 @@
           </a:bodyPr>
           <a:lstStyle/>
           <a:p>
-            <a:pPr indent="0" lvl="0" marL="0" rtl="0" algn="l">
-              <a:spcBef>
-                <a:spcPts val="0"/>
-              </a:spcBef>
-              <a:spcAft>
-                <a:spcPts val="0"/>
-              </a:spcAft>
+            <a:pPr indent="0" lvl="0" marL="0" marR="0" rtl="0" algn="l">
+              <a:lnSpc>
+                <a:spcPct val="100000"/>
+              </a:lnSpc>
+              <a:spcBef>
+                <a:spcPts val="0"/>
+              </a:spcBef>
+              <a:spcAft>
+                <a:spcPts val="0"/>
+              </a:spcAft>
+              <a:buClr>
+                <a:srgbClr val="000000"/>
+              </a:buClr>
+              <a:buSzPts val="1400"/>
+              <a:buFont typeface="Arial"/>
               <a:buNone/>
             </a:pPr>
             <a:r>
               <a:t/>
             </a:r>
-            <a:endParaRPr/>
+            <a:endParaRPr b="0" i="0" sz="1400" u="none" cap="none" strike="noStrike">
+              <a:solidFill>
+                <a:srgbClr val="000000"/>
+              </a:solidFill>
+              <a:latin typeface="Arial"/>
+              <a:ea typeface="Arial"/>
+              <a:cs typeface="Arial"/>
+              <a:sym typeface="Arial"/>
+            </a:endParaRPr>
           </a:p>
         </p:txBody>
       </p:sp>
@@ -10087,6 +11061,9 @@
           <a:lstStyle/>
           <a:p>
             <a:pPr indent="0" lvl="0" marL="0" marR="0" rtl="0" algn="l">
+              <a:lnSpc>
+                <a:spcPct val="100000"/>
+              </a:lnSpc>
               <a:spcBef>
                 <a:spcPts val="0"/>
               </a:spcBef>
@@ -10150,6 +11127,9 @@
           <a:lstStyle/>
           <a:p>
             <a:pPr indent="0" lvl="0" marL="0" marR="0" rtl="0" algn="r">
+              <a:lnSpc>
+                <a:spcPct val="100000"/>
+              </a:lnSpc>
               <a:spcBef>
                 <a:spcPts val="0"/>
               </a:spcBef>
@@ -10213,6 +11193,9 @@
           <a:lstStyle/>
           <a:p>
             <a:pPr indent="0" lvl="0" marL="0" marR="0" rtl="0" algn="ctr">
+              <a:lnSpc>
+                <a:spcPct val="100000"/>
+              </a:lnSpc>
               <a:spcBef>
                 <a:spcPts val="0"/>
               </a:spcBef>
@@ -10283,19 +11266,35 @@
           </a:bodyPr>
           <a:lstStyle/>
           <a:p>
-            <a:pPr indent="0" lvl="0" marL="0" rtl="0" algn="l">
-              <a:spcBef>
-                <a:spcPts val="0"/>
-              </a:spcBef>
-              <a:spcAft>
-                <a:spcPts val="0"/>
-              </a:spcAft>
+            <a:pPr indent="0" lvl="0" marL="0" marR="0" rtl="0" algn="l">
+              <a:lnSpc>
+                <a:spcPct val="100000"/>
+              </a:lnSpc>
+              <a:spcBef>
+                <a:spcPts val="0"/>
+              </a:spcBef>
+              <a:spcAft>
+                <a:spcPts val="0"/>
+              </a:spcAft>
+              <a:buClr>
+                <a:srgbClr val="000000"/>
+              </a:buClr>
+              <a:buSzPts val="1400"/>
+              <a:buFont typeface="Arial"/>
               <a:buNone/>
             </a:pPr>
             <a:r>
               <a:t/>
             </a:r>
-            <a:endParaRPr/>
+            <a:endParaRPr b="0" i="0" sz="1400" u="none" cap="none" strike="noStrike">
+              <a:solidFill>
+                <a:srgbClr val="000000"/>
+              </a:solidFill>
+              <a:latin typeface="Arial"/>
+              <a:ea typeface="Arial"/>
+              <a:cs typeface="Arial"/>
+              <a:sym typeface="Arial"/>
+            </a:endParaRPr>
           </a:p>
         </p:txBody>
       </p:sp>
@@ -10325,6 +11324,9 @@
           <a:lstStyle/>
           <a:p>
             <a:pPr indent="0" lvl="0" marL="0" marR="0" rtl="0" algn="ctr">
+              <a:lnSpc>
+                <a:spcPct val="100000"/>
+              </a:lnSpc>
               <a:spcBef>
                 <a:spcPts val="0"/>
               </a:spcBef>
@@ -10388,6 +11390,9 @@
           <a:lstStyle/>
           <a:p>
             <a:pPr indent="0" lvl="0" marL="0" marR="0" rtl="0" algn="ctr">
+              <a:lnSpc>
+                <a:spcPct val="100000"/>
+              </a:lnSpc>
               <a:spcBef>
                 <a:spcPts val="0"/>
               </a:spcBef>
@@ -10425,6 +11430,9 @@
           </a:p>
           <a:p>
             <a:pPr indent="0" lvl="0" marL="0" marR="0" rtl="0" algn="ctr">
+              <a:lnSpc>
+                <a:spcPct val="100000"/>
+              </a:lnSpc>
               <a:spcBef>
                 <a:spcPts val="0"/>
               </a:spcBef>
@@ -10495,19 +11503,35 @@
           </a:bodyPr>
           <a:lstStyle/>
           <a:p>
-            <a:pPr indent="0" lvl="0" marL="0" rtl="0" algn="l">
-              <a:spcBef>
-                <a:spcPts val="0"/>
-              </a:spcBef>
-              <a:spcAft>
-                <a:spcPts val="0"/>
-              </a:spcAft>
+            <a:pPr indent="0" lvl="0" marL="0" marR="0" rtl="0" algn="l">
+              <a:lnSpc>
+                <a:spcPct val="100000"/>
+              </a:lnSpc>
+              <a:spcBef>
+                <a:spcPts val="0"/>
+              </a:spcBef>
+              <a:spcAft>
+                <a:spcPts val="0"/>
+              </a:spcAft>
+              <a:buClr>
+                <a:srgbClr val="000000"/>
+              </a:buClr>
+              <a:buSzPts val="1400"/>
+              <a:buFont typeface="Arial"/>
               <a:buNone/>
             </a:pPr>
             <a:r>
               <a:t/>
             </a:r>
-            <a:endParaRPr/>
+            <a:endParaRPr b="0" i="0" sz="1400" u="none" cap="none" strike="noStrike">
+              <a:solidFill>
+                <a:srgbClr val="000000"/>
+              </a:solidFill>
+              <a:latin typeface="Arial"/>
+              <a:ea typeface="Arial"/>
+              <a:cs typeface="Arial"/>
+              <a:sym typeface="Arial"/>
+            </a:endParaRPr>
           </a:p>
         </p:txBody>
       </p:sp>
@@ -10537,6 +11561,9 @@
           <a:lstStyle/>
           <a:p>
             <a:pPr indent="0" lvl="0" marL="0" marR="0" rtl="0" algn="ctr">
+              <a:lnSpc>
+                <a:spcPct val="100000"/>
+              </a:lnSpc>
               <a:spcBef>
                 <a:spcPts val="0"/>
               </a:spcBef>
@@ -10600,6 +11627,9 @@
           <a:lstStyle/>
           <a:p>
             <a:pPr indent="0" lvl="0" marL="0" marR="0" rtl="0" algn="ctr">
+              <a:lnSpc>
+                <a:spcPct val="100000"/>
+              </a:lnSpc>
               <a:spcBef>
                 <a:spcPts val="0"/>
               </a:spcBef>
@@ -10637,6 +11667,9 @@
           </a:p>
           <a:p>
             <a:pPr indent="0" lvl="0" marL="0" marR="0" rtl="0" algn="ctr">
+              <a:lnSpc>
+                <a:spcPct val="100000"/>
+              </a:lnSpc>
               <a:spcBef>
                 <a:spcPts val="0"/>
               </a:spcBef>
@@ -10707,19 +11740,35 @@
           </a:bodyPr>
           <a:lstStyle/>
           <a:p>
-            <a:pPr indent="0" lvl="0" marL="0" rtl="0" algn="l">
-              <a:spcBef>
-                <a:spcPts val="0"/>
-              </a:spcBef>
-              <a:spcAft>
-                <a:spcPts val="0"/>
-              </a:spcAft>
+            <a:pPr indent="0" lvl="0" marL="0" marR="0" rtl="0" algn="l">
+              <a:lnSpc>
+                <a:spcPct val="100000"/>
+              </a:lnSpc>
+              <a:spcBef>
+                <a:spcPts val="0"/>
+              </a:spcBef>
+              <a:spcAft>
+                <a:spcPts val="0"/>
+              </a:spcAft>
+              <a:buClr>
+                <a:srgbClr val="000000"/>
+              </a:buClr>
+              <a:buSzPts val="1400"/>
+              <a:buFont typeface="Arial"/>
               <a:buNone/>
             </a:pPr>
             <a:r>
               <a:t/>
             </a:r>
-            <a:endParaRPr/>
+            <a:endParaRPr b="0" i="0" sz="1400" u="none" cap="none" strike="noStrike">
+              <a:solidFill>
+                <a:srgbClr val="000000"/>
+              </a:solidFill>
+              <a:latin typeface="Arial"/>
+              <a:ea typeface="Arial"/>
+              <a:cs typeface="Arial"/>
+              <a:sym typeface="Arial"/>
+            </a:endParaRPr>
           </a:p>
         </p:txBody>
       </p:sp>
@@ -10749,6 +11798,9 @@
           <a:lstStyle/>
           <a:p>
             <a:pPr indent="0" lvl="0" marL="0" marR="0" rtl="0" algn="ctr">
+              <a:lnSpc>
+                <a:spcPct val="100000"/>
+              </a:lnSpc>
               <a:spcBef>
                 <a:spcPts val="0"/>
               </a:spcBef>
@@ -10812,6 +11864,9 @@
           <a:lstStyle/>
           <a:p>
             <a:pPr indent="0" lvl="0" marL="0" marR="0" rtl="0" algn="ctr">
+              <a:lnSpc>
+                <a:spcPct val="100000"/>
+              </a:lnSpc>
               <a:spcBef>
                 <a:spcPts val="0"/>
               </a:spcBef>
@@ -10849,6 +11904,9 @@
           </a:p>
           <a:p>
             <a:pPr indent="0" lvl="0" marL="0" marR="0" rtl="0" algn="ctr">
+              <a:lnSpc>
+                <a:spcPct val="100000"/>
+              </a:lnSpc>
               <a:spcBef>
                 <a:spcPts val="0"/>
               </a:spcBef>
@@ -10919,19 +11977,35 @@
           </a:bodyPr>
           <a:lstStyle/>
           <a:p>
-            <a:pPr indent="0" lvl="0" marL="0" rtl="0" algn="l">
-              <a:spcBef>
-                <a:spcPts val="0"/>
-              </a:spcBef>
-              <a:spcAft>
-                <a:spcPts val="0"/>
-              </a:spcAft>
+            <a:pPr indent="0" lvl="0" marL="0" marR="0" rtl="0" algn="l">
+              <a:lnSpc>
+                <a:spcPct val="100000"/>
+              </a:lnSpc>
+              <a:spcBef>
+                <a:spcPts val="0"/>
+              </a:spcBef>
+              <a:spcAft>
+                <a:spcPts val="0"/>
+              </a:spcAft>
+              <a:buClr>
+                <a:srgbClr val="000000"/>
+              </a:buClr>
+              <a:buSzPts val="1400"/>
+              <a:buFont typeface="Arial"/>
               <a:buNone/>
             </a:pPr>
             <a:r>
               <a:t/>
             </a:r>
-            <a:endParaRPr/>
+            <a:endParaRPr b="0" i="0" sz="1400" u="none" cap="none" strike="noStrike">
+              <a:solidFill>
+                <a:srgbClr val="000000"/>
+              </a:solidFill>
+              <a:latin typeface="Arial"/>
+              <a:ea typeface="Arial"/>
+              <a:cs typeface="Arial"/>
+              <a:sym typeface="Arial"/>
+            </a:endParaRPr>
           </a:p>
         </p:txBody>
       </p:sp>
@@ -10961,6 +12035,9 @@
           <a:lstStyle/>
           <a:p>
             <a:pPr indent="0" lvl="0" marL="0" marR="0" rtl="0" algn="ctr">
+              <a:lnSpc>
+                <a:spcPct val="100000"/>
+              </a:lnSpc>
               <a:spcBef>
                 <a:spcPts val="0"/>
               </a:spcBef>
@@ -11024,6 +12101,9 @@
           <a:lstStyle/>
           <a:p>
             <a:pPr indent="0" lvl="0" marL="0" marR="0" rtl="0" algn="ctr">
+              <a:lnSpc>
+                <a:spcPct val="100000"/>
+              </a:lnSpc>
               <a:spcBef>
                 <a:spcPts val="0"/>
               </a:spcBef>
@@ -11061,6 +12141,9 @@
           </a:p>
           <a:p>
             <a:pPr indent="0" lvl="0" marL="0" marR="0" rtl="0" algn="ctr">
+              <a:lnSpc>
+                <a:spcPct val="100000"/>
+              </a:lnSpc>
               <a:spcBef>
                 <a:spcPts val="0"/>
               </a:spcBef>
@@ -11131,19 +12214,35 @@
           </a:bodyPr>
           <a:lstStyle/>
           <a:p>
-            <a:pPr indent="0" lvl="0" marL="0" rtl="0" algn="l">
-              <a:spcBef>
-                <a:spcPts val="0"/>
-              </a:spcBef>
-              <a:spcAft>
-                <a:spcPts val="0"/>
-              </a:spcAft>
+            <a:pPr indent="0" lvl="0" marL="0" marR="0" rtl="0" algn="l">
+              <a:lnSpc>
+                <a:spcPct val="100000"/>
+              </a:lnSpc>
+              <a:spcBef>
+                <a:spcPts val="0"/>
+              </a:spcBef>
+              <a:spcAft>
+                <a:spcPts val="0"/>
+              </a:spcAft>
+              <a:buClr>
+                <a:srgbClr val="000000"/>
+              </a:buClr>
+              <a:buSzPts val="1400"/>
+              <a:buFont typeface="Arial"/>
               <a:buNone/>
             </a:pPr>
             <a:r>
               <a:t/>
             </a:r>
-            <a:endParaRPr/>
+            <a:endParaRPr b="0" i="0" sz="1400" u="none" cap="none" strike="noStrike">
+              <a:solidFill>
+                <a:srgbClr val="000000"/>
+              </a:solidFill>
+              <a:latin typeface="Arial"/>
+              <a:ea typeface="Arial"/>
+              <a:cs typeface="Arial"/>
+              <a:sym typeface="Arial"/>
+            </a:endParaRPr>
           </a:p>
         </p:txBody>
       </p:sp>
@@ -11180,19 +12279,35 @@
           </a:bodyPr>
           <a:lstStyle/>
           <a:p>
-            <a:pPr indent="0" lvl="0" marL="0" rtl="0" algn="l">
-              <a:spcBef>
-                <a:spcPts val="0"/>
-              </a:spcBef>
-              <a:spcAft>
-                <a:spcPts val="0"/>
-              </a:spcAft>
+            <a:pPr indent="0" lvl="0" marL="0" marR="0" rtl="0" algn="l">
+              <a:lnSpc>
+                <a:spcPct val="100000"/>
+              </a:lnSpc>
+              <a:spcBef>
+                <a:spcPts val="0"/>
+              </a:spcBef>
+              <a:spcAft>
+                <a:spcPts val="0"/>
+              </a:spcAft>
+              <a:buClr>
+                <a:srgbClr val="000000"/>
+              </a:buClr>
+              <a:buSzPts val="1400"/>
+              <a:buFont typeface="Arial"/>
               <a:buNone/>
             </a:pPr>
             <a:r>
               <a:t/>
             </a:r>
-            <a:endParaRPr/>
+            <a:endParaRPr b="0" i="0" sz="1400" u="none" cap="none" strike="noStrike">
+              <a:solidFill>
+                <a:srgbClr val="000000"/>
+              </a:solidFill>
+              <a:latin typeface="Arial"/>
+              <a:ea typeface="Arial"/>
+              <a:cs typeface="Arial"/>
+              <a:sym typeface="Arial"/>
+            </a:endParaRPr>
           </a:p>
         </p:txBody>
       </p:sp>
@@ -11222,6 +12337,9 @@
           <a:lstStyle/>
           <a:p>
             <a:pPr indent="0" lvl="0" marL="0" marR="0" rtl="0" algn="l">
+              <a:lnSpc>
+                <a:spcPct val="100000"/>
+              </a:lnSpc>
               <a:spcBef>
                 <a:spcPts val="0"/>
               </a:spcBef>
@@ -11292,19 +12410,35 @@
           </a:bodyPr>
           <a:lstStyle/>
           <a:p>
-            <a:pPr indent="0" lvl="0" marL="0" rtl="0" algn="l">
-              <a:spcBef>
-                <a:spcPts val="0"/>
-              </a:spcBef>
-              <a:spcAft>
-                <a:spcPts val="0"/>
-              </a:spcAft>
+            <a:pPr indent="0" lvl="0" marL="0" marR="0" rtl="0" algn="l">
+              <a:lnSpc>
+                <a:spcPct val="100000"/>
+              </a:lnSpc>
+              <a:spcBef>
+                <a:spcPts val="0"/>
+              </a:spcBef>
+              <a:spcAft>
+                <a:spcPts val="0"/>
+              </a:spcAft>
+              <a:buClr>
+                <a:srgbClr val="000000"/>
+              </a:buClr>
+              <a:buSzPts val="1400"/>
+              <a:buFont typeface="Arial"/>
               <a:buNone/>
             </a:pPr>
             <a:r>
               <a:t/>
             </a:r>
-            <a:endParaRPr/>
+            <a:endParaRPr b="0" i="0" sz="1400" u="none" cap="none" strike="noStrike">
+              <a:solidFill>
+                <a:srgbClr val="000000"/>
+              </a:solidFill>
+              <a:latin typeface="Arial"/>
+              <a:ea typeface="Arial"/>
+              <a:cs typeface="Arial"/>
+              <a:sym typeface="Arial"/>
+            </a:endParaRPr>
           </a:p>
         </p:txBody>
       </p:sp>
@@ -11334,6 +12468,9 @@
           <a:lstStyle/>
           <a:p>
             <a:pPr indent="0" lvl="0" marL="0" marR="0" rtl="0" algn="ctr">
+              <a:lnSpc>
+                <a:spcPct val="100000"/>
+              </a:lnSpc>
               <a:spcBef>
                 <a:spcPts val="0"/>
               </a:spcBef>
@@ -11397,6 +12534,9 @@
           <a:lstStyle/>
           <a:p>
             <a:pPr indent="0" lvl="0" marL="0" marR="0" rtl="0" algn="l">
+              <a:lnSpc>
+                <a:spcPct val="100000"/>
+              </a:lnSpc>
               <a:spcBef>
                 <a:spcPts val="0"/>
               </a:spcBef>
@@ -11460,6 +12600,9 @@
           <a:lstStyle/>
           <a:p>
             <a:pPr indent="0" lvl="0" marL="0" marR="0" rtl="0" algn="l">
+              <a:lnSpc>
+                <a:spcPct val="100000"/>
+              </a:lnSpc>
               <a:spcBef>
                 <a:spcPts val="0"/>
               </a:spcBef>
@@ -11530,19 +12673,35 @@
           </a:bodyPr>
           <a:lstStyle/>
           <a:p>
-            <a:pPr indent="0" lvl="0" marL="0" rtl="0" algn="l">
-              <a:spcBef>
-                <a:spcPts val="0"/>
-              </a:spcBef>
-              <a:spcAft>
-                <a:spcPts val="0"/>
-              </a:spcAft>
+            <a:pPr indent="0" lvl="0" marL="0" marR="0" rtl="0" algn="l">
+              <a:lnSpc>
+                <a:spcPct val="100000"/>
+              </a:lnSpc>
+              <a:spcBef>
+                <a:spcPts val="0"/>
+              </a:spcBef>
+              <a:spcAft>
+                <a:spcPts val="0"/>
+              </a:spcAft>
+              <a:buClr>
+                <a:srgbClr val="000000"/>
+              </a:buClr>
+              <a:buSzPts val="1400"/>
+              <a:buFont typeface="Arial"/>
               <a:buNone/>
             </a:pPr>
             <a:r>
               <a:t/>
             </a:r>
-            <a:endParaRPr/>
+            <a:endParaRPr b="0" i="0" sz="1400" u="none" cap="none" strike="noStrike">
+              <a:solidFill>
+                <a:srgbClr val="000000"/>
+              </a:solidFill>
+              <a:latin typeface="Arial"/>
+              <a:ea typeface="Arial"/>
+              <a:cs typeface="Arial"/>
+              <a:sym typeface="Arial"/>
+            </a:endParaRPr>
           </a:p>
         </p:txBody>
       </p:sp>
@@ -11572,6 +12731,9 @@
           <a:lstStyle/>
           <a:p>
             <a:pPr indent="0" lvl="0" marL="0" marR="0" rtl="0" algn="ctr">
+              <a:lnSpc>
+                <a:spcPct val="100000"/>
+              </a:lnSpc>
               <a:spcBef>
                 <a:spcPts val="0"/>
               </a:spcBef>
@@ -11635,6 +12797,9 @@
           <a:lstStyle/>
           <a:p>
             <a:pPr indent="0" lvl="0" marL="0" marR="0" rtl="0" algn="l">
+              <a:lnSpc>
+                <a:spcPct val="100000"/>
+              </a:lnSpc>
               <a:spcBef>
                 <a:spcPts val="0"/>
               </a:spcBef>
@@ -11698,6 +12863,9 @@
           <a:lstStyle/>
           <a:p>
             <a:pPr indent="0" lvl="0" marL="0" marR="0" rtl="0" algn="l">
+              <a:lnSpc>
+                <a:spcPct val="100000"/>
+              </a:lnSpc>
               <a:spcBef>
                 <a:spcPts val="0"/>
               </a:spcBef>
@@ -11768,19 +12936,35 @@
           </a:bodyPr>
           <a:lstStyle/>
           <a:p>
-            <a:pPr indent="0" lvl="0" marL="0" rtl="0" algn="l">
-              <a:spcBef>
-                <a:spcPts val="0"/>
-              </a:spcBef>
-              <a:spcAft>
-                <a:spcPts val="0"/>
-              </a:spcAft>
+            <a:pPr indent="0" lvl="0" marL="0" marR="0" rtl="0" algn="l">
+              <a:lnSpc>
+                <a:spcPct val="100000"/>
+              </a:lnSpc>
+              <a:spcBef>
+                <a:spcPts val="0"/>
+              </a:spcBef>
+              <a:spcAft>
+                <a:spcPts val="0"/>
+              </a:spcAft>
+              <a:buClr>
+                <a:srgbClr val="000000"/>
+              </a:buClr>
+              <a:buSzPts val="1400"/>
+              <a:buFont typeface="Arial"/>
               <a:buNone/>
             </a:pPr>
             <a:r>
               <a:t/>
             </a:r>
-            <a:endParaRPr/>
+            <a:endParaRPr b="0" i="0" sz="1400" u="none" cap="none" strike="noStrike">
+              <a:solidFill>
+                <a:srgbClr val="000000"/>
+              </a:solidFill>
+              <a:latin typeface="Arial"/>
+              <a:ea typeface="Arial"/>
+              <a:cs typeface="Arial"/>
+              <a:sym typeface="Arial"/>
+            </a:endParaRPr>
           </a:p>
         </p:txBody>
       </p:sp>
@@ -11810,6 +12994,9 @@
           <a:lstStyle/>
           <a:p>
             <a:pPr indent="0" lvl="0" marL="0" marR="0" rtl="0" algn="ctr">
+              <a:lnSpc>
+                <a:spcPct val="100000"/>
+              </a:lnSpc>
               <a:spcBef>
                 <a:spcPts val="0"/>
               </a:spcBef>
@@ -11873,6 +13060,9 @@
           <a:lstStyle/>
           <a:p>
             <a:pPr indent="0" lvl="0" marL="0" marR="0" rtl="0" algn="l">
+              <a:lnSpc>
+                <a:spcPct val="100000"/>
+              </a:lnSpc>
               <a:spcBef>
                 <a:spcPts val="0"/>
               </a:spcBef>
@@ -11936,6 +13126,9 @@
           <a:lstStyle/>
           <a:p>
             <a:pPr indent="0" lvl="0" marL="0" marR="0" rtl="0" algn="l">
+              <a:lnSpc>
+                <a:spcPct val="100000"/>
+              </a:lnSpc>
               <a:spcBef>
                 <a:spcPts val="0"/>
               </a:spcBef>
@@ -12006,19 +13199,35 @@
           </a:bodyPr>
           <a:lstStyle/>
           <a:p>
-            <a:pPr indent="0" lvl="0" marL="0" rtl="0" algn="l">
-              <a:spcBef>
-                <a:spcPts val="0"/>
-              </a:spcBef>
-              <a:spcAft>
-                <a:spcPts val="0"/>
-              </a:spcAft>
+            <a:pPr indent="0" lvl="0" marL="0" marR="0" rtl="0" algn="l">
+              <a:lnSpc>
+                <a:spcPct val="100000"/>
+              </a:lnSpc>
+              <a:spcBef>
+                <a:spcPts val="0"/>
+              </a:spcBef>
+              <a:spcAft>
+                <a:spcPts val="0"/>
+              </a:spcAft>
+              <a:buClr>
+                <a:srgbClr val="000000"/>
+              </a:buClr>
+              <a:buSzPts val="1400"/>
+              <a:buFont typeface="Arial"/>
               <a:buNone/>
             </a:pPr>
             <a:r>
               <a:t/>
             </a:r>
-            <a:endParaRPr/>
+            <a:endParaRPr b="0" i="0" sz="1400" u="none" cap="none" strike="noStrike">
+              <a:solidFill>
+                <a:srgbClr val="000000"/>
+              </a:solidFill>
+              <a:latin typeface="Arial"/>
+              <a:ea typeface="Arial"/>
+              <a:cs typeface="Arial"/>
+              <a:sym typeface="Arial"/>
+            </a:endParaRPr>
           </a:p>
         </p:txBody>
       </p:sp>
@@ -12030,8 +13239,8 @@
         </p:nvSpPr>
         <p:spPr>
           <a:xfrm>
-            <a:off x="5715000" y="3895344"/>
-            <a:ext cx="640080" cy="932688"/>
+            <a:off x="5889175" y="3975875"/>
+            <a:ext cx="465900" cy="658500"/>
           </a:xfrm>
           <a:prstGeom prst="rect">
             <a:avLst/>
@@ -12047,31 +13256,89 @@
           </a:bodyPr>
           <a:lstStyle/>
           <a:p>
-            <a:pPr indent="0" lvl="0" marL="0" marR="0" rtl="0" algn="ctr">
-              <a:spcBef>
-                <a:spcPts val="0"/>
-              </a:spcBef>
-              <a:spcAft>
-                <a:spcPts val="0"/>
-              </a:spcAft>
-              <a:buClr>
-                <a:srgbClr val="000000"/>
+            <a:pPr indent="0" lvl="0" marL="0" rtl="0" algn="l">
+              <a:spcBef>
+                <a:spcPts val="0"/>
+              </a:spcBef>
+              <a:spcAft>
+                <a:spcPts val="0"/>
+              </a:spcAft>
+              <a:buClr>
+                <a:schemeClr val="lt1"/>
+              </a:buClr>
+              <a:buSzPts val="1300"/>
+              <a:buFont typeface="Calibri"/>
+              <a:buNone/>
+            </a:pPr>
+            <a:r>
+              <a:rPr b="1" lang="en-US" sz="1900">
+                <a:solidFill>
+                  <a:schemeClr val="lt1"/>
+                </a:solidFill>
+                <a:latin typeface="Calibri"/>
+                <a:ea typeface="Calibri"/>
+                <a:cs typeface="Calibri"/>
+                <a:sym typeface="Calibri"/>
+              </a:rPr>
+              <a:t>😤 </a:t>
+            </a:r>
+            <a:endParaRPr sz="2000"/>
+          </a:p>
+        </p:txBody>
+      </p:sp>
+      <p:sp>
+        <p:nvSpPr>
+          <p:cNvPr id="148" name="Google Shape;148;p5"/>
+          <p:cNvSpPr/>
+          <p:nvPr/>
+        </p:nvSpPr>
+        <p:spPr>
+          <a:xfrm>
+            <a:off x="6400800" y="3986784"/>
+            <a:ext cx="2423160" cy="438912"/>
+          </a:xfrm>
+          <a:prstGeom prst="rect">
+            <a:avLst/>
+          </a:prstGeom>
+          <a:noFill/>
+          <a:ln>
+            <a:noFill/>
+          </a:ln>
+        </p:spPr>
+        <p:txBody>
+          <a:bodyPr anchorCtr="0" anchor="ctr" bIns="0" lIns="0" spcFirstLastPara="1" rIns="0" wrap="square" tIns="0">
+            <a:noAutofit/>
+          </a:bodyPr>
+          <a:lstStyle/>
+          <a:p>
+            <a:pPr indent="0" lvl="0" marL="0" marR="0" rtl="0" algn="l">
+              <a:lnSpc>
+                <a:spcPct val="100000"/>
+              </a:lnSpc>
+              <a:spcBef>
+                <a:spcPts val="0"/>
+              </a:spcBef>
+              <a:spcAft>
+                <a:spcPts val="0"/>
+              </a:spcAft>
+              <a:buClr>
+                <a:srgbClr val="8B0000"/>
               </a:buClr>
               <a:buSzPts val="2200"/>
               <a:buFont typeface="Calibri"/>
               <a:buNone/>
             </a:pPr>
             <a:r>
-              <a:rPr b="0" i="0" lang="en-US" sz="2200" u="none" cap="none" strike="noStrike">
-                <a:solidFill>
-                  <a:srgbClr val="000000"/>
+              <a:rPr b="1" i="0" lang="en-US" sz="2200" u="none" cap="none" strike="noStrike">
+                <a:solidFill>
+                  <a:srgbClr val="8B0000"/>
                 </a:solidFill>
                 <a:latin typeface="Calibri"/>
                 <a:ea typeface="Calibri"/>
                 <a:cs typeface="Calibri"/>
                 <a:sym typeface="Calibri"/>
               </a:rPr>
-              <a:t>💀</a:t>
+              <a:t>100%</a:t>
             </a:r>
             <a:endParaRPr b="0" i="0" sz="2200" u="none" cap="none" strike="noStrike">
               <a:solidFill>
@@ -12087,14 +13354,14 @@
       </p:sp>
       <p:sp>
         <p:nvSpPr>
-          <p:cNvPr id="148" name="Google Shape;148;p5"/>
-          <p:cNvSpPr/>
-          <p:nvPr/>
-        </p:nvSpPr>
-        <p:spPr>
-          <a:xfrm>
-            <a:off x="6400800" y="3986784"/>
-            <a:ext cx="2423160" cy="438912"/>
+          <p:cNvPr id="149" name="Google Shape;149;p5"/>
+          <p:cNvSpPr/>
+          <p:nvPr/>
+        </p:nvSpPr>
+        <p:spPr>
+          <a:xfrm>
+            <a:off x="6400800" y="4398264"/>
+            <a:ext cx="2423160" cy="347472"/>
           </a:xfrm>
           <a:prstGeom prst="rect">
             <a:avLst/>
@@ -12111,69 +13378,9 @@
           <a:lstStyle/>
           <a:p>
             <a:pPr indent="0" lvl="0" marL="0" marR="0" rtl="0" algn="l">
-              <a:spcBef>
-                <a:spcPts val="0"/>
-              </a:spcBef>
-              <a:spcAft>
-                <a:spcPts val="0"/>
-              </a:spcAft>
-              <a:buClr>
-                <a:srgbClr val="8B0000"/>
-              </a:buClr>
-              <a:buSzPts val="2200"/>
-              <a:buFont typeface="Calibri"/>
-              <a:buNone/>
-            </a:pPr>
-            <a:r>
-              <a:rPr b="1" i="0" lang="en-US" sz="2200" u="none" cap="none" strike="noStrike">
-                <a:solidFill>
-                  <a:srgbClr val="8B0000"/>
-                </a:solidFill>
-                <a:latin typeface="Calibri"/>
-                <a:ea typeface="Calibri"/>
-                <a:cs typeface="Calibri"/>
-                <a:sym typeface="Calibri"/>
-              </a:rPr>
-              <a:t>100%</a:t>
-            </a:r>
-            <a:endParaRPr b="0" i="0" sz="2200" u="none" cap="none" strike="noStrike">
-              <a:solidFill>
-                <a:schemeClr val="dk1"/>
-              </a:solidFill>
-              <a:latin typeface="Calibri"/>
-              <a:ea typeface="Calibri"/>
-              <a:cs typeface="Calibri"/>
-              <a:sym typeface="Calibri"/>
-            </a:endParaRPr>
-          </a:p>
-        </p:txBody>
-      </p:sp>
-      <p:sp>
-        <p:nvSpPr>
-          <p:cNvPr id="149" name="Google Shape;149;p5"/>
-          <p:cNvSpPr/>
-          <p:nvPr/>
-        </p:nvSpPr>
-        <p:spPr>
-          <a:xfrm>
-            <a:off x="6400800" y="4398264"/>
-            <a:ext cx="2423160" cy="347472"/>
-          </a:xfrm>
-          <a:prstGeom prst="rect">
-            <a:avLst/>
-          </a:prstGeom>
-          <a:noFill/>
-          <a:ln>
-            <a:noFill/>
-          </a:ln>
-        </p:spPr>
-        <p:txBody>
-          <a:bodyPr anchorCtr="0" anchor="ctr" bIns="0" lIns="0" spcFirstLastPara="1" rIns="0" wrap="square" tIns="0">
-            <a:noAutofit/>
-          </a:bodyPr>
-          <a:lstStyle/>
-          <a:p>
-            <a:pPr indent="0" lvl="0" marL="0" marR="0" rtl="0" algn="l">
+              <a:lnSpc>
+                <a:spcPct val="100000"/>
+              </a:lnSpc>
               <a:spcBef>
                 <a:spcPts val="0"/>
               </a:spcBef>
@@ -12244,19 +13451,35 @@
           </a:bodyPr>
           <a:lstStyle/>
           <a:p>
-            <a:pPr indent="0" lvl="0" marL="0" rtl="0" algn="l">
-              <a:spcBef>
-                <a:spcPts val="0"/>
-              </a:spcBef>
-              <a:spcAft>
-                <a:spcPts val="0"/>
-              </a:spcAft>
+            <a:pPr indent="0" lvl="0" marL="0" marR="0" rtl="0" algn="l">
+              <a:lnSpc>
+                <a:spcPct val="100000"/>
+              </a:lnSpc>
+              <a:spcBef>
+                <a:spcPts val="0"/>
+              </a:spcBef>
+              <a:spcAft>
+                <a:spcPts val="0"/>
+              </a:spcAft>
+              <a:buClr>
+                <a:srgbClr val="000000"/>
+              </a:buClr>
+              <a:buSzPts val="1400"/>
+              <a:buFont typeface="Arial"/>
               <a:buNone/>
             </a:pPr>
             <a:r>
               <a:t/>
             </a:r>
-            <a:endParaRPr/>
+            <a:endParaRPr b="0" i="0" sz="1400" u="none" cap="none" strike="noStrike">
+              <a:solidFill>
+                <a:srgbClr val="000000"/>
+              </a:solidFill>
+              <a:latin typeface="Arial"/>
+              <a:ea typeface="Arial"/>
+              <a:cs typeface="Arial"/>
+              <a:sym typeface="Arial"/>
+            </a:endParaRPr>
           </a:p>
         </p:txBody>
       </p:sp>
@@ -12286,6 +13509,9 @@
           <a:lstStyle/>
           <a:p>
             <a:pPr indent="0" lvl="0" marL="0" marR="0" rtl="0" algn="l">
+              <a:lnSpc>
+                <a:spcPct val="100000"/>
+              </a:lnSpc>
               <a:spcBef>
                 <a:spcPts val="0"/>
               </a:spcBef>
@@ -12331,8 +13557,8 @@
         </p:nvSpPr>
         <p:spPr>
           <a:xfrm>
-            <a:off x="3083013" y="2306750"/>
-            <a:ext cx="737700" cy="738900"/>
+            <a:off x="1212073" y="1185300"/>
+            <a:ext cx="1384800" cy="738900"/>
           </a:xfrm>
           <a:prstGeom prst="wedgeRectCallout">
             <a:avLst>
@@ -12353,7 +13579,10 @@
           </a:bodyPr>
           <a:lstStyle/>
           <a:p>
-            <a:pPr indent="0" lvl="0" marL="0" rtl="0" algn="l">
+            <a:pPr indent="0" lvl="0" marL="0" marR="0" rtl="0" algn="l">
+              <a:lnSpc>
+                <a:spcPct val="100000"/>
+              </a:lnSpc>
               <a:spcBef>
                 <a:spcPts val="0"/>
               </a:spcBef>
@@ -12368,7 +13597,7 @@
               <a:buNone/>
             </a:pPr>
             <a:r>
-              <a:rPr b="1" lang="en-US" sz="900">
+              <a:rPr b="1" i="0" lang="en-US" sz="900" u="none" cap="none" strike="noStrike">
                 <a:solidFill>
                   <a:schemeClr val="lt1"/>
                 </a:solidFill>
@@ -12379,7 +13608,7 @@
               </a:rPr>
               <a:t>A partir de 3 dias,</a:t>
             </a:r>
-            <a:endParaRPr b="1" sz="900">
+            <a:endParaRPr b="1" i="0" sz="900" u="none" cap="none" strike="noStrike">
               <a:solidFill>
                 <a:schemeClr val="lt1"/>
               </a:solidFill>
@@ -12390,7 +13619,10 @@
             </a:endParaRPr>
           </a:p>
           <a:p>
-            <a:pPr indent="0" lvl="0" marL="0" rtl="0" algn="l">
+            <a:pPr indent="0" lvl="0" marL="0" marR="0" rtl="0" algn="l">
+              <a:lnSpc>
+                <a:spcPct val="100000"/>
+              </a:lnSpc>
               <a:spcBef>
                 <a:spcPts val="0"/>
               </a:spcBef>
@@ -12405,7 +13637,7 @@
               <a:buNone/>
             </a:pPr>
             <a:r>
-              <a:rPr b="1" lang="en-US" sz="900">
+              <a:rPr b="1" i="0" lang="en-US" sz="900" u="none" cap="none" strike="noStrike">
                 <a:solidFill>
                   <a:schemeClr val="lt1"/>
                 </a:solidFill>
@@ -12416,7 +13648,7 @@
               </a:rPr>
               <a:t>a queda é irreversível</a:t>
             </a:r>
-            <a:endParaRPr b="1" sz="900">
+            <a:endParaRPr b="1" i="0" sz="900" u="none" cap="none" strike="noStrike">
               <a:solidFill>
                 <a:schemeClr val="lt1"/>
               </a:solidFill>
@@ -12427,22 +13659,34 @@
             </a:endParaRPr>
           </a:p>
           <a:p>
-            <a:pPr indent="0" lvl="0" marL="0" rtl="0" algn="ctr">
-              <a:spcBef>
-                <a:spcPts val="0"/>
-              </a:spcBef>
-              <a:spcAft>
-                <a:spcPts val="0"/>
-              </a:spcAft>
+            <a:pPr indent="0" lvl="0" marL="0" marR="0" rtl="0" algn="ctr">
+              <a:lnSpc>
+                <a:spcPct val="100000"/>
+              </a:lnSpc>
+              <a:spcBef>
+                <a:spcPts val="0"/>
+              </a:spcBef>
+              <a:spcAft>
+                <a:spcPts val="0"/>
+              </a:spcAft>
+              <a:buClr>
+                <a:srgbClr val="000000"/>
+              </a:buClr>
+              <a:buSzPts val="1400"/>
+              <a:buFont typeface="Arial"/>
               <a:buNone/>
             </a:pPr>
             <a:r>
               <a:t/>
             </a:r>
-            <a:endParaRPr>
+            <a:endParaRPr b="0" i="0" sz="1400" u="none" cap="none" strike="noStrike">
               <a:solidFill>
                 <a:schemeClr val="lt1"/>
               </a:solidFill>
+              <a:latin typeface="Arial"/>
+              <a:ea typeface="Arial"/>
+              <a:cs typeface="Arial"/>
+              <a:sym typeface="Arial"/>
             </a:endParaRPr>
           </a:p>
         </p:txBody>
@@ -12512,19 +13756,35 @@
           </a:bodyPr>
           <a:lstStyle/>
           <a:p>
-            <a:pPr indent="0" lvl="0" marL="0" rtl="0" algn="l">
-              <a:spcBef>
-                <a:spcPts val="0"/>
-              </a:spcBef>
-              <a:spcAft>
-                <a:spcPts val="0"/>
-              </a:spcAft>
+            <a:pPr indent="0" lvl="0" marL="0" marR="0" rtl="0" algn="l">
+              <a:lnSpc>
+                <a:spcPct val="100000"/>
+              </a:lnSpc>
+              <a:spcBef>
+                <a:spcPts val="0"/>
+              </a:spcBef>
+              <a:spcAft>
+                <a:spcPts val="0"/>
+              </a:spcAft>
+              <a:buClr>
+                <a:srgbClr val="000000"/>
+              </a:buClr>
+              <a:buSzPts val="1400"/>
+              <a:buFont typeface="Arial"/>
               <a:buNone/>
             </a:pPr>
             <a:r>
               <a:t/>
             </a:r>
-            <a:endParaRPr/>
+            <a:endParaRPr b="0" i="0" sz="1400" u="none" cap="none" strike="noStrike">
+              <a:solidFill>
+                <a:srgbClr val="000000"/>
+              </a:solidFill>
+              <a:latin typeface="Arial"/>
+              <a:ea typeface="Arial"/>
+              <a:cs typeface="Arial"/>
+              <a:sym typeface="Arial"/>
+            </a:endParaRPr>
           </a:p>
         </p:txBody>
       </p:sp>
@@ -12554,6 +13814,9 @@
           <a:lstStyle/>
           <a:p>
             <a:pPr indent="0" lvl="0" marL="0" marR="0" rtl="0" algn="l">
+              <a:lnSpc>
+                <a:spcPct val="100000"/>
+              </a:lnSpc>
               <a:spcBef>
                 <a:spcPts val="0"/>
               </a:spcBef>
@@ -12617,6 +13880,9 @@
           <a:lstStyle/>
           <a:p>
             <a:pPr indent="0" lvl="0" marL="0" marR="0" rtl="0" algn="r">
+              <a:lnSpc>
+                <a:spcPct val="100000"/>
+              </a:lnSpc>
               <a:spcBef>
                 <a:spcPts val="0"/>
               </a:spcBef>
@@ -12640,19 +13906,7 @@
                 <a:cs typeface="Calibri"/>
                 <a:sym typeface="Calibri"/>
               </a:rPr>
-              <a:t>Os fatores </a:t>
-            </a:r>
-            <a:r>
-              <a:rPr lang="en-US" sz="1200">
-                <a:solidFill>
-                  <a:srgbClr val="00A896"/>
-                </a:solidFill>
-                <a:latin typeface="Calibri"/>
-                <a:ea typeface="Calibri"/>
-                <a:cs typeface="Calibri"/>
-                <a:sym typeface="Calibri"/>
-              </a:rPr>
-              <a:t> que mais impactam a satisfação do cliente</a:t>
+              <a:t>Os fatores  que mais impactam a satisfação do cliente</a:t>
             </a:r>
             <a:endParaRPr b="0" i="0" sz="1200" u="none" cap="none" strike="noStrike">
               <a:solidFill>
@@ -12692,6 +13946,9 @@
           <a:lstStyle/>
           <a:p>
             <a:pPr indent="0" lvl="0" marL="0" marR="0" rtl="0" algn="r">
+              <a:lnSpc>
+                <a:spcPct val="100000"/>
+              </a:lnSpc>
               <a:spcBef>
                 <a:spcPts val="0"/>
               </a:spcBef>
@@ -12762,19 +14019,35 @@
           </a:bodyPr>
           <a:lstStyle/>
           <a:p>
-            <a:pPr indent="0" lvl="0" marL="0" rtl="0" algn="l">
-              <a:spcBef>
-                <a:spcPts val="0"/>
-              </a:spcBef>
-              <a:spcAft>
-                <a:spcPts val="0"/>
-              </a:spcAft>
+            <a:pPr indent="0" lvl="0" marL="0" marR="0" rtl="0" algn="l">
+              <a:lnSpc>
+                <a:spcPct val="100000"/>
+              </a:lnSpc>
+              <a:spcBef>
+                <a:spcPts val="0"/>
+              </a:spcBef>
+              <a:spcAft>
+                <a:spcPts val="0"/>
+              </a:spcAft>
+              <a:buClr>
+                <a:srgbClr val="000000"/>
+              </a:buClr>
+              <a:buSzPts val="1400"/>
+              <a:buFont typeface="Arial"/>
               <a:buNone/>
             </a:pPr>
             <a:r>
               <a:t/>
             </a:r>
-            <a:endParaRPr/>
+            <a:endParaRPr b="0" i="0" sz="1400" u="none" cap="none" strike="noStrike">
+              <a:solidFill>
+                <a:srgbClr val="000000"/>
+              </a:solidFill>
+              <a:latin typeface="Arial"/>
+              <a:ea typeface="Arial"/>
+              <a:cs typeface="Arial"/>
+              <a:sym typeface="Arial"/>
+            </a:endParaRPr>
           </a:p>
         </p:txBody>
       </p:sp>
@@ -12804,6 +14077,9 @@
           <a:lstStyle/>
           <a:p>
             <a:pPr indent="0" lvl="0" marL="0" marR="0" rtl="0" algn="l">
+              <a:lnSpc>
+                <a:spcPct val="100000"/>
+              </a:lnSpc>
               <a:spcBef>
                 <a:spcPts val="0"/>
               </a:spcBef>
@@ -12867,6 +14143,9 @@
           <a:lstStyle/>
           <a:p>
             <a:pPr indent="0" lvl="0" marL="0" marR="0" rtl="0" algn="r">
+              <a:lnSpc>
+                <a:spcPct val="100000"/>
+              </a:lnSpc>
               <a:spcBef>
                 <a:spcPts val="0"/>
               </a:spcBef>
@@ -12937,19 +14216,35 @@
           </a:bodyPr>
           <a:lstStyle/>
           <a:p>
-            <a:pPr indent="0" lvl="0" marL="0" rtl="0" algn="l">
-              <a:spcBef>
-                <a:spcPts val="0"/>
-              </a:spcBef>
-              <a:spcAft>
-                <a:spcPts val="0"/>
-              </a:spcAft>
+            <a:pPr indent="0" lvl="0" marL="0" marR="0" rtl="0" algn="l">
+              <a:lnSpc>
+                <a:spcPct val="100000"/>
+              </a:lnSpc>
+              <a:spcBef>
+                <a:spcPts val="0"/>
+              </a:spcBef>
+              <a:spcAft>
+                <a:spcPts val="0"/>
+              </a:spcAft>
+              <a:buClr>
+                <a:srgbClr val="000000"/>
+              </a:buClr>
+              <a:buSzPts val="1400"/>
+              <a:buFont typeface="Arial"/>
               <a:buNone/>
             </a:pPr>
             <a:r>
               <a:t/>
             </a:r>
-            <a:endParaRPr/>
+            <a:endParaRPr b="0" i="0" sz="1400" u="none" cap="none" strike="noStrike">
+              <a:solidFill>
+                <a:srgbClr val="000000"/>
+              </a:solidFill>
+              <a:latin typeface="Arial"/>
+              <a:ea typeface="Arial"/>
+              <a:cs typeface="Arial"/>
+              <a:sym typeface="Arial"/>
+            </a:endParaRPr>
           </a:p>
         </p:txBody>
       </p:sp>
@@ -12979,6 +14274,9 @@
           <a:lstStyle/>
           <a:p>
             <a:pPr indent="0" lvl="0" marL="0" marR="0" rtl="0" algn="l">
+              <a:lnSpc>
+                <a:spcPct val="100000"/>
+              </a:lnSpc>
               <a:spcBef>
                 <a:spcPts val="0"/>
               </a:spcBef>
@@ -13042,6 +14340,9 @@
           <a:lstStyle/>
           <a:p>
             <a:pPr indent="0" lvl="0" marL="0" marR="0" rtl="0" algn="r">
+              <a:lnSpc>
+                <a:spcPct val="100000"/>
+              </a:lnSpc>
               <a:spcBef>
                 <a:spcPts val="0"/>
               </a:spcBef>
@@ -13112,19 +14413,35 @@
           </a:bodyPr>
           <a:lstStyle/>
           <a:p>
-            <a:pPr indent="0" lvl="0" marL="0" rtl="0" algn="l">
-              <a:spcBef>
-                <a:spcPts val="0"/>
-              </a:spcBef>
-              <a:spcAft>
-                <a:spcPts val="0"/>
-              </a:spcAft>
+            <a:pPr indent="0" lvl="0" marL="0" marR="0" rtl="0" algn="l">
+              <a:lnSpc>
+                <a:spcPct val="100000"/>
+              </a:lnSpc>
+              <a:spcBef>
+                <a:spcPts val="0"/>
+              </a:spcBef>
+              <a:spcAft>
+                <a:spcPts val="0"/>
+              </a:spcAft>
+              <a:buClr>
+                <a:srgbClr val="000000"/>
+              </a:buClr>
+              <a:buSzPts val="1400"/>
+              <a:buFont typeface="Arial"/>
               <a:buNone/>
             </a:pPr>
             <a:r>
               <a:t/>
             </a:r>
-            <a:endParaRPr/>
+            <a:endParaRPr b="0" i="0" sz="1400" u="none" cap="none" strike="noStrike">
+              <a:solidFill>
+                <a:srgbClr val="000000"/>
+              </a:solidFill>
+              <a:latin typeface="Arial"/>
+              <a:ea typeface="Arial"/>
+              <a:cs typeface="Arial"/>
+              <a:sym typeface="Arial"/>
+            </a:endParaRPr>
           </a:p>
         </p:txBody>
       </p:sp>
@@ -13154,6 +14471,9 @@
           <a:lstStyle/>
           <a:p>
             <a:pPr indent="0" lvl="0" marL="0" marR="0" rtl="0" algn="l">
+              <a:lnSpc>
+                <a:spcPct val="100000"/>
+              </a:lnSpc>
               <a:spcBef>
                 <a:spcPts val="0"/>
               </a:spcBef>
@@ -13217,6 +14537,9 @@
           <a:lstStyle/>
           <a:p>
             <a:pPr indent="0" lvl="0" marL="0" marR="0" rtl="0" algn="r">
+              <a:lnSpc>
+                <a:spcPct val="100000"/>
+              </a:lnSpc>
               <a:spcBef>
                 <a:spcPts val="0"/>
               </a:spcBef>
@@ -13287,19 +14610,35 @@
           </a:bodyPr>
           <a:lstStyle/>
           <a:p>
-            <a:pPr indent="0" lvl="0" marL="0" rtl="0" algn="l">
-              <a:spcBef>
-                <a:spcPts val="0"/>
-              </a:spcBef>
-              <a:spcAft>
-                <a:spcPts val="0"/>
-              </a:spcAft>
+            <a:pPr indent="0" lvl="0" marL="0" marR="0" rtl="0" algn="l">
+              <a:lnSpc>
+                <a:spcPct val="100000"/>
+              </a:lnSpc>
+              <a:spcBef>
+                <a:spcPts val="0"/>
+              </a:spcBef>
+              <a:spcAft>
+                <a:spcPts val="0"/>
+              </a:spcAft>
+              <a:buClr>
+                <a:srgbClr val="000000"/>
+              </a:buClr>
+              <a:buSzPts val="1400"/>
+              <a:buFont typeface="Arial"/>
               <a:buNone/>
             </a:pPr>
             <a:r>
               <a:t/>
             </a:r>
-            <a:endParaRPr/>
+            <a:endParaRPr b="0" i="0" sz="1400" u="none" cap="none" strike="noStrike">
+              <a:solidFill>
+                <a:srgbClr val="000000"/>
+              </a:solidFill>
+              <a:latin typeface="Arial"/>
+              <a:ea typeface="Arial"/>
+              <a:cs typeface="Arial"/>
+              <a:sym typeface="Arial"/>
+            </a:endParaRPr>
           </a:p>
         </p:txBody>
       </p:sp>
@@ -13329,6 +14668,9 @@
           <a:lstStyle/>
           <a:p>
             <a:pPr indent="0" lvl="0" marL="0" marR="0" rtl="0" algn="l">
+              <a:lnSpc>
+                <a:spcPct val="100000"/>
+              </a:lnSpc>
               <a:spcBef>
                 <a:spcPts val="0"/>
               </a:spcBef>
@@ -13392,6 +14734,9 @@
           <a:lstStyle/>
           <a:p>
             <a:pPr indent="0" lvl="0" marL="0" marR="0" rtl="0" algn="r">
+              <a:lnSpc>
+                <a:spcPct val="100000"/>
+              </a:lnSpc>
               <a:spcBef>
                 <a:spcPts val="0"/>
               </a:spcBef>
@@ -13462,19 +14807,35 @@
           </a:bodyPr>
           <a:lstStyle/>
           <a:p>
-            <a:pPr indent="0" lvl="0" marL="0" rtl="0" algn="l">
-              <a:spcBef>
-                <a:spcPts val="0"/>
-              </a:spcBef>
-              <a:spcAft>
-                <a:spcPts val="0"/>
-              </a:spcAft>
+            <a:pPr indent="0" lvl="0" marL="0" marR="0" rtl="0" algn="l">
+              <a:lnSpc>
+                <a:spcPct val="100000"/>
+              </a:lnSpc>
+              <a:spcBef>
+                <a:spcPts val="0"/>
+              </a:spcBef>
+              <a:spcAft>
+                <a:spcPts val="0"/>
+              </a:spcAft>
+              <a:buClr>
+                <a:srgbClr val="000000"/>
+              </a:buClr>
+              <a:buSzPts val="1400"/>
+              <a:buFont typeface="Arial"/>
               <a:buNone/>
             </a:pPr>
             <a:r>
               <a:t/>
             </a:r>
-            <a:endParaRPr/>
+            <a:endParaRPr b="0" i="0" sz="1400" u="none" cap="none" strike="noStrike">
+              <a:solidFill>
+                <a:srgbClr val="000000"/>
+              </a:solidFill>
+              <a:latin typeface="Arial"/>
+              <a:ea typeface="Arial"/>
+              <a:cs typeface="Arial"/>
+              <a:sym typeface="Arial"/>
+            </a:endParaRPr>
           </a:p>
         </p:txBody>
       </p:sp>
@@ -13504,6 +14865,9 @@
           <a:lstStyle/>
           <a:p>
             <a:pPr indent="0" lvl="0" marL="0" marR="0" rtl="0" algn="l">
+              <a:lnSpc>
+                <a:spcPct val="100000"/>
+              </a:lnSpc>
               <a:spcBef>
                 <a:spcPts val="0"/>
               </a:spcBef>
@@ -13567,6 +14931,9 @@
           <a:lstStyle/>
           <a:p>
             <a:pPr indent="0" lvl="0" marL="0" marR="0" rtl="0" algn="r">
+              <a:lnSpc>
+                <a:spcPct val="100000"/>
+              </a:lnSpc>
               <a:spcBef>
                 <a:spcPts val="0"/>
               </a:spcBef>
@@ -13637,19 +15004,35 @@
           </a:bodyPr>
           <a:lstStyle/>
           <a:p>
-            <a:pPr indent="0" lvl="0" marL="0" rtl="0" algn="l">
-              <a:spcBef>
-                <a:spcPts val="0"/>
-              </a:spcBef>
-              <a:spcAft>
-                <a:spcPts val="0"/>
-              </a:spcAft>
+            <a:pPr indent="0" lvl="0" marL="0" marR="0" rtl="0" algn="l">
+              <a:lnSpc>
+                <a:spcPct val="100000"/>
+              </a:lnSpc>
+              <a:spcBef>
+                <a:spcPts val="0"/>
+              </a:spcBef>
+              <a:spcAft>
+                <a:spcPts val="0"/>
+              </a:spcAft>
+              <a:buClr>
+                <a:srgbClr val="000000"/>
+              </a:buClr>
+              <a:buSzPts val="1400"/>
+              <a:buFont typeface="Arial"/>
               <a:buNone/>
             </a:pPr>
             <a:r>
               <a:t/>
             </a:r>
-            <a:endParaRPr/>
+            <a:endParaRPr b="0" i="0" sz="1400" u="none" cap="none" strike="noStrike">
+              <a:solidFill>
+                <a:srgbClr val="000000"/>
+              </a:solidFill>
+              <a:latin typeface="Arial"/>
+              <a:ea typeface="Arial"/>
+              <a:cs typeface="Arial"/>
+              <a:sym typeface="Arial"/>
+            </a:endParaRPr>
           </a:p>
         </p:txBody>
       </p:sp>
@@ -13679,6 +15062,9 @@
           <a:lstStyle/>
           <a:p>
             <a:pPr indent="0" lvl="0" marL="0" marR="0" rtl="0" algn="l">
+              <a:lnSpc>
+                <a:spcPct val="100000"/>
+              </a:lnSpc>
               <a:spcBef>
                 <a:spcPts val="0"/>
               </a:spcBef>
@@ -13742,6 +15128,9 @@
           <a:lstStyle/>
           <a:p>
             <a:pPr indent="0" lvl="0" marL="0" marR="0" rtl="0" algn="r">
+              <a:lnSpc>
+                <a:spcPct val="100000"/>
+              </a:lnSpc>
               <a:spcBef>
                 <a:spcPts val="0"/>
               </a:spcBef>
@@ -13812,19 +15201,35 @@
           </a:bodyPr>
           <a:lstStyle/>
           <a:p>
-            <a:pPr indent="0" lvl="0" marL="0" rtl="0" algn="l">
-              <a:spcBef>
-                <a:spcPts val="0"/>
-              </a:spcBef>
-              <a:spcAft>
-                <a:spcPts val="0"/>
-              </a:spcAft>
+            <a:pPr indent="0" lvl="0" marL="0" marR="0" rtl="0" algn="l">
+              <a:lnSpc>
+                <a:spcPct val="100000"/>
+              </a:lnSpc>
+              <a:spcBef>
+                <a:spcPts val="0"/>
+              </a:spcBef>
+              <a:spcAft>
+                <a:spcPts val="0"/>
+              </a:spcAft>
+              <a:buClr>
+                <a:srgbClr val="000000"/>
+              </a:buClr>
+              <a:buSzPts val="1400"/>
+              <a:buFont typeface="Arial"/>
               <a:buNone/>
             </a:pPr>
             <a:r>
               <a:t/>
             </a:r>
-            <a:endParaRPr/>
+            <a:endParaRPr b="0" i="0" sz="1400" u="none" cap="none" strike="noStrike">
+              <a:solidFill>
+                <a:srgbClr val="000000"/>
+              </a:solidFill>
+              <a:latin typeface="Arial"/>
+              <a:ea typeface="Arial"/>
+              <a:cs typeface="Arial"/>
+              <a:sym typeface="Arial"/>
+            </a:endParaRPr>
           </a:p>
         </p:txBody>
       </p:sp>
@@ -13854,6 +15259,9 @@
           <a:lstStyle/>
           <a:p>
             <a:pPr indent="0" lvl="0" marL="0" marR="0" rtl="0" algn="l">
+              <a:lnSpc>
+                <a:spcPct val="100000"/>
+              </a:lnSpc>
               <a:spcBef>
                 <a:spcPts val="0"/>
               </a:spcBef>
@@ -13924,19 +15332,35 @@
           </a:bodyPr>
           <a:lstStyle/>
           <a:p>
-            <a:pPr indent="0" lvl="0" marL="0" rtl="0" algn="l">
-              <a:spcBef>
-                <a:spcPts val="0"/>
-              </a:spcBef>
-              <a:spcAft>
-                <a:spcPts val="0"/>
-              </a:spcAft>
+            <a:pPr indent="0" lvl="0" marL="0" marR="0" rtl="0" algn="l">
+              <a:lnSpc>
+                <a:spcPct val="100000"/>
+              </a:lnSpc>
+              <a:spcBef>
+                <a:spcPts val="0"/>
+              </a:spcBef>
+              <a:spcAft>
+                <a:spcPts val="0"/>
+              </a:spcAft>
+              <a:buClr>
+                <a:srgbClr val="000000"/>
+              </a:buClr>
+              <a:buSzPts val="1400"/>
+              <a:buFont typeface="Arial"/>
               <a:buNone/>
             </a:pPr>
             <a:r>
               <a:t/>
             </a:r>
-            <a:endParaRPr/>
+            <a:endParaRPr b="0" i="0" sz="1400" u="none" cap="none" strike="noStrike">
+              <a:solidFill>
+                <a:srgbClr val="000000"/>
+              </a:solidFill>
+              <a:latin typeface="Arial"/>
+              <a:ea typeface="Arial"/>
+              <a:cs typeface="Arial"/>
+              <a:sym typeface="Arial"/>
+            </a:endParaRPr>
           </a:p>
         </p:txBody>
       </p:sp>
@@ -13966,6 +15390,9 @@
           <a:lstStyle/>
           <a:p>
             <a:pPr indent="0" lvl="0" marL="0" marR="0" rtl="0" algn="l">
+              <a:lnSpc>
+                <a:spcPct val="100000"/>
+              </a:lnSpc>
               <a:spcBef>
                 <a:spcPts val="0"/>
               </a:spcBef>
@@ -14068,19 +15495,35 @@
           </a:bodyPr>
           <a:lstStyle/>
           <a:p>
-            <a:pPr indent="0" lvl="0" marL="0" rtl="0" algn="l">
-              <a:spcBef>
-                <a:spcPts val="0"/>
-              </a:spcBef>
-              <a:spcAft>
-                <a:spcPts val="0"/>
-              </a:spcAft>
+            <a:pPr indent="0" lvl="0" marL="0" marR="0" rtl="0" algn="l">
+              <a:lnSpc>
+                <a:spcPct val="100000"/>
+              </a:lnSpc>
+              <a:spcBef>
+                <a:spcPts val="0"/>
+              </a:spcBef>
+              <a:spcAft>
+                <a:spcPts val="0"/>
+              </a:spcAft>
+              <a:buClr>
+                <a:srgbClr val="000000"/>
+              </a:buClr>
+              <a:buSzPts val="1400"/>
+              <a:buFont typeface="Arial"/>
               <a:buNone/>
             </a:pPr>
             <a:r>
               <a:t/>
             </a:r>
-            <a:endParaRPr/>
+            <a:endParaRPr b="0" i="0" sz="1400" u="none" cap="none" strike="noStrike">
+              <a:solidFill>
+                <a:srgbClr val="000000"/>
+              </a:solidFill>
+              <a:latin typeface="Arial"/>
+              <a:ea typeface="Arial"/>
+              <a:cs typeface="Arial"/>
+              <a:sym typeface="Arial"/>
+            </a:endParaRPr>
           </a:p>
         </p:txBody>
       </p:sp>
@@ -14110,6 +15553,9 @@
           <a:lstStyle/>
           <a:p>
             <a:pPr indent="0" lvl="0" marL="0" marR="0" rtl="0" algn="l">
+              <a:lnSpc>
+                <a:spcPct val="100000"/>
+              </a:lnSpc>
               <a:spcBef>
                 <a:spcPts val="0"/>
               </a:spcBef>
@@ -14173,6 +15619,9 @@
           <a:lstStyle/>
           <a:p>
             <a:pPr indent="0" lvl="0" marL="0" marR="0" rtl="0" algn="r">
+              <a:lnSpc>
+                <a:spcPct val="100000"/>
+              </a:lnSpc>
               <a:spcBef>
                 <a:spcPts val="0"/>
               </a:spcBef>
@@ -14250,19 +15699,35 @@
           </a:bodyPr>
           <a:lstStyle/>
           <a:p>
-            <a:pPr indent="0" lvl="0" marL="0" rtl="0" algn="l">
-              <a:spcBef>
-                <a:spcPts val="0"/>
-              </a:spcBef>
-              <a:spcAft>
-                <a:spcPts val="0"/>
-              </a:spcAft>
+            <a:pPr indent="0" lvl="0" marL="0" marR="0" rtl="0" algn="l">
+              <a:lnSpc>
+                <a:spcPct val="100000"/>
+              </a:lnSpc>
+              <a:spcBef>
+                <a:spcPts val="0"/>
+              </a:spcBef>
+              <a:spcAft>
+                <a:spcPts val="0"/>
+              </a:spcAft>
+              <a:buClr>
+                <a:srgbClr val="000000"/>
+              </a:buClr>
+              <a:buSzPts val="1400"/>
+              <a:buFont typeface="Arial"/>
               <a:buNone/>
             </a:pPr>
             <a:r>
               <a:t/>
             </a:r>
-            <a:endParaRPr/>
+            <a:endParaRPr b="0" i="0" sz="1400" u="none" cap="none" strike="noStrike">
+              <a:solidFill>
+                <a:srgbClr val="000000"/>
+              </a:solidFill>
+              <a:latin typeface="Arial"/>
+              <a:ea typeface="Arial"/>
+              <a:cs typeface="Arial"/>
+              <a:sym typeface="Arial"/>
+            </a:endParaRPr>
           </a:p>
         </p:txBody>
       </p:sp>
@@ -14299,19 +15764,35 @@
           </a:bodyPr>
           <a:lstStyle/>
           <a:p>
-            <a:pPr indent="0" lvl="0" marL="0" rtl="0" algn="l">
-              <a:spcBef>
-                <a:spcPts val="0"/>
-              </a:spcBef>
-              <a:spcAft>
-                <a:spcPts val="0"/>
-              </a:spcAft>
+            <a:pPr indent="0" lvl="0" marL="0" marR="0" rtl="0" algn="l">
+              <a:lnSpc>
+                <a:spcPct val="100000"/>
+              </a:lnSpc>
+              <a:spcBef>
+                <a:spcPts val="0"/>
+              </a:spcBef>
+              <a:spcAft>
+                <a:spcPts val="0"/>
+              </a:spcAft>
+              <a:buClr>
+                <a:srgbClr val="000000"/>
+              </a:buClr>
+              <a:buSzPts val="1400"/>
+              <a:buFont typeface="Arial"/>
               <a:buNone/>
             </a:pPr>
             <a:r>
               <a:t/>
             </a:r>
-            <a:endParaRPr/>
+            <a:endParaRPr b="0" i="0" sz="1400" u="none" cap="none" strike="noStrike">
+              <a:solidFill>
+                <a:srgbClr val="000000"/>
+              </a:solidFill>
+              <a:latin typeface="Arial"/>
+              <a:ea typeface="Arial"/>
+              <a:cs typeface="Arial"/>
+              <a:sym typeface="Arial"/>
+            </a:endParaRPr>
           </a:p>
         </p:txBody>
       </p:sp>
@@ -14341,6 +15822,9 @@
           <a:lstStyle/>
           <a:p>
             <a:pPr indent="0" lvl="0" marL="0" marR="0" rtl="0" algn="l">
+              <a:lnSpc>
+                <a:spcPct val="100000"/>
+              </a:lnSpc>
               <a:spcBef>
                 <a:spcPts val="0"/>
               </a:spcBef>
@@ -14404,6 +15888,9 @@
           <a:lstStyle/>
           <a:p>
             <a:pPr indent="0" lvl="0" marL="0" marR="0" rtl="0" algn="l">
+              <a:lnSpc>
+                <a:spcPct val="100000"/>
+              </a:lnSpc>
               <a:spcBef>
                 <a:spcPts val="0"/>
               </a:spcBef>
@@ -14467,6 +15954,9 @@
           <a:lstStyle/>
           <a:p>
             <a:pPr indent="0" lvl="0" marL="0" marR="0" rtl="0" algn="l">
+              <a:lnSpc>
+                <a:spcPct val="100000"/>
+              </a:lnSpc>
               <a:spcBef>
                 <a:spcPts val="0"/>
               </a:spcBef>
@@ -14530,6 +16020,9 @@
           <a:lstStyle/>
           <a:p>
             <a:pPr indent="0" lvl="0" marL="0" marR="0" rtl="0" algn="l">
+              <a:lnSpc>
+                <a:spcPct val="100000"/>
+              </a:lnSpc>
               <a:spcBef>
                 <a:spcPts val="0"/>
               </a:spcBef>
@@ -14593,6 +16086,9 @@
           <a:lstStyle/>
           <a:p>
             <a:pPr indent="0" lvl="0" marL="0" marR="0" rtl="0" algn="l">
+              <a:lnSpc>
+                <a:spcPct val="100000"/>
+              </a:lnSpc>
               <a:spcBef>
                 <a:spcPts val="0"/>
               </a:spcBef>
@@ -14656,6 +16152,9 @@
           <a:lstStyle/>
           <a:p>
             <a:pPr indent="0" lvl="0" marL="0" marR="0" rtl="0" algn="l">
+              <a:lnSpc>
+                <a:spcPct val="100000"/>
+              </a:lnSpc>
               <a:spcBef>
                 <a:spcPts val="0"/>
               </a:spcBef>
@@ -14719,6 +16218,9 @@
           <a:lstStyle/>
           <a:p>
             <a:pPr indent="0" lvl="0" marL="0" marR="0" rtl="0" algn="l">
+              <a:lnSpc>
+                <a:spcPct val="100000"/>
+              </a:lnSpc>
               <a:spcBef>
                 <a:spcPts val="0"/>
               </a:spcBef>
@@ -14782,6 +16284,9 @@
           <a:lstStyle/>
           <a:p>
             <a:pPr indent="0" lvl="0" marL="0" marR="0" rtl="0" algn="l">
+              <a:lnSpc>
+                <a:spcPct val="100000"/>
+              </a:lnSpc>
               <a:spcBef>
                 <a:spcPts val="0"/>
               </a:spcBef>
@@ -14845,6 +16350,9 @@
           <a:lstStyle/>
           <a:p>
             <a:pPr indent="0" lvl="0" marL="0" marR="0" rtl="0" algn="l">
+              <a:lnSpc>
+                <a:spcPct val="100000"/>
+              </a:lnSpc>
               <a:spcBef>
                 <a:spcPts val="0"/>
               </a:spcBef>
@@ -14908,6 +16416,9 @@
           <a:lstStyle/>
           <a:p>
             <a:pPr indent="0" lvl="0" marL="0" marR="0" rtl="0" algn="l">
+              <a:lnSpc>
+                <a:spcPct val="100000"/>
+              </a:lnSpc>
               <a:spcBef>
                 <a:spcPts val="0"/>
               </a:spcBef>
@@ -14971,6 +16482,9 @@
           <a:lstStyle/>
           <a:p>
             <a:pPr indent="0" lvl="0" marL="0" marR="0" rtl="0" algn="l">
+              <a:lnSpc>
+                <a:spcPct val="100000"/>
+              </a:lnSpc>
               <a:spcBef>
                 <a:spcPts val="0"/>
               </a:spcBef>
@@ -15034,6 +16548,9 @@
           <a:lstStyle/>
           <a:p>
             <a:pPr indent="0" lvl="0" marL="0" marR="0" rtl="0" algn="l">
+              <a:lnSpc>
+                <a:spcPct val="100000"/>
+              </a:lnSpc>
               <a:spcBef>
                 <a:spcPts val="0"/>
               </a:spcBef>
@@ -15097,6 +16614,9 @@
           <a:lstStyle/>
           <a:p>
             <a:pPr indent="0" lvl="0" marL="0" marR="0" rtl="0" algn="l">
+              <a:lnSpc>
+                <a:spcPct val="100000"/>
+              </a:lnSpc>
               <a:spcBef>
                 <a:spcPts val="0"/>
               </a:spcBef>
@@ -15160,6 +16680,9 @@
           <a:lstStyle/>
           <a:p>
             <a:pPr indent="0" lvl="0" marL="0" marR="0" rtl="0" algn="l">
+              <a:lnSpc>
+                <a:spcPct val="100000"/>
+              </a:lnSpc>
               <a:spcBef>
                 <a:spcPts val="0"/>
               </a:spcBef>
@@ -15223,6 +16746,9 @@
           <a:lstStyle/>
           <a:p>
             <a:pPr indent="0" lvl="0" marL="0" marR="0" rtl="0" algn="l">
+              <a:lnSpc>
+                <a:spcPct val="100000"/>
+              </a:lnSpc>
               <a:spcBef>
                 <a:spcPts val="0"/>
               </a:spcBef>
@@ -15286,6 +16812,9 @@
           <a:lstStyle/>
           <a:p>
             <a:pPr indent="0" lvl="0" marL="0" marR="0" rtl="0" algn="l">
+              <a:lnSpc>
+                <a:spcPct val="100000"/>
+              </a:lnSpc>
               <a:spcBef>
                 <a:spcPts val="0"/>
               </a:spcBef>
@@ -15356,19 +16885,35 @@
           </a:bodyPr>
           <a:lstStyle/>
           <a:p>
-            <a:pPr indent="0" lvl="0" marL="0" rtl="0" algn="l">
-              <a:spcBef>
-                <a:spcPts val="0"/>
-              </a:spcBef>
-              <a:spcAft>
-                <a:spcPts val="0"/>
-              </a:spcAft>
+            <a:pPr indent="0" lvl="0" marL="0" marR="0" rtl="0" algn="l">
+              <a:lnSpc>
+                <a:spcPct val="100000"/>
+              </a:lnSpc>
+              <a:spcBef>
+                <a:spcPts val="0"/>
+              </a:spcBef>
+              <a:spcAft>
+                <a:spcPts val="0"/>
+              </a:spcAft>
+              <a:buClr>
+                <a:srgbClr val="000000"/>
+              </a:buClr>
+              <a:buSzPts val="1400"/>
+              <a:buFont typeface="Arial"/>
               <a:buNone/>
             </a:pPr>
             <a:r>
               <a:t/>
             </a:r>
-            <a:endParaRPr/>
+            <a:endParaRPr b="0" i="0" sz="1400" u="none" cap="none" strike="noStrike">
+              <a:solidFill>
+                <a:srgbClr val="000000"/>
+              </a:solidFill>
+              <a:latin typeface="Arial"/>
+              <a:ea typeface="Arial"/>
+              <a:cs typeface="Arial"/>
+              <a:sym typeface="Arial"/>
+            </a:endParaRPr>
           </a:p>
         </p:txBody>
       </p:sp>
@@ -15398,6 +16943,9 @@
           <a:lstStyle/>
           <a:p>
             <a:pPr indent="0" lvl="0" marL="0" marR="0" rtl="0" algn="ctr">
+              <a:lnSpc>
+                <a:spcPct val="100000"/>
+              </a:lnSpc>
               <a:spcBef>
                 <a:spcPts val="0"/>
               </a:spcBef>
@@ -15475,19 +17023,35 @@
           </a:bodyPr>
           <a:lstStyle/>
           <a:p>
-            <a:pPr indent="0" lvl="0" marL="0" rtl="0" algn="l">
-              <a:spcBef>
-                <a:spcPts val="0"/>
-              </a:spcBef>
-              <a:spcAft>
-                <a:spcPts val="0"/>
-              </a:spcAft>
+            <a:pPr indent="0" lvl="0" marL="0" marR="0" rtl="0" algn="l">
+              <a:lnSpc>
+                <a:spcPct val="100000"/>
+              </a:lnSpc>
+              <a:spcBef>
+                <a:spcPts val="0"/>
+              </a:spcBef>
+              <a:spcAft>
+                <a:spcPts val="0"/>
+              </a:spcAft>
+              <a:buClr>
+                <a:srgbClr val="000000"/>
+              </a:buClr>
+              <a:buSzPts val="1400"/>
+              <a:buFont typeface="Arial"/>
               <a:buNone/>
             </a:pPr>
             <a:r>
               <a:t/>
             </a:r>
-            <a:endParaRPr/>
+            <a:endParaRPr b="0" i="0" sz="1400" u="none" cap="none" strike="noStrike">
+              <a:solidFill>
+                <a:srgbClr val="000000"/>
+              </a:solidFill>
+              <a:latin typeface="Arial"/>
+              <a:ea typeface="Arial"/>
+              <a:cs typeface="Arial"/>
+              <a:sym typeface="Arial"/>
+            </a:endParaRPr>
           </a:p>
         </p:txBody>
       </p:sp>
@@ -15524,19 +17088,35 @@
           </a:bodyPr>
           <a:lstStyle/>
           <a:p>
-            <a:pPr indent="0" lvl="0" marL="0" rtl="0" algn="l">
-              <a:spcBef>
-                <a:spcPts val="0"/>
-              </a:spcBef>
-              <a:spcAft>
-                <a:spcPts val="0"/>
-              </a:spcAft>
+            <a:pPr indent="0" lvl="0" marL="0" marR="0" rtl="0" algn="l">
+              <a:lnSpc>
+                <a:spcPct val="100000"/>
+              </a:lnSpc>
+              <a:spcBef>
+                <a:spcPts val="0"/>
+              </a:spcBef>
+              <a:spcAft>
+                <a:spcPts val="0"/>
+              </a:spcAft>
+              <a:buClr>
+                <a:srgbClr val="000000"/>
+              </a:buClr>
+              <a:buSzPts val="1400"/>
+              <a:buFont typeface="Arial"/>
               <a:buNone/>
             </a:pPr>
             <a:r>
               <a:t/>
             </a:r>
-            <a:endParaRPr/>
+            <a:endParaRPr b="0" i="0" sz="1400" u="none" cap="none" strike="noStrike">
+              <a:solidFill>
+                <a:srgbClr val="000000"/>
+              </a:solidFill>
+              <a:latin typeface="Arial"/>
+              <a:ea typeface="Arial"/>
+              <a:cs typeface="Arial"/>
+              <a:sym typeface="Arial"/>
+            </a:endParaRPr>
           </a:p>
         </p:txBody>
       </p:sp>
@@ -15566,6 +17146,9 @@
           <a:lstStyle/>
           <a:p>
             <a:pPr indent="0" lvl="0" marL="0" marR="0" rtl="0" algn="l">
+              <a:lnSpc>
+                <a:spcPct val="100000"/>
+              </a:lnSpc>
               <a:spcBef>
                 <a:spcPts val="0"/>
               </a:spcBef>
@@ -15629,6 +17212,9 @@
           <a:lstStyle/>
           <a:p>
             <a:pPr indent="0" lvl="0" marL="0" marR="0" rtl="0" algn="l">
+              <a:lnSpc>
+                <a:spcPct val="100000"/>
+              </a:lnSpc>
               <a:spcBef>
                 <a:spcPts val="0"/>
               </a:spcBef>
@@ -15692,6 +17278,9 @@
           <a:lstStyle/>
           <a:p>
             <a:pPr indent="0" lvl="0" marL="0" marR="0" rtl="0" algn="l">
+              <a:lnSpc>
+                <a:spcPct val="100000"/>
+              </a:lnSpc>
               <a:spcBef>
                 <a:spcPts val="0"/>
               </a:spcBef>
@@ -15755,6 +17344,9 @@
           <a:lstStyle/>
           <a:p>
             <a:pPr indent="0" lvl="0" marL="0" marR="0" rtl="0" algn="l">
+              <a:lnSpc>
+                <a:spcPct val="100000"/>
+              </a:lnSpc>
               <a:spcBef>
                 <a:spcPts val="0"/>
               </a:spcBef>
@@ -15818,6 +17410,9 @@
           <a:lstStyle/>
           <a:p>
             <a:pPr indent="0" lvl="0" marL="0" marR="0" rtl="0" algn="l">
+              <a:lnSpc>
+                <a:spcPct val="100000"/>
+              </a:lnSpc>
               <a:spcBef>
                 <a:spcPts val="0"/>
               </a:spcBef>
@@ -15881,6 +17476,9 @@
           <a:lstStyle/>
           <a:p>
             <a:pPr indent="0" lvl="0" marL="0" marR="0" rtl="0" algn="l">
+              <a:lnSpc>
+                <a:spcPct val="100000"/>
+              </a:lnSpc>
               <a:spcBef>
                 <a:spcPts val="0"/>
               </a:spcBef>
@@ -15944,6 +17542,9 @@
           <a:lstStyle/>
           <a:p>
             <a:pPr indent="0" lvl="0" marL="0" marR="0" rtl="0" algn="l">
+              <a:lnSpc>
+                <a:spcPct val="100000"/>
+              </a:lnSpc>
               <a:spcBef>
                 <a:spcPts val="0"/>
               </a:spcBef>
@@ -16007,6 +17608,9 @@
           <a:lstStyle/>
           <a:p>
             <a:pPr indent="0" lvl="0" marL="0" marR="0" rtl="0" algn="l">
+              <a:lnSpc>
+                <a:spcPct val="100000"/>
+              </a:lnSpc>
               <a:spcBef>
                 <a:spcPts val="0"/>
               </a:spcBef>
@@ -16070,6 +17674,9 @@
           <a:lstStyle/>
           <a:p>
             <a:pPr indent="0" lvl="0" marL="0" marR="0" rtl="0" algn="l">
+              <a:lnSpc>
+                <a:spcPct val="100000"/>
+              </a:lnSpc>
               <a:spcBef>
                 <a:spcPts val="0"/>
               </a:spcBef>
@@ -16133,6 +17740,9 @@
           <a:lstStyle/>
           <a:p>
             <a:pPr indent="0" lvl="0" marL="0" marR="0" rtl="0" algn="l">
+              <a:lnSpc>
+                <a:spcPct val="100000"/>
+              </a:lnSpc>
               <a:spcBef>
                 <a:spcPts val="0"/>
               </a:spcBef>
@@ -16196,6 +17806,9 @@
           <a:lstStyle/>
           <a:p>
             <a:pPr indent="0" lvl="0" marL="0" marR="0" rtl="0" algn="l">
+              <a:lnSpc>
+                <a:spcPct val="100000"/>
+              </a:lnSpc>
               <a:spcBef>
                 <a:spcPts val="0"/>
               </a:spcBef>
@@ -16259,6 +17872,9 @@
           <a:lstStyle/>
           <a:p>
             <a:pPr indent="0" lvl="0" marL="0" marR="0" rtl="0" algn="l">
+              <a:lnSpc>
+                <a:spcPct val="100000"/>
+              </a:lnSpc>
               <a:spcBef>
                 <a:spcPts val="0"/>
               </a:spcBef>
@@ -16322,6 +17938,9 @@
           <a:lstStyle/>
           <a:p>
             <a:pPr indent="0" lvl="0" marL="0" marR="0" rtl="0" algn="l">
+              <a:lnSpc>
+                <a:spcPct val="100000"/>
+              </a:lnSpc>
               <a:spcBef>
                 <a:spcPts val="0"/>
               </a:spcBef>
@@ -16385,6 +18004,9 @@
           <a:lstStyle/>
           <a:p>
             <a:pPr indent="0" lvl="0" marL="0" marR="0" rtl="0" algn="l">
+              <a:lnSpc>
+                <a:spcPct val="100000"/>
+              </a:lnSpc>
               <a:spcBef>
                 <a:spcPts val="0"/>
               </a:spcBef>
@@ -16448,6 +18070,9 @@
           <a:lstStyle/>
           <a:p>
             <a:pPr indent="0" lvl="0" marL="0" marR="0" rtl="0" algn="l">
+              <a:lnSpc>
+                <a:spcPct val="100000"/>
+              </a:lnSpc>
               <a:spcBef>
                 <a:spcPts val="0"/>
               </a:spcBef>
@@ -16511,6 +18136,9 @@
           <a:lstStyle/>
           <a:p>
             <a:pPr indent="0" lvl="0" marL="0" marR="0" rtl="0" algn="l">
+              <a:lnSpc>
+                <a:spcPct val="100000"/>
+              </a:lnSpc>
               <a:spcBef>
                 <a:spcPts val="0"/>
               </a:spcBef>
@@ -16613,19 +18241,35 @@
           </a:bodyPr>
           <a:lstStyle/>
           <a:p>
-            <a:pPr indent="0" lvl="0" marL="0" rtl="0" algn="l">
-              <a:spcBef>
-                <a:spcPts val="0"/>
-              </a:spcBef>
-              <a:spcAft>
-                <a:spcPts val="0"/>
-              </a:spcAft>
+            <a:pPr indent="0" lvl="0" marL="0" marR="0" rtl="0" algn="l">
+              <a:lnSpc>
+                <a:spcPct val="100000"/>
+              </a:lnSpc>
+              <a:spcBef>
+                <a:spcPts val="0"/>
+              </a:spcBef>
+              <a:spcAft>
+                <a:spcPts val="0"/>
+              </a:spcAft>
+              <a:buClr>
+                <a:srgbClr val="000000"/>
+              </a:buClr>
+              <a:buSzPts val="1400"/>
+              <a:buFont typeface="Arial"/>
               <a:buNone/>
             </a:pPr>
             <a:r>
               <a:t/>
             </a:r>
-            <a:endParaRPr/>
+            <a:endParaRPr b="0" i="0" sz="1400" u="none" cap="none" strike="noStrike">
+              <a:solidFill>
+                <a:srgbClr val="000000"/>
+              </a:solidFill>
+              <a:latin typeface="Arial"/>
+              <a:ea typeface="Arial"/>
+              <a:cs typeface="Arial"/>
+              <a:sym typeface="Arial"/>
+            </a:endParaRPr>
           </a:p>
         </p:txBody>
       </p:sp>
@@ -16655,6 +18299,9 @@
           <a:lstStyle/>
           <a:p>
             <a:pPr indent="0" lvl="0" marL="0" marR="0" rtl="0" algn="l">
+              <a:lnSpc>
+                <a:spcPct val="100000"/>
+              </a:lnSpc>
               <a:spcBef>
                 <a:spcPts val="0"/>
               </a:spcBef>
@@ -16718,6 +18365,9 @@
           <a:lstStyle/>
           <a:p>
             <a:pPr indent="0" lvl="0" marL="0" marR="0" rtl="0" algn="r">
+              <a:lnSpc>
+                <a:spcPct val="100000"/>
+              </a:lnSpc>
               <a:spcBef>
                 <a:spcPts val="0"/>
               </a:spcBef>
@@ -16795,19 +18445,35 @@
           </a:bodyPr>
           <a:lstStyle/>
           <a:p>
-            <a:pPr indent="0" lvl="0" marL="0" rtl="0" algn="l">
-              <a:spcBef>
-                <a:spcPts val="0"/>
-              </a:spcBef>
-              <a:spcAft>
-                <a:spcPts val="0"/>
-              </a:spcAft>
+            <a:pPr indent="0" lvl="0" marL="0" marR="0" rtl="0" algn="l">
+              <a:lnSpc>
+                <a:spcPct val="100000"/>
+              </a:lnSpc>
+              <a:spcBef>
+                <a:spcPts val="0"/>
+              </a:spcBef>
+              <a:spcAft>
+                <a:spcPts val="0"/>
+              </a:spcAft>
+              <a:buClr>
+                <a:srgbClr val="000000"/>
+              </a:buClr>
+              <a:buSzPts val="1400"/>
+              <a:buFont typeface="Arial"/>
               <a:buNone/>
             </a:pPr>
             <a:r>
               <a:t/>
             </a:r>
-            <a:endParaRPr/>
+            <a:endParaRPr b="0" i="0" sz="1400" u="none" cap="none" strike="noStrike">
+              <a:solidFill>
+                <a:srgbClr val="000000"/>
+              </a:solidFill>
+              <a:latin typeface="Arial"/>
+              <a:ea typeface="Arial"/>
+              <a:cs typeface="Arial"/>
+              <a:sym typeface="Arial"/>
+            </a:endParaRPr>
           </a:p>
         </p:txBody>
       </p:sp>
@@ -16844,19 +18510,35 @@
           </a:bodyPr>
           <a:lstStyle/>
           <a:p>
-            <a:pPr indent="0" lvl="0" marL="0" rtl="0" algn="l">
-              <a:spcBef>
-                <a:spcPts val="0"/>
-              </a:spcBef>
-              <a:spcAft>
-                <a:spcPts val="0"/>
-              </a:spcAft>
+            <a:pPr indent="0" lvl="0" marL="0" marR="0" rtl="0" algn="l">
+              <a:lnSpc>
+                <a:spcPct val="100000"/>
+              </a:lnSpc>
+              <a:spcBef>
+                <a:spcPts val="0"/>
+              </a:spcBef>
+              <a:spcAft>
+                <a:spcPts val="0"/>
+              </a:spcAft>
+              <a:buClr>
+                <a:srgbClr val="000000"/>
+              </a:buClr>
+              <a:buSzPts val="1400"/>
+              <a:buFont typeface="Arial"/>
               <a:buNone/>
             </a:pPr>
             <a:r>
               <a:t/>
             </a:r>
-            <a:endParaRPr/>
+            <a:endParaRPr b="0" i="0" sz="1400" u="none" cap="none" strike="noStrike">
+              <a:solidFill>
+                <a:srgbClr val="000000"/>
+              </a:solidFill>
+              <a:latin typeface="Arial"/>
+              <a:ea typeface="Arial"/>
+              <a:cs typeface="Arial"/>
+              <a:sym typeface="Arial"/>
+            </a:endParaRPr>
           </a:p>
         </p:txBody>
       </p:sp>
@@ -16886,6 +18568,9 @@
           <a:lstStyle/>
           <a:p>
             <a:pPr indent="0" lvl="0" marL="0" marR="0" rtl="0" algn="l">
+              <a:lnSpc>
+                <a:spcPct val="100000"/>
+              </a:lnSpc>
               <a:spcBef>
                 <a:spcPts val="0"/>
               </a:spcBef>
@@ -16949,6 +18634,9 @@
           <a:lstStyle/>
           <a:p>
             <a:pPr indent="0" lvl="0" marL="0" marR="0" rtl="0" algn="l">
+              <a:lnSpc>
+                <a:spcPct val="100000"/>
+              </a:lnSpc>
               <a:spcBef>
                 <a:spcPts val="0"/>
               </a:spcBef>
@@ -17012,6 +18700,9 @@
           <a:lstStyle/>
           <a:p>
             <a:pPr indent="0" lvl="0" marL="0" marR="0" rtl="0" algn="l">
+              <a:lnSpc>
+                <a:spcPct val="100000"/>
+              </a:lnSpc>
               <a:spcBef>
                 <a:spcPts val="0"/>
               </a:spcBef>
@@ -17075,6 +18766,9 @@
           <a:lstStyle/>
           <a:p>
             <a:pPr indent="0" lvl="0" marL="0" marR="0" rtl="0" algn="l">
+              <a:lnSpc>
+                <a:spcPct val="100000"/>
+              </a:lnSpc>
               <a:spcBef>
                 <a:spcPts val="0"/>
               </a:spcBef>
@@ -17152,19 +18846,35 @@
           </a:bodyPr>
           <a:lstStyle/>
           <a:p>
-            <a:pPr indent="0" lvl="0" marL="0" rtl="0" algn="l">
-              <a:spcBef>
-                <a:spcPts val="0"/>
-              </a:spcBef>
-              <a:spcAft>
-                <a:spcPts val="0"/>
-              </a:spcAft>
+            <a:pPr indent="0" lvl="0" marL="0" marR="0" rtl="0" algn="l">
+              <a:lnSpc>
+                <a:spcPct val="100000"/>
+              </a:lnSpc>
+              <a:spcBef>
+                <a:spcPts val="0"/>
+              </a:spcBef>
+              <a:spcAft>
+                <a:spcPts val="0"/>
+              </a:spcAft>
+              <a:buClr>
+                <a:srgbClr val="000000"/>
+              </a:buClr>
+              <a:buSzPts val="1400"/>
+              <a:buFont typeface="Arial"/>
               <a:buNone/>
             </a:pPr>
             <a:r>
               <a:t/>
             </a:r>
-            <a:endParaRPr/>
+            <a:endParaRPr b="0" i="0" sz="1400" u="none" cap="none" strike="noStrike">
+              <a:solidFill>
+                <a:srgbClr val="000000"/>
+              </a:solidFill>
+              <a:latin typeface="Arial"/>
+              <a:ea typeface="Arial"/>
+              <a:cs typeface="Arial"/>
+              <a:sym typeface="Arial"/>
+            </a:endParaRPr>
           </a:p>
         </p:txBody>
       </p:sp>
@@ -17201,19 +18911,35 @@
           </a:bodyPr>
           <a:lstStyle/>
           <a:p>
-            <a:pPr indent="0" lvl="0" marL="0" rtl="0" algn="l">
-              <a:spcBef>
-                <a:spcPts val="0"/>
-              </a:spcBef>
-              <a:spcAft>
-                <a:spcPts val="0"/>
-              </a:spcAft>
+            <a:pPr indent="0" lvl="0" marL="0" marR="0" rtl="0" algn="l">
+              <a:lnSpc>
+                <a:spcPct val="100000"/>
+              </a:lnSpc>
+              <a:spcBef>
+                <a:spcPts val="0"/>
+              </a:spcBef>
+              <a:spcAft>
+                <a:spcPts val="0"/>
+              </a:spcAft>
+              <a:buClr>
+                <a:srgbClr val="000000"/>
+              </a:buClr>
+              <a:buSzPts val="1400"/>
+              <a:buFont typeface="Arial"/>
               <a:buNone/>
             </a:pPr>
             <a:r>
               <a:t/>
             </a:r>
-            <a:endParaRPr/>
+            <a:endParaRPr b="0" i="0" sz="1400" u="none" cap="none" strike="noStrike">
+              <a:solidFill>
+                <a:srgbClr val="000000"/>
+              </a:solidFill>
+              <a:latin typeface="Arial"/>
+              <a:ea typeface="Arial"/>
+              <a:cs typeface="Arial"/>
+              <a:sym typeface="Arial"/>
+            </a:endParaRPr>
           </a:p>
         </p:txBody>
       </p:sp>
@@ -17243,6 +18969,9 @@
           <a:lstStyle/>
           <a:p>
             <a:pPr indent="0" lvl="0" marL="0" marR="0" rtl="0" algn="l">
+              <a:lnSpc>
+                <a:spcPct val="100000"/>
+              </a:lnSpc>
               <a:spcBef>
                 <a:spcPts val="0"/>
               </a:spcBef>
@@ -17306,6 +19035,9 @@
           <a:lstStyle/>
           <a:p>
             <a:pPr indent="0" lvl="0" marL="0" marR="0" rtl="0" algn="l">
+              <a:lnSpc>
+                <a:spcPct val="100000"/>
+              </a:lnSpc>
               <a:spcBef>
                 <a:spcPts val="0"/>
               </a:spcBef>
@@ -17369,6 +19101,9 @@
           <a:lstStyle/>
           <a:p>
             <a:pPr indent="0" lvl="0" marL="0" marR="0" rtl="0" algn="l">
+              <a:lnSpc>
+                <a:spcPct val="100000"/>
+              </a:lnSpc>
               <a:spcBef>
                 <a:spcPts val="0"/>
               </a:spcBef>
@@ -17432,6 +19167,9 @@
           <a:lstStyle/>
           <a:p>
             <a:pPr indent="0" lvl="0" marL="0" marR="0" rtl="0" algn="l">
+              <a:lnSpc>
+                <a:spcPct val="100000"/>
+              </a:lnSpc>
               <a:spcBef>
                 <a:spcPts val="0"/>
               </a:spcBef>
@@ -17509,19 +19247,35 @@
           </a:bodyPr>
           <a:lstStyle/>
           <a:p>
-            <a:pPr indent="0" lvl="0" marL="0" rtl="0" algn="l">
-              <a:spcBef>
-                <a:spcPts val="0"/>
-              </a:spcBef>
-              <a:spcAft>
-                <a:spcPts val="0"/>
-              </a:spcAft>
+            <a:pPr indent="0" lvl="0" marL="0" marR="0" rtl="0" algn="l">
+              <a:lnSpc>
+                <a:spcPct val="100000"/>
+              </a:lnSpc>
+              <a:spcBef>
+                <a:spcPts val="0"/>
+              </a:spcBef>
+              <a:spcAft>
+                <a:spcPts val="0"/>
+              </a:spcAft>
+              <a:buClr>
+                <a:srgbClr val="000000"/>
+              </a:buClr>
+              <a:buSzPts val="1400"/>
+              <a:buFont typeface="Arial"/>
               <a:buNone/>
             </a:pPr>
             <a:r>
               <a:t/>
             </a:r>
-            <a:endParaRPr/>
+            <a:endParaRPr b="0" i="0" sz="1400" u="none" cap="none" strike="noStrike">
+              <a:solidFill>
+                <a:srgbClr val="000000"/>
+              </a:solidFill>
+              <a:latin typeface="Arial"/>
+              <a:ea typeface="Arial"/>
+              <a:cs typeface="Arial"/>
+              <a:sym typeface="Arial"/>
+            </a:endParaRPr>
           </a:p>
         </p:txBody>
       </p:sp>
@@ -17558,19 +19312,35 @@
           </a:bodyPr>
           <a:lstStyle/>
           <a:p>
-            <a:pPr indent="0" lvl="0" marL="0" rtl="0" algn="l">
-              <a:spcBef>
-                <a:spcPts val="0"/>
-              </a:spcBef>
-              <a:spcAft>
-                <a:spcPts val="0"/>
-              </a:spcAft>
+            <a:pPr indent="0" lvl="0" marL="0" marR="0" rtl="0" algn="l">
+              <a:lnSpc>
+                <a:spcPct val="100000"/>
+              </a:lnSpc>
+              <a:spcBef>
+                <a:spcPts val="0"/>
+              </a:spcBef>
+              <a:spcAft>
+                <a:spcPts val="0"/>
+              </a:spcAft>
+              <a:buClr>
+                <a:srgbClr val="000000"/>
+              </a:buClr>
+              <a:buSzPts val="1400"/>
+              <a:buFont typeface="Arial"/>
               <a:buNone/>
             </a:pPr>
             <a:r>
               <a:t/>
             </a:r>
-            <a:endParaRPr/>
+            <a:endParaRPr b="0" i="0" sz="1400" u="none" cap="none" strike="noStrike">
+              <a:solidFill>
+                <a:srgbClr val="000000"/>
+              </a:solidFill>
+              <a:latin typeface="Arial"/>
+              <a:ea typeface="Arial"/>
+              <a:cs typeface="Arial"/>
+              <a:sym typeface="Arial"/>
+            </a:endParaRPr>
           </a:p>
         </p:txBody>
       </p:sp>
@@ -17600,6 +19370,9 @@
           <a:lstStyle/>
           <a:p>
             <a:pPr indent="0" lvl="0" marL="0" marR="0" rtl="0" algn="l">
+              <a:lnSpc>
+                <a:spcPct val="100000"/>
+              </a:lnSpc>
               <a:spcBef>
                 <a:spcPts val="0"/>
               </a:spcBef>
@@ -17663,6 +19436,9 @@
           <a:lstStyle/>
           <a:p>
             <a:pPr indent="0" lvl="0" marL="0" marR="0" rtl="0" algn="l">
+              <a:lnSpc>
+                <a:spcPct val="100000"/>
+              </a:lnSpc>
               <a:spcBef>
                 <a:spcPts val="0"/>
               </a:spcBef>
@@ -17726,6 +19502,9 @@
           <a:lstStyle/>
           <a:p>
             <a:pPr indent="0" lvl="0" marL="0" marR="0" rtl="0" algn="l">
+              <a:lnSpc>
+                <a:spcPct val="100000"/>
+              </a:lnSpc>
               <a:spcBef>
                 <a:spcPts val="0"/>
               </a:spcBef>
@@ -17789,6 +19568,9 @@
           <a:lstStyle/>
           <a:p>
             <a:pPr indent="0" lvl="0" marL="0" marR="0" rtl="0" algn="l">
+              <a:lnSpc>
+                <a:spcPct val="100000"/>
+              </a:lnSpc>
               <a:spcBef>
                 <a:spcPts val="0"/>
               </a:spcBef>
@@ -17866,19 +19648,35 @@
           </a:bodyPr>
           <a:lstStyle/>
           <a:p>
-            <a:pPr indent="0" lvl="0" marL="0" rtl="0" algn="l">
-              <a:spcBef>
-                <a:spcPts val="0"/>
-              </a:spcBef>
-              <a:spcAft>
-                <a:spcPts val="0"/>
-              </a:spcAft>
+            <a:pPr indent="0" lvl="0" marL="0" marR="0" rtl="0" algn="l">
+              <a:lnSpc>
+                <a:spcPct val="100000"/>
+              </a:lnSpc>
+              <a:spcBef>
+                <a:spcPts val="0"/>
+              </a:spcBef>
+              <a:spcAft>
+                <a:spcPts val="0"/>
+              </a:spcAft>
+              <a:buClr>
+                <a:srgbClr val="000000"/>
+              </a:buClr>
+              <a:buSzPts val="1400"/>
+              <a:buFont typeface="Arial"/>
               <a:buNone/>
             </a:pPr>
             <a:r>
               <a:t/>
             </a:r>
-            <a:endParaRPr/>
+            <a:endParaRPr b="0" i="0" sz="1400" u="none" cap="none" strike="noStrike">
+              <a:solidFill>
+                <a:srgbClr val="000000"/>
+              </a:solidFill>
+              <a:latin typeface="Arial"/>
+              <a:ea typeface="Arial"/>
+              <a:cs typeface="Arial"/>
+              <a:sym typeface="Arial"/>
+            </a:endParaRPr>
           </a:p>
         </p:txBody>
       </p:sp>
@@ -17915,19 +19713,35 @@
           </a:bodyPr>
           <a:lstStyle/>
           <a:p>
-            <a:pPr indent="0" lvl="0" marL="0" rtl="0" algn="l">
-              <a:spcBef>
-                <a:spcPts val="0"/>
-              </a:spcBef>
-              <a:spcAft>
-                <a:spcPts val="0"/>
-              </a:spcAft>
+            <a:pPr indent="0" lvl="0" marL="0" marR="0" rtl="0" algn="l">
+              <a:lnSpc>
+                <a:spcPct val="100000"/>
+              </a:lnSpc>
+              <a:spcBef>
+                <a:spcPts val="0"/>
+              </a:spcBef>
+              <a:spcAft>
+                <a:spcPts val="0"/>
+              </a:spcAft>
+              <a:buClr>
+                <a:srgbClr val="000000"/>
+              </a:buClr>
+              <a:buSzPts val="1400"/>
+              <a:buFont typeface="Arial"/>
               <a:buNone/>
             </a:pPr>
             <a:r>
               <a:t/>
             </a:r>
-            <a:endParaRPr/>
+            <a:endParaRPr b="0" i="0" sz="1400" u="none" cap="none" strike="noStrike">
+              <a:solidFill>
+                <a:srgbClr val="000000"/>
+              </a:solidFill>
+              <a:latin typeface="Arial"/>
+              <a:ea typeface="Arial"/>
+              <a:cs typeface="Arial"/>
+              <a:sym typeface="Arial"/>
+            </a:endParaRPr>
           </a:p>
         </p:txBody>
       </p:sp>
@@ -17957,6 +19771,9 @@
           <a:lstStyle/>
           <a:p>
             <a:pPr indent="0" lvl="0" marL="0" marR="0" rtl="0" algn="l">
+              <a:lnSpc>
+                <a:spcPct val="100000"/>
+              </a:lnSpc>
               <a:spcBef>
                 <a:spcPts val="0"/>
               </a:spcBef>
@@ -18020,6 +19837,9 @@
           <a:lstStyle/>
           <a:p>
             <a:pPr indent="0" lvl="0" marL="0" marR="0" rtl="0" algn="l">
+              <a:lnSpc>
+                <a:spcPct val="100000"/>
+              </a:lnSpc>
               <a:spcBef>
                 <a:spcPts val="0"/>
               </a:spcBef>
@@ -18083,6 +19903,9 @@
           <a:lstStyle/>
           <a:p>
             <a:pPr indent="0" lvl="0" marL="0" marR="0" rtl="0" algn="l">
+              <a:lnSpc>
+                <a:spcPct val="100000"/>
+              </a:lnSpc>
               <a:spcBef>
                 <a:spcPts val="0"/>
               </a:spcBef>
@@ -18146,6 +19969,9 @@
           <a:lstStyle/>
           <a:p>
             <a:pPr indent="0" lvl="0" marL="0" marR="0" rtl="0" algn="l">
+              <a:lnSpc>
+                <a:spcPct val="100000"/>
+              </a:lnSpc>
               <a:spcBef>
                 <a:spcPts val="0"/>
               </a:spcBef>
@@ -18248,19 +20074,35 @@
           </a:bodyPr>
           <a:lstStyle/>
           <a:p>
-            <a:pPr indent="0" lvl="0" marL="0" rtl="0" algn="l">
-              <a:spcBef>
-                <a:spcPts val="0"/>
-              </a:spcBef>
-              <a:spcAft>
-                <a:spcPts val="0"/>
-              </a:spcAft>
+            <a:pPr indent="0" lvl="0" marL="0" marR="0" rtl="0" algn="l">
+              <a:lnSpc>
+                <a:spcPct val="100000"/>
+              </a:lnSpc>
+              <a:spcBef>
+                <a:spcPts val="0"/>
+              </a:spcBef>
+              <a:spcAft>
+                <a:spcPts val="0"/>
+              </a:spcAft>
+              <a:buClr>
+                <a:srgbClr val="000000"/>
+              </a:buClr>
+              <a:buSzPts val="1400"/>
+              <a:buFont typeface="Arial"/>
               <a:buNone/>
             </a:pPr>
             <a:r>
               <a:t/>
             </a:r>
-            <a:endParaRPr/>
+            <a:endParaRPr b="0" i="0" sz="1400" u="none" cap="none" strike="noStrike">
+              <a:solidFill>
+                <a:srgbClr val="000000"/>
+              </a:solidFill>
+              <a:latin typeface="Arial"/>
+              <a:ea typeface="Arial"/>
+              <a:cs typeface="Arial"/>
+              <a:sym typeface="Arial"/>
+            </a:endParaRPr>
           </a:p>
         </p:txBody>
       </p:sp>
@@ -18290,6 +20132,9 @@
           <a:lstStyle/>
           <a:p>
             <a:pPr indent="0" lvl="0" marL="0" marR="0" rtl="0" algn="l">
+              <a:lnSpc>
+                <a:spcPct val="100000"/>
+              </a:lnSpc>
               <a:spcBef>
                 <a:spcPts val="0"/>
               </a:spcBef>
@@ -18353,6 +20198,9 @@
           <a:lstStyle/>
           <a:p>
             <a:pPr indent="0" lvl="0" marL="0" marR="0" rtl="0" algn="r">
+              <a:lnSpc>
+                <a:spcPct val="100000"/>
+              </a:lnSpc>
               <a:spcBef>
                 <a:spcPts val="0"/>
               </a:spcBef>
@@ -18430,19 +20278,35 @@
           </a:bodyPr>
           <a:lstStyle/>
           <a:p>
-            <a:pPr indent="0" lvl="0" marL="0" rtl="0" algn="l">
-              <a:spcBef>
-                <a:spcPts val="0"/>
-              </a:spcBef>
-              <a:spcAft>
-                <a:spcPts val="0"/>
-              </a:spcAft>
+            <a:pPr indent="0" lvl="0" marL="0" marR="0" rtl="0" algn="l">
+              <a:lnSpc>
+                <a:spcPct val="100000"/>
+              </a:lnSpc>
+              <a:spcBef>
+                <a:spcPts val="0"/>
+              </a:spcBef>
+              <a:spcAft>
+                <a:spcPts val="0"/>
+              </a:spcAft>
+              <a:buClr>
+                <a:srgbClr val="000000"/>
+              </a:buClr>
+              <a:buSzPts val="1400"/>
+              <a:buFont typeface="Arial"/>
               <a:buNone/>
             </a:pPr>
             <a:r>
               <a:t/>
             </a:r>
-            <a:endParaRPr/>
+            <a:endParaRPr b="0" i="0" sz="1400" u="none" cap="none" strike="noStrike">
+              <a:solidFill>
+                <a:srgbClr val="000000"/>
+              </a:solidFill>
+              <a:latin typeface="Arial"/>
+              <a:ea typeface="Arial"/>
+              <a:cs typeface="Arial"/>
+              <a:sym typeface="Arial"/>
+            </a:endParaRPr>
           </a:p>
         </p:txBody>
       </p:sp>
@@ -18479,19 +20343,35 @@
           </a:bodyPr>
           <a:lstStyle/>
           <a:p>
-            <a:pPr indent="0" lvl="0" marL="0" rtl="0" algn="l">
-              <a:spcBef>
-                <a:spcPts val="0"/>
-              </a:spcBef>
-              <a:spcAft>
-                <a:spcPts val="0"/>
-              </a:spcAft>
+            <a:pPr indent="0" lvl="0" marL="0" marR="0" rtl="0" algn="l">
+              <a:lnSpc>
+                <a:spcPct val="100000"/>
+              </a:lnSpc>
+              <a:spcBef>
+                <a:spcPts val="0"/>
+              </a:spcBef>
+              <a:spcAft>
+                <a:spcPts val="0"/>
+              </a:spcAft>
+              <a:buClr>
+                <a:srgbClr val="000000"/>
+              </a:buClr>
+              <a:buSzPts val="1400"/>
+              <a:buFont typeface="Arial"/>
               <a:buNone/>
             </a:pPr>
             <a:r>
               <a:t/>
             </a:r>
-            <a:endParaRPr/>
+            <a:endParaRPr b="0" i="0" sz="1400" u="none" cap="none" strike="noStrike">
+              <a:solidFill>
+                <a:srgbClr val="000000"/>
+              </a:solidFill>
+              <a:latin typeface="Arial"/>
+              <a:ea typeface="Arial"/>
+              <a:cs typeface="Arial"/>
+              <a:sym typeface="Arial"/>
+            </a:endParaRPr>
           </a:p>
         </p:txBody>
       </p:sp>
@@ -18521,6 +20401,9 @@
           <a:lstStyle/>
           <a:p>
             <a:pPr indent="0" lvl="0" marL="0" marR="0" rtl="0" algn="ctr">
+              <a:lnSpc>
+                <a:spcPct val="100000"/>
+              </a:lnSpc>
               <a:spcBef>
                 <a:spcPts val="0"/>
               </a:spcBef>
@@ -18584,6 +20467,9 @@
           <a:lstStyle/>
           <a:p>
             <a:pPr indent="0" lvl="0" marL="0" marR="0" rtl="0" algn="l">
+              <a:lnSpc>
+                <a:spcPct val="100000"/>
+              </a:lnSpc>
               <a:spcBef>
                 <a:spcPts val="0"/>
               </a:spcBef>
@@ -18654,19 +20540,35 @@
           </a:bodyPr>
           <a:lstStyle/>
           <a:p>
-            <a:pPr indent="0" lvl="0" marL="0" rtl="0" algn="l">
-              <a:spcBef>
-                <a:spcPts val="0"/>
-              </a:spcBef>
-              <a:spcAft>
-                <a:spcPts val="0"/>
-              </a:spcAft>
+            <a:pPr indent="0" lvl="0" marL="0" marR="0" rtl="0" algn="l">
+              <a:lnSpc>
+                <a:spcPct val="100000"/>
+              </a:lnSpc>
+              <a:spcBef>
+                <a:spcPts val="0"/>
+              </a:spcBef>
+              <a:spcAft>
+                <a:spcPts val="0"/>
+              </a:spcAft>
+              <a:buClr>
+                <a:srgbClr val="000000"/>
+              </a:buClr>
+              <a:buSzPts val="1400"/>
+              <a:buFont typeface="Arial"/>
               <a:buNone/>
             </a:pPr>
             <a:r>
               <a:t/>
             </a:r>
-            <a:endParaRPr/>
+            <a:endParaRPr b="0" i="0" sz="1400" u="none" cap="none" strike="noStrike">
+              <a:solidFill>
+                <a:srgbClr val="000000"/>
+              </a:solidFill>
+              <a:latin typeface="Arial"/>
+              <a:ea typeface="Arial"/>
+              <a:cs typeface="Arial"/>
+              <a:sym typeface="Arial"/>
+            </a:endParaRPr>
           </a:p>
         </p:txBody>
       </p:sp>
@@ -18696,6 +20598,9 @@
           <a:lstStyle/>
           <a:p>
             <a:pPr indent="0" lvl="0" marL="0" marR="0" rtl="0" algn="l">
+              <a:lnSpc>
+                <a:spcPct val="100000"/>
+              </a:lnSpc>
               <a:spcBef>
                 <a:spcPts val="0"/>
               </a:spcBef>
@@ -18759,6 +20664,9 @@
           <a:lstStyle/>
           <a:p>
             <a:pPr indent="0" lvl="0" marL="0" marR="0" rtl="0" algn="l">
+              <a:lnSpc>
+                <a:spcPct val="100000"/>
+              </a:lnSpc>
               <a:spcBef>
                 <a:spcPts val="0"/>
               </a:spcBef>
@@ -18836,19 +20744,35 @@
           </a:bodyPr>
           <a:lstStyle/>
           <a:p>
-            <a:pPr indent="0" lvl="0" marL="0" rtl="0" algn="l">
-              <a:spcBef>
-                <a:spcPts val="0"/>
-              </a:spcBef>
-              <a:spcAft>
-                <a:spcPts val="0"/>
-              </a:spcAft>
+            <a:pPr indent="0" lvl="0" marL="0" marR="0" rtl="0" algn="l">
+              <a:lnSpc>
+                <a:spcPct val="100000"/>
+              </a:lnSpc>
+              <a:spcBef>
+                <a:spcPts val="0"/>
+              </a:spcBef>
+              <a:spcAft>
+                <a:spcPts val="0"/>
+              </a:spcAft>
+              <a:buClr>
+                <a:srgbClr val="000000"/>
+              </a:buClr>
+              <a:buSzPts val="1400"/>
+              <a:buFont typeface="Arial"/>
               <a:buNone/>
             </a:pPr>
             <a:r>
               <a:t/>
             </a:r>
-            <a:endParaRPr/>
+            <a:endParaRPr b="0" i="0" sz="1400" u="none" cap="none" strike="noStrike">
+              <a:solidFill>
+                <a:srgbClr val="000000"/>
+              </a:solidFill>
+              <a:latin typeface="Arial"/>
+              <a:ea typeface="Arial"/>
+              <a:cs typeface="Arial"/>
+              <a:sym typeface="Arial"/>
+            </a:endParaRPr>
           </a:p>
         </p:txBody>
       </p:sp>
@@ -18885,19 +20809,35 @@
           </a:bodyPr>
           <a:lstStyle/>
           <a:p>
-            <a:pPr indent="0" lvl="0" marL="0" rtl="0" algn="l">
-              <a:spcBef>
-                <a:spcPts val="0"/>
-              </a:spcBef>
-              <a:spcAft>
-                <a:spcPts val="0"/>
-              </a:spcAft>
+            <a:pPr indent="0" lvl="0" marL="0" marR="0" rtl="0" algn="l">
+              <a:lnSpc>
+                <a:spcPct val="100000"/>
+              </a:lnSpc>
+              <a:spcBef>
+                <a:spcPts val="0"/>
+              </a:spcBef>
+              <a:spcAft>
+                <a:spcPts val="0"/>
+              </a:spcAft>
+              <a:buClr>
+                <a:srgbClr val="000000"/>
+              </a:buClr>
+              <a:buSzPts val="1400"/>
+              <a:buFont typeface="Arial"/>
               <a:buNone/>
             </a:pPr>
             <a:r>
               <a:t/>
             </a:r>
-            <a:endParaRPr/>
+            <a:endParaRPr b="0" i="0" sz="1400" u="none" cap="none" strike="noStrike">
+              <a:solidFill>
+                <a:srgbClr val="000000"/>
+              </a:solidFill>
+              <a:latin typeface="Arial"/>
+              <a:ea typeface="Arial"/>
+              <a:cs typeface="Arial"/>
+              <a:sym typeface="Arial"/>
+            </a:endParaRPr>
           </a:p>
         </p:txBody>
       </p:sp>
@@ -18927,6 +20867,9 @@
           <a:lstStyle/>
           <a:p>
             <a:pPr indent="0" lvl="0" marL="0" marR="0" rtl="0" algn="ctr">
+              <a:lnSpc>
+                <a:spcPct val="100000"/>
+              </a:lnSpc>
               <a:spcBef>
                 <a:spcPts val="0"/>
               </a:spcBef>
@@ -18990,6 +20933,9 @@
           <a:lstStyle/>
           <a:p>
             <a:pPr indent="0" lvl="0" marL="0" marR="0" rtl="0" algn="l">
+              <a:lnSpc>
+                <a:spcPct val="100000"/>
+              </a:lnSpc>
               <a:spcBef>
                 <a:spcPts val="0"/>
               </a:spcBef>
@@ -19060,19 +21006,35 @@
           </a:bodyPr>
           <a:lstStyle/>
           <a:p>
-            <a:pPr indent="0" lvl="0" marL="0" rtl="0" algn="l">
-              <a:spcBef>
-                <a:spcPts val="0"/>
-              </a:spcBef>
-              <a:spcAft>
-                <a:spcPts val="0"/>
-              </a:spcAft>
+            <a:pPr indent="0" lvl="0" marL="0" marR="0" rtl="0" algn="l">
+              <a:lnSpc>
+                <a:spcPct val="100000"/>
+              </a:lnSpc>
+              <a:spcBef>
+                <a:spcPts val="0"/>
+              </a:spcBef>
+              <a:spcAft>
+                <a:spcPts val="0"/>
+              </a:spcAft>
+              <a:buClr>
+                <a:srgbClr val="000000"/>
+              </a:buClr>
+              <a:buSzPts val="1400"/>
+              <a:buFont typeface="Arial"/>
               <a:buNone/>
             </a:pPr>
             <a:r>
               <a:t/>
             </a:r>
-            <a:endParaRPr/>
+            <a:endParaRPr b="0" i="0" sz="1400" u="none" cap="none" strike="noStrike">
+              <a:solidFill>
+                <a:srgbClr val="000000"/>
+              </a:solidFill>
+              <a:latin typeface="Arial"/>
+              <a:ea typeface="Arial"/>
+              <a:cs typeface="Arial"/>
+              <a:sym typeface="Arial"/>
+            </a:endParaRPr>
           </a:p>
         </p:txBody>
       </p:sp>
@@ -19102,6 +21064,9 @@
           <a:lstStyle/>
           <a:p>
             <a:pPr indent="0" lvl="0" marL="0" marR="0" rtl="0" algn="l">
+              <a:lnSpc>
+                <a:spcPct val="100000"/>
+              </a:lnSpc>
               <a:spcBef>
                 <a:spcPts val="0"/>
               </a:spcBef>
@@ -19165,6 +21130,9 @@
           <a:lstStyle/>
           <a:p>
             <a:pPr indent="0" lvl="0" marL="0" marR="0" rtl="0" algn="l">
+              <a:lnSpc>
+                <a:spcPct val="100000"/>
+              </a:lnSpc>
               <a:spcBef>
                 <a:spcPts val="0"/>
               </a:spcBef>
@@ -19242,19 +21210,35 @@
           </a:bodyPr>
           <a:lstStyle/>
           <a:p>
-            <a:pPr indent="0" lvl="0" marL="0" rtl="0" algn="l">
-              <a:spcBef>
-                <a:spcPts val="0"/>
-              </a:spcBef>
-              <a:spcAft>
-                <a:spcPts val="0"/>
-              </a:spcAft>
+            <a:pPr indent="0" lvl="0" marL="0" marR="0" rtl="0" algn="l">
+              <a:lnSpc>
+                <a:spcPct val="100000"/>
+              </a:lnSpc>
+              <a:spcBef>
+                <a:spcPts val="0"/>
+              </a:spcBef>
+              <a:spcAft>
+                <a:spcPts val="0"/>
+              </a:spcAft>
+              <a:buClr>
+                <a:srgbClr val="000000"/>
+              </a:buClr>
+              <a:buSzPts val="1400"/>
+              <a:buFont typeface="Arial"/>
               <a:buNone/>
             </a:pPr>
             <a:r>
               <a:t/>
             </a:r>
-            <a:endParaRPr/>
+            <a:endParaRPr b="0" i="0" sz="1400" u="none" cap="none" strike="noStrike">
+              <a:solidFill>
+                <a:srgbClr val="000000"/>
+              </a:solidFill>
+              <a:latin typeface="Arial"/>
+              <a:ea typeface="Arial"/>
+              <a:cs typeface="Arial"/>
+              <a:sym typeface="Arial"/>
+            </a:endParaRPr>
           </a:p>
         </p:txBody>
       </p:sp>
@@ -19291,19 +21275,35 @@
           </a:bodyPr>
           <a:lstStyle/>
           <a:p>
-            <a:pPr indent="0" lvl="0" marL="0" rtl="0" algn="l">
-              <a:spcBef>
-                <a:spcPts val="0"/>
-              </a:spcBef>
-              <a:spcAft>
-                <a:spcPts val="0"/>
-              </a:spcAft>
+            <a:pPr indent="0" lvl="0" marL="0" marR="0" rtl="0" algn="l">
+              <a:lnSpc>
+                <a:spcPct val="100000"/>
+              </a:lnSpc>
+              <a:spcBef>
+                <a:spcPts val="0"/>
+              </a:spcBef>
+              <a:spcAft>
+                <a:spcPts val="0"/>
+              </a:spcAft>
+              <a:buClr>
+                <a:srgbClr val="000000"/>
+              </a:buClr>
+              <a:buSzPts val="1400"/>
+              <a:buFont typeface="Arial"/>
               <a:buNone/>
             </a:pPr>
             <a:r>
               <a:t/>
             </a:r>
-            <a:endParaRPr/>
+            <a:endParaRPr b="0" i="0" sz="1400" u="none" cap="none" strike="noStrike">
+              <a:solidFill>
+                <a:srgbClr val="000000"/>
+              </a:solidFill>
+              <a:latin typeface="Arial"/>
+              <a:ea typeface="Arial"/>
+              <a:cs typeface="Arial"/>
+              <a:sym typeface="Arial"/>
+            </a:endParaRPr>
           </a:p>
         </p:txBody>
       </p:sp>
@@ -19333,6 +21333,9 @@
           <a:lstStyle/>
           <a:p>
             <a:pPr indent="0" lvl="0" marL="0" marR="0" rtl="0" algn="ctr">
+              <a:lnSpc>
+                <a:spcPct val="100000"/>
+              </a:lnSpc>
               <a:spcBef>
                 <a:spcPts val="0"/>
               </a:spcBef>
@@ -19396,6 +21399,9 @@
           <a:lstStyle/>
           <a:p>
             <a:pPr indent="0" lvl="0" marL="0" marR="0" rtl="0" algn="l">
+              <a:lnSpc>
+                <a:spcPct val="100000"/>
+              </a:lnSpc>
               <a:spcBef>
                 <a:spcPts val="0"/>
               </a:spcBef>
@@ -19466,19 +21472,35 @@
           </a:bodyPr>
           <a:lstStyle/>
           <a:p>
-            <a:pPr indent="0" lvl="0" marL="0" rtl="0" algn="l">
-              <a:spcBef>
-                <a:spcPts val="0"/>
-              </a:spcBef>
-              <a:spcAft>
-                <a:spcPts val="0"/>
-              </a:spcAft>
+            <a:pPr indent="0" lvl="0" marL="0" marR="0" rtl="0" algn="l">
+              <a:lnSpc>
+                <a:spcPct val="100000"/>
+              </a:lnSpc>
+              <a:spcBef>
+                <a:spcPts val="0"/>
+              </a:spcBef>
+              <a:spcAft>
+                <a:spcPts val="0"/>
+              </a:spcAft>
+              <a:buClr>
+                <a:srgbClr val="000000"/>
+              </a:buClr>
+              <a:buSzPts val="1400"/>
+              <a:buFont typeface="Arial"/>
               <a:buNone/>
             </a:pPr>
             <a:r>
               <a:t/>
             </a:r>
-            <a:endParaRPr/>
+            <a:endParaRPr b="0" i="0" sz="1400" u="none" cap="none" strike="noStrike">
+              <a:solidFill>
+                <a:srgbClr val="000000"/>
+              </a:solidFill>
+              <a:latin typeface="Arial"/>
+              <a:ea typeface="Arial"/>
+              <a:cs typeface="Arial"/>
+              <a:sym typeface="Arial"/>
+            </a:endParaRPr>
           </a:p>
         </p:txBody>
       </p:sp>
@@ -19508,6 +21530,9 @@
           <a:lstStyle/>
           <a:p>
             <a:pPr indent="0" lvl="0" marL="0" marR="0" rtl="0" algn="l">
+              <a:lnSpc>
+                <a:spcPct val="100000"/>
+              </a:lnSpc>
               <a:spcBef>
                 <a:spcPts val="0"/>
               </a:spcBef>
@@ -19571,6 +21596,9 @@
           <a:lstStyle/>
           <a:p>
             <a:pPr indent="0" lvl="0" marL="0" marR="0" rtl="0" algn="l">
+              <a:lnSpc>
+                <a:spcPct val="100000"/>
+              </a:lnSpc>
               <a:spcBef>
                 <a:spcPts val="0"/>
               </a:spcBef>
@@ -19648,19 +21676,35 @@
           </a:bodyPr>
           <a:lstStyle/>
           <a:p>
-            <a:pPr indent="0" lvl="0" marL="0" rtl="0" algn="l">
-              <a:spcBef>
-                <a:spcPts val="0"/>
-              </a:spcBef>
-              <a:spcAft>
-                <a:spcPts val="0"/>
-              </a:spcAft>
+            <a:pPr indent="0" lvl="0" marL="0" marR="0" rtl="0" algn="l">
+              <a:lnSpc>
+                <a:spcPct val="100000"/>
+              </a:lnSpc>
+              <a:spcBef>
+                <a:spcPts val="0"/>
+              </a:spcBef>
+              <a:spcAft>
+                <a:spcPts val="0"/>
+              </a:spcAft>
+              <a:buClr>
+                <a:srgbClr val="000000"/>
+              </a:buClr>
+              <a:buSzPts val="1400"/>
+              <a:buFont typeface="Arial"/>
               <a:buNone/>
             </a:pPr>
             <a:r>
               <a:t/>
             </a:r>
-            <a:endParaRPr/>
+            <a:endParaRPr b="0" i="0" sz="1400" u="none" cap="none" strike="noStrike">
+              <a:solidFill>
+                <a:srgbClr val="000000"/>
+              </a:solidFill>
+              <a:latin typeface="Arial"/>
+              <a:ea typeface="Arial"/>
+              <a:cs typeface="Arial"/>
+              <a:sym typeface="Arial"/>
+            </a:endParaRPr>
           </a:p>
         </p:txBody>
       </p:sp>
@@ -19697,19 +21741,35 @@
           </a:bodyPr>
           <a:lstStyle/>
           <a:p>
-            <a:pPr indent="0" lvl="0" marL="0" rtl="0" algn="l">
-              <a:spcBef>
-                <a:spcPts val="0"/>
-              </a:spcBef>
-              <a:spcAft>
-                <a:spcPts val="0"/>
-              </a:spcAft>
+            <a:pPr indent="0" lvl="0" marL="0" marR="0" rtl="0" algn="l">
+              <a:lnSpc>
+                <a:spcPct val="100000"/>
+              </a:lnSpc>
+              <a:spcBef>
+                <a:spcPts val="0"/>
+              </a:spcBef>
+              <a:spcAft>
+                <a:spcPts val="0"/>
+              </a:spcAft>
+              <a:buClr>
+                <a:srgbClr val="000000"/>
+              </a:buClr>
+              <a:buSzPts val="1400"/>
+              <a:buFont typeface="Arial"/>
               <a:buNone/>
             </a:pPr>
             <a:r>
               <a:t/>
             </a:r>
-            <a:endParaRPr/>
+            <a:endParaRPr b="0" i="0" sz="1400" u="none" cap="none" strike="noStrike">
+              <a:solidFill>
+                <a:srgbClr val="000000"/>
+              </a:solidFill>
+              <a:latin typeface="Arial"/>
+              <a:ea typeface="Arial"/>
+              <a:cs typeface="Arial"/>
+              <a:sym typeface="Arial"/>
+            </a:endParaRPr>
           </a:p>
         </p:txBody>
       </p:sp>
@@ -19739,6 +21799,9 @@
           <a:lstStyle/>
           <a:p>
             <a:pPr indent="0" lvl="0" marL="0" marR="0" rtl="0" algn="ctr">
+              <a:lnSpc>
+                <a:spcPct val="100000"/>
+              </a:lnSpc>
               <a:spcBef>
                 <a:spcPts val="0"/>
               </a:spcBef>
@@ -19802,6 +21865,9 @@
           <a:lstStyle/>
           <a:p>
             <a:pPr indent="0" lvl="0" marL="0" marR="0" rtl="0" algn="l">
+              <a:lnSpc>
+                <a:spcPct val="100000"/>
+              </a:lnSpc>
               <a:spcBef>
                 <a:spcPts val="0"/>
               </a:spcBef>
@@ -19872,19 +21938,35 @@
           </a:bodyPr>
           <a:lstStyle/>
           <a:p>
-            <a:pPr indent="0" lvl="0" marL="0" rtl="0" algn="l">
-              <a:spcBef>
-                <a:spcPts val="0"/>
-              </a:spcBef>
-              <a:spcAft>
-                <a:spcPts val="0"/>
-              </a:spcAft>
+            <a:pPr indent="0" lvl="0" marL="0" marR="0" rtl="0" algn="l">
+              <a:lnSpc>
+                <a:spcPct val="100000"/>
+              </a:lnSpc>
+              <a:spcBef>
+                <a:spcPts val="0"/>
+              </a:spcBef>
+              <a:spcAft>
+                <a:spcPts val="0"/>
+              </a:spcAft>
+              <a:buClr>
+                <a:srgbClr val="000000"/>
+              </a:buClr>
+              <a:buSzPts val="1400"/>
+              <a:buFont typeface="Arial"/>
               <a:buNone/>
             </a:pPr>
             <a:r>
               <a:t/>
             </a:r>
-            <a:endParaRPr/>
+            <a:endParaRPr b="0" i="0" sz="1400" u="none" cap="none" strike="noStrike">
+              <a:solidFill>
+                <a:srgbClr val="000000"/>
+              </a:solidFill>
+              <a:latin typeface="Arial"/>
+              <a:ea typeface="Arial"/>
+              <a:cs typeface="Arial"/>
+              <a:sym typeface="Arial"/>
+            </a:endParaRPr>
           </a:p>
         </p:txBody>
       </p:sp>
@@ -19914,6 +21996,9 @@
           <a:lstStyle/>
           <a:p>
             <a:pPr indent="0" lvl="0" marL="0" marR="0" rtl="0" algn="l">
+              <a:lnSpc>
+                <a:spcPct val="100000"/>
+              </a:lnSpc>
               <a:spcBef>
                 <a:spcPts val="0"/>
               </a:spcBef>
@@ -19977,6 +22062,9 @@
           <a:lstStyle/>
           <a:p>
             <a:pPr indent="0" lvl="0" marL="0" marR="0" rtl="0" algn="l">
+              <a:lnSpc>
+                <a:spcPct val="100000"/>
+              </a:lnSpc>
               <a:spcBef>
                 <a:spcPts val="0"/>
               </a:spcBef>
@@ -20054,19 +22142,35 @@
           </a:bodyPr>
           <a:lstStyle/>
           <a:p>
-            <a:pPr indent="0" lvl="0" marL="0" rtl="0" algn="l">
-              <a:spcBef>
-                <a:spcPts val="0"/>
-              </a:spcBef>
-              <a:spcAft>
-                <a:spcPts val="0"/>
-              </a:spcAft>
+            <a:pPr indent="0" lvl="0" marL="0" marR="0" rtl="0" algn="l">
+              <a:lnSpc>
+                <a:spcPct val="100000"/>
+              </a:lnSpc>
+              <a:spcBef>
+                <a:spcPts val="0"/>
+              </a:spcBef>
+              <a:spcAft>
+                <a:spcPts val="0"/>
+              </a:spcAft>
+              <a:buClr>
+                <a:srgbClr val="000000"/>
+              </a:buClr>
+              <a:buSzPts val="1400"/>
+              <a:buFont typeface="Arial"/>
               <a:buNone/>
             </a:pPr>
             <a:r>
               <a:t/>
             </a:r>
-            <a:endParaRPr/>
+            <a:endParaRPr b="0" i="0" sz="1400" u="none" cap="none" strike="noStrike">
+              <a:solidFill>
+                <a:srgbClr val="000000"/>
+              </a:solidFill>
+              <a:latin typeface="Arial"/>
+              <a:ea typeface="Arial"/>
+              <a:cs typeface="Arial"/>
+              <a:sym typeface="Arial"/>
+            </a:endParaRPr>
           </a:p>
         </p:txBody>
       </p:sp>
@@ -20103,19 +22207,35 @@
           </a:bodyPr>
           <a:lstStyle/>
           <a:p>
-            <a:pPr indent="0" lvl="0" marL="0" rtl="0" algn="l">
-              <a:spcBef>
-                <a:spcPts val="0"/>
-              </a:spcBef>
-              <a:spcAft>
-                <a:spcPts val="0"/>
-              </a:spcAft>
+            <a:pPr indent="0" lvl="0" marL="0" marR="0" rtl="0" algn="l">
+              <a:lnSpc>
+                <a:spcPct val="100000"/>
+              </a:lnSpc>
+              <a:spcBef>
+                <a:spcPts val="0"/>
+              </a:spcBef>
+              <a:spcAft>
+                <a:spcPts val="0"/>
+              </a:spcAft>
+              <a:buClr>
+                <a:srgbClr val="000000"/>
+              </a:buClr>
+              <a:buSzPts val="1400"/>
+              <a:buFont typeface="Arial"/>
               <a:buNone/>
             </a:pPr>
             <a:r>
               <a:t/>
             </a:r>
-            <a:endParaRPr/>
+            <a:endParaRPr b="0" i="0" sz="1400" u="none" cap="none" strike="noStrike">
+              <a:solidFill>
+                <a:srgbClr val="000000"/>
+              </a:solidFill>
+              <a:latin typeface="Arial"/>
+              <a:ea typeface="Arial"/>
+              <a:cs typeface="Arial"/>
+              <a:sym typeface="Arial"/>
+            </a:endParaRPr>
           </a:p>
         </p:txBody>
       </p:sp>
@@ -20145,6 +22265,9 @@
           <a:lstStyle/>
           <a:p>
             <a:pPr indent="0" lvl="0" marL="0" marR="0" rtl="0" algn="ctr">
+              <a:lnSpc>
+                <a:spcPct val="100000"/>
+              </a:lnSpc>
               <a:spcBef>
                 <a:spcPts val="0"/>
               </a:spcBef>
@@ -20208,6 +22331,9 @@
           <a:lstStyle/>
           <a:p>
             <a:pPr indent="0" lvl="0" marL="0" marR="0" rtl="0" algn="l">
+              <a:lnSpc>
+                <a:spcPct val="100000"/>
+              </a:lnSpc>
               <a:spcBef>
                 <a:spcPts val="0"/>
               </a:spcBef>
@@ -20278,19 +22404,35 @@
           </a:bodyPr>
           <a:lstStyle/>
           <a:p>
-            <a:pPr indent="0" lvl="0" marL="0" rtl="0" algn="l">
-              <a:spcBef>
-                <a:spcPts val="0"/>
-              </a:spcBef>
-              <a:spcAft>
-                <a:spcPts val="0"/>
-              </a:spcAft>
+            <a:pPr indent="0" lvl="0" marL="0" marR="0" rtl="0" algn="l">
+              <a:lnSpc>
+                <a:spcPct val="100000"/>
+              </a:lnSpc>
+              <a:spcBef>
+                <a:spcPts val="0"/>
+              </a:spcBef>
+              <a:spcAft>
+                <a:spcPts val="0"/>
+              </a:spcAft>
+              <a:buClr>
+                <a:srgbClr val="000000"/>
+              </a:buClr>
+              <a:buSzPts val="1400"/>
+              <a:buFont typeface="Arial"/>
               <a:buNone/>
             </a:pPr>
             <a:r>
               <a:t/>
             </a:r>
-            <a:endParaRPr/>
+            <a:endParaRPr b="0" i="0" sz="1400" u="none" cap="none" strike="noStrike">
+              <a:solidFill>
+                <a:srgbClr val="000000"/>
+              </a:solidFill>
+              <a:latin typeface="Arial"/>
+              <a:ea typeface="Arial"/>
+              <a:cs typeface="Arial"/>
+              <a:sym typeface="Arial"/>
+            </a:endParaRPr>
           </a:p>
         </p:txBody>
       </p:sp>
@@ -20320,6 +22462,9 @@
           <a:lstStyle/>
           <a:p>
             <a:pPr indent="0" lvl="0" marL="0" marR="0" rtl="0" algn="l">
+              <a:lnSpc>
+                <a:spcPct val="100000"/>
+              </a:lnSpc>
               <a:spcBef>
                 <a:spcPts val="0"/>
               </a:spcBef>
@@ -20383,6 +22528,9 @@
           <a:lstStyle/>
           <a:p>
             <a:pPr indent="0" lvl="0" marL="0" marR="0" rtl="0" algn="l">
+              <a:lnSpc>
+                <a:spcPct val="100000"/>
+              </a:lnSpc>
               <a:spcBef>
                 <a:spcPts val="0"/>
               </a:spcBef>
@@ -20460,19 +22608,35 @@
           </a:bodyPr>
           <a:lstStyle/>
           <a:p>
-            <a:pPr indent="0" lvl="0" marL="0" rtl="0" algn="l">
-              <a:spcBef>
-                <a:spcPts val="0"/>
-              </a:spcBef>
-              <a:spcAft>
-                <a:spcPts val="0"/>
-              </a:spcAft>
+            <a:pPr indent="0" lvl="0" marL="0" marR="0" rtl="0" algn="l">
+              <a:lnSpc>
+                <a:spcPct val="100000"/>
+              </a:lnSpc>
+              <a:spcBef>
+                <a:spcPts val="0"/>
+              </a:spcBef>
+              <a:spcAft>
+                <a:spcPts val="0"/>
+              </a:spcAft>
+              <a:buClr>
+                <a:srgbClr val="000000"/>
+              </a:buClr>
+              <a:buSzPts val="1400"/>
+              <a:buFont typeface="Arial"/>
               <a:buNone/>
             </a:pPr>
             <a:r>
               <a:t/>
             </a:r>
-            <a:endParaRPr/>
+            <a:endParaRPr b="0" i="0" sz="1400" u="none" cap="none" strike="noStrike">
+              <a:solidFill>
+                <a:srgbClr val="000000"/>
+              </a:solidFill>
+              <a:latin typeface="Arial"/>
+              <a:ea typeface="Arial"/>
+              <a:cs typeface="Arial"/>
+              <a:sym typeface="Arial"/>
+            </a:endParaRPr>
           </a:p>
         </p:txBody>
       </p:sp>
@@ -20509,19 +22673,35 @@
           </a:bodyPr>
           <a:lstStyle/>
           <a:p>
-            <a:pPr indent="0" lvl="0" marL="0" rtl="0" algn="l">
-              <a:spcBef>
-                <a:spcPts val="0"/>
-              </a:spcBef>
-              <a:spcAft>
-                <a:spcPts val="0"/>
-              </a:spcAft>
+            <a:pPr indent="0" lvl="0" marL="0" marR="0" rtl="0" algn="l">
+              <a:lnSpc>
+                <a:spcPct val="100000"/>
+              </a:lnSpc>
+              <a:spcBef>
+                <a:spcPts val="0"/>
+              </a:spcBef>
+              <a:spcAft>
+                <a:spcPts val="0"/>
+              </a:spcAft>
+              <a:buClr>
+                <a:srgbClr val="000000"/>
+              </a:buClr>
+              <a:buSzPts val="1400"/>
+              <a:buFont typeface="Arial"/>
               <a:buNone/>
             </a:pPr>
             <a:r>
               <a:t/>
             </a:r>
-            <a:endParaRPr/>
+            <a:endParaRPr b="0" i="0" sz="1400" u="none" cap="none" strike="noStrike">
+              <a:solidFill>
+                <a:srgbClr val="000000"/>
+              </a:solidFill>
+              <a:latin typeface="Arial"/>
+              <a:ea typeface="Arial"/>
+              <a:cs typeface="Arial"/>
+              <a:sym typeface="Arial"/>
+            </a:endParaRPr>
           </a:p>
         </p:txBody>
       </p:sp>
@@ -20551,6 +22731,9 @@
           <a:lstStyle/>
           <a:p>
             <a:pPr indent="0" lvl="0" marL="0" marR="0" rtl="0" algn="ctr">
+              <a:lnSpc>
+                <a:spcPct val="100000"/>
+              </a:lnSpc>
               <a:spcBef>
                 <a:spcPts val="0"/>
               </a:spcBef>
@@ -20614,6 +22797,9 @@
           <a:lstStyle/>
           <a:p>
             <a:pPr indent="0" lvl="0" marL="0" marR="0" rtl="0" algn="l">
+              <a:lnSpc>
+                <a:spcPct val="100000"/>
+              </a:lnSpc>
               <a:spcBef>
                 <a:spcPts val="0"/>
               </a:spcBef>
@@ -20684,19 +22870,35 @@
           </a:bodyPr>
           <a:lstStyle/>
           <a:p>
-            <a:pPr indent="0" lvl="0" marL="0" rtl="0" algn="l">
-              <a:spcBef>
-                <a:spcPts val="0"/>
-              </a:spcBef>
-              <a:spcAft>
-                <a:spcPts val="0"/>
-              </a:spcAft>
+            <a:pPr indent="0" lvl="0" marL="0" marR="0" rtl="0" algn="l">
+              <a:lnSpc>
+                <a:spcPct val="100000"/>
+              </a:lnSpc>
+              <a:spcBef>
+                <a:spcPts val="0"/>
+              </a:spcBef>
+              <a:spcAft>
+                <a:spcPts val="0"/>
+              </a:spcAft>
+              <a:buClr>
+                <a:srgbClr val="000000"/>
+              </a:buClr>
+              <a:buSzPts val="1400"/>
+              <a:buFont typeface="Arial"/>
               <a:buNone/>
             </a:pPr>
             <a:r>
               <a:t/>
             </a:r>
-            <a:endParaRPr/>
+            <a:endParaRPr b="0" i="0" sz="1400" u="none" cap="none" strike="noStrike">
+              <a:solidFill>
+                <a:srgbClr val="000000"/>
+              </a:solidFill>
+              <a:latin typeface="Arial"/>
+              <a:ea typeface="Arial"/>
+              <a:cs typeface="Arial"/>
+              <a:sym typeface="Arial"/>
+            </a:endParaRPr>
           </a:p>
         </p:txBody>
       </p:sp>
@@ -20726,6 +22928,9 @@
           <a:lstStyle/>
           <a:p>
             <a:pPr indent="0" lvl="0" marL="0" marR="0" rtl="0" algn="l">
+              <a:lnSpc>
+                <a:spcPct val="100000"/>
+              </a:lnSpc>
               <a:spcBef>
                 <a:spcPts val="0"/>
               </a:spcBef>
@@ -20789,6 +22994,9 @@
           <a:lstStyle/>
           <a:p>
             <a:pPr indent="0" lvl="0" marL="0" marR="0" rtl="0" algn="l">
+              <a:lnSpc>
+                <a:spcPct val="100000"/>
+              </a:lnSpc>
               <a:spcBef>
                 <a:spcPts val="0"/>
               </a:spcBef>
